--- a/02.Various_Models_&_parameters_14_March/LangChain_Part2_Implementations.pptx
+++ b/02.Various_Models_&_parameters_14_March/LangChain_Part2_Implementations.pptx
@@ -320,7 +320,7 @@
             <a:pPr algn="r">
               <a:buNone/>
             </a:pPr>
-            <a:fld id="{E2CF01E0-CE17-43B3-858E-2ECC7E684CEF}" type="slidenum">
+            <a:fld id="{19378963-B180-4053-807E-3EF44B8633FB}" type="slidenum">
               <a:rPr b="0" lang="en-IN" sz="1400" spc="-1" strike="noStrike">
                 <a:latin typeface="Times New Roman"/>
               </a:rPr>
@@ -368,7 +368,7 @@
         <p:spPr>
           <a:xfrm>
             <a:off x="685800" y="1143000"/>
-            <a:ext cx="5485320" cy="3085200"/>
+            <a:ext cx="5484960" cy="3084840"/>
           </a:xfrm>
           <a:prstGeom prst="rect">
             <a:avLst/>
@@ -391,7 +391,7 @@
         <p:spPr>
           <a:xfrm>
             <a:off x="685800" y="4400640"/>
-            <a:ext cx="5485320" cy="3599280"/>
+            <a:ext cx="5484960" cy="3598920"/>
           </a:xfrm>
           <a:prstGeom prst="rect">
             <a:avLst/>
@@ -425,7 +425,7 @@
         <p:spPr>
           <a:xfrm>
             <a:off x="3884760" y="8685360"/>
-            <a:ext cx="2970720" cy="457560"/>
+            <a:ext cx="2970360" cy="457200"/>
           </a:xfrm>
           <a:prstGeom prst="rect">
             <a:avLst/>
@@ -461,7 +461,7 @@
               </a:lnSpc>
               <a:buNone/>
             </a:pPr>
-            <a:fld id="{A22641CE-A063-4F21-A700-C41FED904F80}" type="slidenum">
+            <a:fld id="{E4A90A82-AED5-40A1-AC36-41084250943E}" type="slidenum">
               <a:rPr b="0" lang="en-US" sz="1200" spc="-1" strike="noStrike">
                 <a:solidFill>
                   <a:srgbClr val="000000"/>
@@ -512,7 +512,7 @@
         <p:spPr>
           <a:xfrm>
             <a:off x="685800" y="1143000"/>
-            <a:ext cx="5485320" cy="3085200"/>
+            <a:ext cx="5484960" cy="3084840"/>
           </a:xfrm>
           <a:prstGeom prst="rect">
             <a:avLst/>
@@ -535,7 +535,7 @@
         <p:spPr>
           <a:xfrm>
             <a:off x="685800" y="4400640"/>
-            <a:ext cx="5485320" cy="3599280"/>
+            <a:ext cx="5484960" cy="3598920"/>
           </a:xfrm>
           <a:prstGeom prst="rect">
             <a:avLst/>
@@ -569,7 +569,7 @@
         <p:spPr>
           <a:xfrm>
             <a:off x="3884760" y="8685360"/>
-            <a:ext cx="2970720" cy="457560"/>
+            <a:ext cx="2970360" cy="457200"/>
           </a:xfrm>
           <a:prstGeom prst="rect">
             <a:avLst/>
@@ -605,7 +605,7 @@
               </a:lnSpc>
               <a:buNone/>
             </a:pPr>
-            <a:fld id="{13F88CF6-4192-4B40-B4FD-9B3A2F5C5088}" type="slidenum">
+            <a:fld id="{12B0161C-8A62-4132-A25E-A3867276E500}" type="slidenum">
               <a:rPr b="0" lang="en-US" sz="1200" spc="-1" strike="noStrike">
                 <a:solidFill>
                   <a:srgbClr val="000000"/>
@@ -656,7 +656,7 @@
         <p:spPr>
           <a:xfrm>
             <a:off x="685800" y="1143000"/>
-            <a:ext cx="5485320" cy="3085200"/>
+            <a:ext cx="5484960" cy="3084840"/>
           </a:xfrm>
           <a:prstGeom prst="rect">
             <a:avLst/>
@@ -679,7 +679,7 @@
         <p:spPr>
           <a:xfrm>
             <a:off x="685800" y="4400640"/>
-            <a:ext cx="5485320" cy="3599280"/>
+            <a:ext cx="5484960" cy="3598920"/>
           </a:xfrm>
           <a:prstGeom prst="rect">
             <a:avLst/>
@@ -713,7 +713,7 @@
         <p:spPr>
           <a:xfrm>
             <a:off x="3884760" y="8685360"/>
-            <a:ext cx="2970720" cy="457560"/>
+            <a:ext cx="2970360" cy="457200"/>
           </a:xfrm>
           <a:prstGeom prst="rect">
             <a:avLst/>
@@ -749,7 +749,7 @@
               </a:lnSpc>
               <a:buNone/>
             </a:pPr>
-            <a:fld id="{03CDFBB1-0B50-4BFB-94C5-100F4FAA112E}" type="slidenum">
+            <a:fld id="{40DD8973-3A6C-4D3A-8BBB-5DFAC823339D}" type="slidenum">
               <a:rPr b="0" lang="en-US" sz="1200" spc="-1" strike="noStrike">
                 <a:solidFill>
                   <a:srgbClr val="000000"/>
@@ -800,7 +800,7 @@
         <p:spPr>
           <a:xfrm>
             <a:off x="685800" y="1143000"/>
-            <a:ext cx="5485320" cy="3085200"/>
+            <a:ext cx="5484960" cy="3084840"/>
           </a:xfrm>
           <a:prstGeom prst="rect">
             <a:avLst/>
@@ -823,7 +823,7 @@
         <p:spPr>
           <a:xfrm>
             <a:off x="685800" y="4400640"/>
-            <a:ext cx="5485320" cy="3599280"/>
+            <a:ext cx="5484960" cy="3598920"/>
           </a:xfrm>
           <a:prstGeom prst="rect">
             <a:avLst/>
@@ -857,7 +857,7 @@
         <p:spPr>
           <a:xfrm>
             <a:off x="3884760" y="8685360"/>
-            <a:ext cx="2970720" cy="457560"/>
+            <a:ext cx="2970360" cy="457200"/>
           </a:xfrm>
           <a:prstGeom prst="rect">
             <a:avLst/>
@@ -893,7 +893,7 @@
               </a:lnSpc>
               <a:buNone/>
             </a:pPr>
-            <a:fld id="{F4EDE64C-26E7-4EF5-9D3A-B0CB20A557AE}" type="slidenum">
+            <a:fld id="{287143D5-09FB-436D-A49E-D4EC4A2C0EE2}" type="slidenum">
               <a:rPr b="0" lang="en-US" sz="1200" spc="-1" strike="noStrike">
                 <a:solidFill>
                   <a:srgbClr val="000000"/>
@@ -944,7 +944,7 @@
         <p:spPr>
           <a:xfrm>
             <a:off x="685800" y="1143000"/>
-            <a:ext cx="5485320" cy="3085200"/>
+            <a:ext cx="5484960" cy="3084840"/>
           </a:xfrm>
           <a:prstGeom prst="rect">
             <a:avLst/>
@@ -967,7 +967,7 @@
         <p:spPr>
           <a:xfrm>
             <a:off x="685800" y="4400640"/>
-            <a:ext cx="5485320" cy="3599280"/>
+            <a:ext cx="5484960" cy="3598920"/>
           </a:xfrm>
           <a:prstGeom prst="rect">
             <a:avLst/>
@@ -1001,7 +1001,7 @@
         <p:spPr>
           <a:xfrm>
             <a:off x="3884760" y="8685360"/>
-            <a:ext cx="2970720" cy="457560"/>
+            <a:ext cx="2970360" cy="457200"/>
           </a:xfrm>
           <a:prstGeom prst="rect">
             <a:avLst/>
@@ -1037,7 +1037,7 @@
               </a:lnSpc>
               <a:buNone/>
             </a:pPr>
-            <a:fld id="{7A1E3E9E-423C-4F7F-BEDC-54AAF49DE465}" type="slidenum">
+            <a:fld id="{F91DFCA5-3F84-491A-A7A9-918F23C47CF8}" type="slidenum">
               <a:rPr b="0" lang="en-US" sz="1200" spc="-1" strike="noStrike">
                 <a:solidFill>
                   <a:srgbClr val="000000"/>
@@ -1088,7 +1088,7 @@
         <p:spPr>
           <a:xfrm>
             <a:off x="685800" y="1143000"/>
-            <a:ext cx="5485320" cy="3085200"/>
+            <a:ext cx="5484960" cy="3084840"/>
           </a:xfrm>
           <a:prstGeom prst="rect">
             <a:avLst/>
@@ -1111,7 +1111,7 @@
         <p:spPr>
           <a:xfrm>
             <a:off x="685800" y="4400640"/>
-            <a:ext cx="5485320" cy="3599280"/>
+            <a:ext cx="5484960" cy="3598920"/>
           </a:xfrm>
           <a:prstGeom prst="rect">
             <a:avLst/>
@@ -1145,7 +1145,7 @@
         <p:spPr>
           <a:xfrm>
             <a:off x="3884760" y="8685360"/>
-            <a:ext cx="2970720" cy="457560"/>
+            <a:ext cx="2970360" cy="457200"/>
           </a:xfrm>
           <a:prstGeom prst="rect">
             <a:avLst/>
@@ -1181,7 +1181,7 @@
               </a:lnSpc>
               <a:buNone/>
             </a:pPr>
-            <a:fld id="{7CC604F3-DB2E-4359-9A22-969A66513CD4}" type="slidenum">
+            <a:fld id="{1B00F04D-E2DB-4DCC-8C4C-BFE4D6FBAD2D}" type="slidenum">
               <a:rPr b="0" lang="en-US" sz="1200" spc="-1" strike="noStrike">
                 <a:solidFill>
                   <a:srgbClr val="000000"/>
@@ -1232,7 +1232,7 @@
         <p:spPr>
           <a:xfrm>
             <a:off x="685800" y="1143000"/>
-            <a:ext cx="5485320" cy="3085200"/>
+            <a:ext cx="5484960" cy="3084840"/>
           </a:xfrm>
           <a:prstGeom prst="rect">
             <a:avLst/>
@@ -1255,7 +1255,7 @@
         <p:spPr>
           <a:xfrm>
             <a:off x="685800" y="4400640"/>
-            <a:ext cx="5485320" cy="3599280"/>
+            <a:ext cx="5484960" cy="3598920"/>
           </a:xfrm>
           <a:prstGeom prst="rect">
             <a:avLst/>
@@ -1289,7 +1289,7 @@
         <p:spPr>
           <a:xfrm>
             <a:off x="3884760" y="8685360"/>
-            <a:ext cx="2970720" cy="457560"/>
+            <a:ext cx="2970360" cy="457200"/>
           </a:xfrm>
           <a:prstGeom prst="rect">
             <a:avLst/>
@@ -1325,7 +1325,7 @@
               </a:lnSpc>
               <a:buNone/>
             </a:pPr>
-            <a:fld id="{565BA2D6-A785-42F2-9D2E-2033106CE412}" type="slidenum">
+            <a:fld id="{C5F61AC4-F233-4E41-8A74-4B944B9C8442}" type="slidenum">
               <a:rPr b="0" lang="en-US" sz="1200" spc="-1" strike="noStrike">
                 <a:solidFill>
                   <a:srgbClr val="000000"/>
@@ -1376,7 +1376,7 @@
         <p:spPr>
           <a:xfrm>
             <a:off x="685800" y="1143000"/>
-            <a:ext cx="5485320" cy="3085200"/>
+            <a:ext cx="5484960" cy="3084840"/>
           </a:xfrm>
           <a:prstGeom prst="rect">
             <a:avLst/>
@@ -1399,7 +1399,7 @@
         <p:spPr>
           <a:xfrm>
             <a:off x="685800" y="4400640"/>
-            <a:ext cx="5485320" cy="3599280"/>
+            <a:ext cx="5484960" cy="3598920"/>
           </a:xfrm>
           <a:prstGeom prst="rect">
             <a:avLst/>
@@ -1433,7 +1433,7 @@
         <p:spPr>
           <a:xfrm>
             <a:off x="3884760" y="8685360"/>
-            <a:ext cx="2970720" cy="457560"/>
+            <a:ext cx="2970360" cy="457200"/>
           </a:xfrm>
           <a:prstGeom prst="rect">
             <a:avLst/>
@@ -1469,7 +1469,7 @@
               </a:lnSpc>
               <a:buNone/>
             </a:pPr>
-            <a:fld id="{9AC66649-F0C8-44A9-A66B-5D5F8FD2F1C9}" type="slidenum">
+            <a:fld id="{B8618954-A5F0-4838-983B-9B2ADE869BF3}" type="slidenum">
               <a:rPr b="0" lang="en-US" sz="1200" spc="-1" strike="noStrike">
                 <a:solidFill>
                   <a:srgbClr val="000000"/>
@@ -1520,7 +1520,7 @@
         <p:spPr>
           <a:xfrm>
             <a:off x="685800" y="1143000"/>
-            <a:ext cx="5485320" cy="3085200"/>
+            <a:ext cx="5484960" cy="3084840"/>
           </a:xfrm>
           <a:prstGeom prst="rect">
             <a:avLst/>
@@ -1543,7 +1543,7 @@
         <p:spPr>
           <a:xfrm>
             <a:off x="685800" y="4400640"/>
-            <a:ext cx="5485320" cy="3599280"/>
+            <a:ext cx="5484960" cy="3598920"/>
           </a:xfrm>
           <a:prstGeom prst="rect">
             <a:avLst/>
@@ -1577,7 +1577,7 @@
         <p:spPr>
           <a:xfrm>
             <a:off x="3884760" y="8685360"/>
-            <a:ext cx="2970720" cy="457560"/>
+            <a:ext cx="2970360" cy="457200"/>
           </a:xfrm>
           <a:prstGeom prst="rect">
             <a:avLst/>
@@ -1613,7 +1613,7 @@
               </a:lnSpc>
               <a:buNone/>
             </a:pPr>
-            <a:fld id="{1B552602-9F08-4D5B-A73F-6FB3E9C7D443}" type="slidenum">
+            <a:fld id="{67E0C8D0-6ABB-4265-ADA3-5B314352AEBF}" type="slidenum">
               <a:rPr b="0" lang="en-US" sz="1200" spc="-1" strike="noStrike">
                 <a:solidFill>
                   <a:srgbClr val="000000"/>
@@ -1664,7 +1664,7 @@
         <p:spPr>
           <a:xfrm>
             <a:off x="685800" y="1143000"/>
-            <a:ext cx="5485320" cy="3085200"/>
+            <a:ext cx="5484960" cy="3084840"/>
           </a:xfrm>
           <a:prstGeom prst="rect">
             <a:avLst/>
@@ -1687,7 +1687,7 @@
         <p:spPr>
           <a:xfrm>
             <a:off x="685800" y="4400640"/>
-            <a:ext cx="5485320" cy="3599280"/>
+            <a:ext cx="5484960" cy="3598920"/>
           </a:xfrm>
           <a:prstGeom prst="rect">
             <a:avLst/>
@@ -1721,7 +1721,7 @@
         <p:spPr>
           <a:xfrm>
             <a:off x="3884760" y="8685360"/>
-            <a:ext cx="2970720" cy="457560"/>
+            <a:ext cx="2970360" cy="457200"/>
           </a:xfrm>
           <a:prstGeom prst="rect">
             <a:avLst/>
@@ -1757,7 +1757,7 @@
               </a:lnSpc>
               <a:buNone/>
             </a:pPr>
-            <a:fld id="{6804DF25-2A04-41D4-BB4A-7E25CF9E7110}" type="slidenum">
+            <a:fld id="{49082FBE-83D2-46C6-B0C3-CC179E6976D8}" type="slidenum">
               <a:rPr b="0" lang="en-US" sz="1200" spc="-1" strike="noStrike">
                 <a:solidFill>
                   <a:srgbClr val="000000"/>
@@ -1808,7 +1808,7 @@
         <p:spPr>
           <a:xfrm>
             <a:off x="685800" y="1143000"/>
-            <a:ext cx="5485320" cy="3085200"/>
+            <a:ext cx="5484960" cy="3084840"/>
           </a:xfrm>
           <a:prstGeom prst="rect">
             <a:avLst/>
@@ -1831,7 +1831,7 @@
         <p:spPr>
           <a:xfrm>
             <a:off x="685800" y="4400640"/>
-            <a:ext cx="5485320" cy="3599280"/>
+            <a:ext cx="5484960" cy="3598920"/>
           </a:xfrm>
           <a:prstGeom prst="rect">
             <a:avLst/>
@@ -1865,7 +1865,7 @@
         <p:spPr>
           <a:xfrm>
             <a:off x="3884760" y="8685360"/>
-            <a:ext cx="2970720" cy="457560"/>
+            <a:ext cx="2970360" cy="457200"/>
           </a:xfrm>
           <a:prstGeom prst="rect">
             <a:avLst/>
@@ -1901,7 +1901,7 @@
               </a:lnSpc>
               <a:buNone/>
             </a:pPr>
-            <a:fld id="{64E63CF1-F374-4C62-B9CD-196C69589B73}" type="slidenum">
+            <a:fld id="{AC9C846A-3600-40BB-A454-50D3EEC11BE5}" type="slidenum">
               <a:rPr b="0" lang="en-US" sz="1200" spc="-1" strike="noStrike">
                 <a:solidFill>
                   <a:srgbClr val="000000"/>
@@ -1952,7 +1952,7 @@
         <p:spPr>
           <a:xfrm>
             <a:off x="685800" y="1143000"/>
-            <a:ext cx="5484960" cy="3084840"/>
+            <a:ext cx="5484600" cy="3084480"/>
           </a:xfrm>
           <a:prstGeom prst="rect">
             <a:avLst/>
@@ -1975,7 +1975,7 @@
         <p:spPr>
           <a:xfrm>
             <a:off x="685800" y="4400640"/>
-            <a:ext cx="5484960" cy="3598920"/>
+            <a:ext cx="5484600" cy="3598560"/>
           </a:xfrm>
           <a:prstGeom prst="rect">
             <a:avLst/>
@@ -2009,7 +2009,7 @@
         <p:spPr>
           <a:xfrm>
             <a:off x="3884760" y="8685360"/>
-            <a:ext cx="2970360" cy="457200"/>
+            <a:ext cx="2970000" cy="456840"/>
           </a:xfrm>
           <a:prstGeom prst="rect">
             <a:avLst/>
@@ -2045,7 +2045,7 @@
               </a:lnSpc>
               <a:buNone/>
             </a:pPr>
-            <a:fld id="{001CCC34-A591-4EF0-BA12-ECDD5B55DE0D}" type="slidenum">
+            <a:fld id="{A5B532D4-0498-448B-A971-6DDDECE91026}" type="slidenum">
               <a:rPr b="0" lang="en-US" sz="1200" spc="-1" strike="noStrike">
                 <a:solidFill>
                   <a:srgbClr val="000000"/>
@@ -2096,7 +2096,7 @@
         <p:spPr>
           <a:xfrm>
             <a:off x="685800" y="1143000"/>
-            <a:ext cx="5485320" cy="3085200"/>
+            <a:ext cx="5484960" cy="3084840"/>
           </a:xfrm>
           <a:prstGeom prst="rect">
             <a:avLst/>
@@ -2119,7 +2119,7 @@
         <p:spPr>
           <a:xfrm>
             <a:off x="685800" y="4400640"/>
-            <a:ext cx="5485320" cy="3599280"/>
+            <a:ext cx="5484960" cy="3598920"/>
           </a:xfrm>
           <a:prstGeom prst="rect">
             <a:avLst/>
@@ -2153,7 +2153,7 @@
         <p:spPr>
           <a:xfrm>
             <a:off x="3884760" y="8685360"/>
-            <a:ext cx="2970720" cy="457560"/>
+            <a:ext cx="2970360" cy="457200"/>
           </a:xfrm>
           <a:prstGeom prst="rect">
             <a:avLst/>
@@ -2189,7 +2189,7 @@
               </a:lnSpc>
               <a:buNone/>
             </a:pPr>
-            <a:fld id="{3082DE5B-8DC1-4EA7-8CED-DD5BD25CEBF3}" type="slidenum">
+            <a:fld id="{0DC039C1-CA21-49CA-82C8-F874A41ABA76}" type="slidenum">
               <a:rPr b="0" lang="en-US" sz="1200" spc="-1" strike="noStrike">
                 <a:solidFill>
                   <a:srgbClr val="000000"/>
@@ -2240,7 +2240,7 @@
         <p:spPr>
           <a:xfrm>
             <a:off x="685800" y="1143000"/>
-            <a:ext cx="5485320" cy="3085200"/>
+            <a:ext cx="5484960" cy="3084840"/>
           </a:xfrm>
           <a:prstGeom prst="rect">
             <a:avLst/>
@@ -2263,7 +2263,7 @@
         <p:spPr>
           <a:xfrm>
             <a:off x="685800" y="4400640"/>
-            <a:ext cx="5485320" cy="3599280"/>
+            <a:ext cx="5484960" cy="3598920"/>
           </a:xfrm>
           <a:prstGeom prst="rect">
             <a:avLst/>
@@ -2297,7 +2297,7 @@
         <p:spPr>
           <a:xfrm>
             <a:off x="3884760" y="8685360"/>
-            <a:ext cx="2970720" cy="457560"/>
+            <a:ext cx="2970360" cy="457200"/>
           </a:xfrm>
           <a:prstGeom prst="rect">
             <a:avLst/>
@@ -2333,7 +2333,7 @@
               </a:lnSpc>
               <a:buNone/>
             </a:pPr>
-            <a:fld id="{B3FAC9E1-C025-452B-A397-E51A1AD94A75}" type="slidenum">
+            <a:fld id="{EF5076CA-19E8-44A7-BEFC-D42D2B06912D}" type="slidenum">
               <a:rPr b="0" lang="en-US" sz="1200" spc="-1" strike="noStrike">
                 <a:solidFill>
                   <a:srgbClr val="000000"/>
@@ -2384,7 +2384,7 @@
         <p:spPr>
           <a:xfrm>
             <a:off x="685800" y="1143000"/>
-            <a:ext cx="5485320" cy="3085200"/>
+            <a:ext cx="5484960" cy="3084840"/>
           </a:xfrm>
           <a:prstGeom prst="rect">
             <a:avLst/>
@@ -2407,7 +2407,7 @@
         <p:spPr>
           <a:xfrm>
             <a:off x="685800" y="4400640"/>
-            <a:ext cx="5485320" cy="3599280"/>
+            <a:ext cx="5484960" cy="3598920"/>
           </a:xfrm>
           <a:prstGeom prst="rect">
             <a:avLst/>
@@ -2441,7 +2441,7 @@
         <p:spPr>
           <a:xfrm>
             <a:off x="3884760" y="8685360"/>
-            <a:ext cx="2970720" cy="457560"/>
+            <a:ext cx="2970360" cy="457200"/>
           </a:xfrm>
           <a:prstGeom prst="rect">
             <a:avLst/>
@@ -2477,7 +2477,7 @@
               </a:lnSpc>
               <a:buNone/>
             </a:pPr>
-            <a:fld id="{2EA0EC22-3DFF-48C9-8EB7-883EC24314C6}" type="slidenum">
+            <a:fld id="{D4C65414-5F44-4685-9A03-732D435EAD14}" type="slidenum">
               <a:rPr b="0" lang="en-US" sz="1200" spc="-1" strike="noStrike">
                 <a:solidFill>
                   <a:srgbClr val="000000"/>
@@ -2528,7 +2528,7 @@
         <p:spPr>
           <a:xfrm>
             <a:off x="685800" y="1143000"/>
-            <a:ext cx="5485320" cy="3085200"/>
+            <a:ext cx="5484960" cy="3084840"/>
           </a:xfrm>
           <a:prstGeom prst="rect">
             <a:avLst/>
@@ -2551,7 +2551,7 @@
         <p:spPr>
           <a:xfrm>
             <a:off x="685800" y="4400640"/>
-            <a:ext cx="5485320" cy="3599280"/>
+            <a:ext cx="5484960" cy="3598920"/>
           </a:xfrm>
           <a:prstGeom prst="rect">
             <a:avLst/>
@@ -2585,7 +2585,7 @@
         <p:spPr>
           <a:xfrm>
             <a:off x="3884760" y="8685360"/>
-            <a:ext cx="2970720" cy="457560"/>
+            <a:ext cx="2970360" cy="457200"/>
           </a:xfrm>
           <a:prstGeom prst="rect">
             <a:avLst/>
@@ -2621,7 +2621,7 @@
               </a:lnSpc>
               <a:buNone/>
             </a:pPr>
-            <a:fld id="{2CDBE883-56FA-4D8C-B947-B57DD5FB0C86}" type="slidenum">
+            <a:fld id="{CEB91F83-7314-4251-AB7E-5863E05C7D58}" type="slidenum">
               <a:rPr b="0" lang="en-US" sz="1200" spc="-1" strike="noStrike">
                 <a:solidFill>
                   <a:srgbClr val="000000"/>
@@ -2672,7 +2672,7 @@
         <p:spPr>
           <a:xfrm>
             <a:off x="685800" y="1143000"/>
-            <a:ext cx="5485320" cy="3085200"/>
+            <a:ext cx="5484960" cy="3084840"/>
           </a:xfrm>
           <a:prstGeom prst="rect">
             <a:avLst/>
@@ -2695,7 +2695,7 @@
         <p:spPr>
           <a:xfrm>
             <a:off x="685800" y="4400640"/>
-            <a:ext cx="5485320" cy="3599280"/>
+            <a:ext cx="5484960" cy="3598920"/>
           </a:xfrm>
           <a:prstGeom prst="rect">
             <a:avLst/>
@@ -2729,7 +2729,7 @@
         <p:spPr>
           <a:xfrm>
             <a:off x="3884760" y="8685360"/>
-            <a:ext cx="2970720" cy="457560"/>
+            <a:ext cx="2970360" cy="457200"/>
           </a:xfrm>
           <a:prstGeom prst="rect">
             <a:avLst/>
@@ -2765,7 +2765,7 @@
               </a:lnSpc>
               <a:buNone/>
             </a:pPr>
-            <a:fld id="{1ABD990B-7BD0-416B-80EF-74004333BAC4}" type="slidenum">
+            <a:fld id="{E01AB43D-7FF2-4802-988A-CBC41C189653}" type="slidenum">
               <a:rPr b="0" lang="en-US" sz="1200" spc="-1" strike="noStrike">
                 <a:solidFill>
                   <a:srgbClr val="000000"/>
@@ -2816,7 +2816,7 @@
         <p:spPr>
           <a:xfrm>
             <a:off x="685800" y="1143000"/>
-            <a:ext cx="5485320" cy="3085200"/>
+            <a:ext cx="5484960" cy="3084840"/>
           </a:xfrm>
           <a:prstGeom prst="rect">
             <a:avLst/>
@@ -2839,7 +2839,7 @@
         <p:spPr>
           <a:xfrm>
             <a:off x="685800" y="4400640"/>
-            <a:ext cx="5485320" cy="3599280"/>
+            <a:ext cx="5484960" cy="3598920"/>
           </a:xfrm>
           <a:prstGeom prst="rect">
             <a:avLst/>
@@ -2873,7 +2873,7 @@
         <p:spPr>
           <a:xfrm>
             <a:off x="3884760" y="8685360"/>
-            <a:ext cx="2970720" cy="457560"/>
+            <a:ext cx="2970360" cy="457200"/>
           </a:xfrm>
           <a:prstGeom prst="rect">
             <a:avLst/>
@@ -2909,7 +2909,7 @@
               </a:lnSpc>
               <a:buNone/>
             </a:pPr>
-            <a:fld id="{14AF9790-2823-4D95-9B64-B6571230484A}" type="slidenum">
+            <a:fld id="{E61BC909-8051-4258-B62B-F74A44CB2924}" type="slidenum">
               <a:rPr b="0" lang="en-US" sz="1200" spc="-1" strike="noStrike">
                 <a:solidFill>
                   <a:srgbClr val="000000"/>
@@ -2960,7 +2960,7 @@
         <p:spPr>
           <a:xfrm>
             <a:off x="685800" y="1143000"/>
-            <a:ext cx="5485320" cy="3085200"/>
+            <a:ext cx="5484960" cy="3084840"/>
           </a:xfrm>
           <a:prstGeom prst="rect">
             <a:avLst/>
@@ -2983,7 +2983,7 @@
         <p:spPr>
           <a:xfrm>
             <a:off x="685800" y="4400640"/>
-            <a:ext cx="5485320" cy="3599280"/>
+            <a:ext cx="5484960" cy="3598920"/>
           </a:xfrm>
           <a:prstGeom prst="rect">
             <a:avLst/>
@@ -3017,7 +3017,7 @@
         <p:spPr>
           <a:xfrm>
             <a:off x="3884760" y="8685360"/>
-            <a:ext cx="2970720" cy="457560"/>
+            <a:ext cx="2970360" cy="457200"/>
           </a:xfrm>
           <a:prstGeom prst="rect">
             <a:avLst/>
@@ -3053,7 +3053,7 @@
               </a:lnSpc>
               <a:buNone/>
             </a:pPr>
-            <a:fld id="{11B95AC1-85D0-404B-B023-8CFE34ECD269}" type="slidenum">
+            <a:fld id="{F75563BD-F17E-4900-BA5F-493794A420A6}" type="slidenum">
               <a:rPr b="0" lang="en-US" sz="1200" spc="-1" strike="noStrike">
                 <a:solidFill>
                   <a:srgbClr val="000000"/>
@@ -3104,7 +3104,7 @@
         <p:spPr>
           <a:xfrm>
             <a:off x="685800" y="1143000"/>
-            <a:ext cx="5485320" cy="3085200"/>
+            <a:ext cx="5484960" cy="3084840"/>
           </a:xfrm>
           <a:prstGeom prst="rect">
             <a:avLst/>
@@ -3127,7 +3127,7 @@
         <p:spPr>
           <a:xfrm>
             <a:off x="685800" y="4400640"/>
-            <a:ext cx="5485320" cy="3599280"/>
+            <a:ext cx="5484960" cy="3598920"/>
           </a:xfrm>
           <a:prstGeom prst="rect">
             <a:avLst/>
@@ -3161,7 +3161,7 @@
         <p:spPr>
           <a:xfrm>
             <a:off x="3884760" y="8685360"/>
-            <a:ext cx="2970720" cy="457560"/>
+            <a:ext cx="2970360" cy="457200"/>
           </a:xfrm>
           <a:prstGeom prst="rect">
             <a:avLst/>
@@ -3197,7 +3197,7 @@
               </a:lnSpc>
               <a:buNone/>
             </a:pPr>
-            <a:fld id="{0AB1DF99-EE15-45BF-BD10-7629C87A300B}" type="slidenum">
+            <a:fld id="{78A14F97-B183-4CE6-BEAB-468DF4AE8802}" type="slidenum">
               <a:rPr b="0" lang="en-US" sz="1200" spc="-1" strike="noStrike">
                 <a:solidFill>
                   <a:srgbClr val="000000"/>
@@ -3248,7 +3248,7 @@
         <p:spPr>
           <a:xfrm>
             <a:off x="685800" y="1143000"/>
-            <a:ext cx="5485320" cy="3085200"/>
+            <a:ext cx="5484960" cy="3084840"/>
           </a:xfrm>
           <a:prstGeom prst="rect">
             <a:avLst/>
@@ -3271,7 +3271,7 @@
         <p:spPr>
           <a:xfrm>
             <a:off x="685800" y="4400640"/>
-            <a:ext cx="5485320" cy="3599280"/>
+            <a:ext cx="5484960" cy="3598920"/>
           </a:xfrm>
           <a:prstGeom prst="rect">
             <a:avLst/>
@@ -3305,7 +3305,7 @@
         <p:spPr>
           <a:xfrm>
             <a:off x="3884760" y="8685360"/>
-            <a:ext cx="2970720" cy="457560"/>
+            <a:ext cx="2970360" cy="457200"/>
           </a:xfrm>
           <a:prstGeom prst="rect">
             <a:avLst/>
@@ -3341,7 +3341,7 @@
               </a:lnSpc>
               <a:buNone/>
             </a:pPr>
-            <a:fld id="{3E5ED88E-ED90-4FA5-8F50-11F1EA5BF5EC}" type="slidenum">
+            <a:fld id="{0AF3F49C-F3B6-4C60-91AF-533B8DBF0B6D}" type="slidenum">
               <a:rPr b="0" lang="en-US" sz="1200" spc="-1" strike="noStrike">
                 <a:solidFill>
                   <a:srgbClr val="000000"/>
@@ -3392,7 +3392,7 @@
         <p:spPr>
           <a:xfrm>
             <a:off x="685800" y="1143000"/>
-            <a:ext cx="5485320" cy="3085200"/>
+            <a:ext cx="5484960" cy="3084840"/>
           </a:xfrm>
           <a:prstGeom prst="rect">
             <a:avLst/>
@@ -3415,7 +3415,7 @@
         <p:spPr>
           <a:xfrm>
             <a:off x="685800" y="4400640"/>
-            <a:ext cx="5485320" cy="3599280"/>
+            <a:ext cx="5484960" cy="3598920"/>
           </a:xfrm>
           <a:prstGeom prst="rect">
             <a:avLst/>
@@ -3449,7 +3449,7 @@
         <p:spPr>
           <a:xfrm>
             <a:off x="3884760" y="8685360"/>
-            <a:ext cx="2970720" cy="457560"/>
+            <a:ext cx="2970360" cy="457200"/>
           </a:xfrm>
           <a:prstGeom prst="rect">
             <a:avLst/>
@@ -3485,7 +3485,7 @@
               </a:lnSpc>
               <a:buNone/>
             </a:pPr>
-            <a:fld id="{8DFCCBA5-9F98-4C05-A7FB-CE65D96ACF6F}" type="slidenum">
+            <a:fld id="{B1448D14-DA8C-4D1E-8BE6-DDBCE0A024BC}" type="slidenum">
               <a:rPr b="0" lang="en-US" sz="1200" spc="-1" strike="noStrike">
                 <a:solidFill>
                   <a:srgbClr val="000000"/>
@@ -7241,7 +7241,7 @@
         <p:spPr>
           <a:xfrm>
             <a:off x="0" y="0"/>
-            <a:ext cx="9142920" cy="5142600"/>
+            <a:ext cx="9142560" cy="5142240"/>
           </a:xfrm>
           <a:prstGeom prst="rect">
             <a:avLst/>
@@ -7272,7 +7272,7 @@
         <p:spPr>
           <a:xfrm>
             <a:off x="0" y="0"/>
-            <a:ext cx="9142920" cy="1827720"/>
+            <a:ext cx="9142560" cy="1827360"/>
           </a:xfrm>
           <a:prstGeom prst="rect">
             <a:avLst/>
@@ -7303,7 +7303,7 @@
         <p:spPr>
           <a:xfrm>
             <a:off x="6400800" y="-731520"/>
-            <a:ext cx="4113720" cy="4113720"/>
+            <a:ext cx="4113360" cy="4113360"/>
           </a:xfrm>
           <a:prstGeom prst="ellipse">
             <a:avLst/>
@@ -7338,7 +7338,7 @@
         <p:spPr>
           <a:xfrm>
             <a:off x="640080" y="274320"/>
-            <a:ext cx="2284920" cy="364680"/>
+            <a:ext cx="2284560" cy="364320"/>
           </a:xfrm>
           <a:prstGeom prst="rect">
             <a:avLst/>
@@ -7369,7 +7369,7 @@
         <p:spPr>
           <a:xfrm>
             <a:off x="640080" y="274320"/>
-            <a:ext cx="2284920" cy="364680"/>
+            <a:ext cx="2284560" cy="364320"/>
           </a:xfrm>
           <a:prstGeom prst="rect">
             <a:avLst/>
@@ -7424,7 +7424,7 @@
         <p:spPr>
           <a:xfrm>
             <a:off x="640080" y="749880"/>
-            <a:ext cx="7314120" cy="748800"/>
+            <a:ext cx="7313760" cy="748440"/>
           </a:xfrm>
           <a:prstGeom prst="rect">
             <a:avLst/>
@@ -7479,7 +7479,7 @@
         <p:spPr>
           <a:xfrm>
             <a:off x="640080" y="1444680"/>
-            <a:ext cx="7314120" cy="639000"/>
+            <a:ext cx="7313760" cy="638640"/>
           </a:xfrm>
           <a:prstGeom prst="rect">
             <a:avLst/>
@@ -7534,7 +7534,7 @@
         <p:spPr>
           <a:xfrm>
             <a:off x="640080" y="2240280"/>
-            <a:ext cx="7771320" cy="53640"/>
+            <a:ext cx="7770960" cy="53280"/>
           </a:xfrm>
           <a:prstGeom prst="rect">
             <a:avLst/>
@@ -7565,7 +7565,7 @@
         <p:spPr>
           <a:xfrm>
             <a:off x="640080" y="2377440"/>
-            <a:ext cx="7771320" cy="456120"/>
+            <a:ext cx="7770960" cy="455760"/>
           </a:xfrm>
           <a:prstGeom prst="rect">
             <a:avLst/>
@@ -7620,7 +7620,7 @@
         <p:spPr>
           <a:xfrm>
             <a:off x="640080" y="3017520"/>
-            <a:ext cx="2284920" cy="501840"/>
+            <a:ext cx="2284560" cy="501480"/>
           </a:xfrm>
           <a:prstGeom prst="rect">
             <a:avLst/>
@@ -7651,7 +7651,7 @@
         <p:spPr>
           <a:xfrm>
             <a:off x="640080" y="3017520"/>
-            <a:ext cx="2284920" cy="501840"/>
+            <a:ext cx="2284560" cy="501480"/>
           </a:xfrm>
           <a:prstGeom prst="rect">
             <a:avLst/>
@@ -7706,7 +7706,7 @@
         <p:spPr>
           <a:xfrm>
             <a:off x="3383280" y="3017520"/>
-            <a:ext cx="2284920" cy="501840"/>
+            <a:ext cx="2284560" cy="501480"/>
           </a:xfrm>
           <a:prstGeom prst="rect">
             <a:avLst/>
@@ -7737,7 +7737,7 @@
         <p:spPr>
           <a:xfrm>
             <a:off x="3383280" y="3017520"/>
-            <a:ext cx="2284920" cy="501840"/>
+            <a:ext cx="2284560" cy="501480"/>
           </a:xfrm>
           <a:prstGeom prst="rect">
             <a:avLst/>
@@ -7792,7 +7792,7 @@
         <p:spPr>
           <a:xfrm>
             <a:off x="6126480" y="3017520"/>
-            <a:ext cx="2284920" cy="501840"/>
+            <a:ext cx="2284560" cy="501480"/>
           </a:xfrm>
           <a:prstGeom prst="rect">
             <a:avLst/>
@@ -7823,7 +7823,7 @@
         <p:spPr>
           <a:xfrm>
             <a:off x="6126480" y="3017520"/>
-            <a:ext cx="2284920" cy="501840"/>
+            <a:ext cx="2284560" cy="501480"/>
           </a:xfrm>
           <a:prstGeom prst="rect">
             <a:avLst/>
@@ -7915,7 +7915,7 @@
         <p:spPr>
           <a:xfrm>
             <a:off x="0" y="0"/>
-            <a:ext cx="163440" cy="5142600"/>
+            <a:ext cx="163080" cy="5142240"/>
           </a:xfrm>
           <a:prstGeom prst="rect">
             <a:avLst/>
@@ -7946,7 +7946,7 @@
         <p:spPr>
           <a:xfrm>
             <a:off x="0" y="0"/>
-            <a:ext cx="9142920" cy="913320"/>
+            <a:ext cx="9142560" cy="912960"/>
           </a:xfrm>
           <a:prstGeom prst="rect">
             <a:avLst/>
@@ -7977,7 +7977,7 @@
         <p:spPr>
           <a:xfrm>
             <a:off x="365760" y="109800"/>
-            <a:ext cx="8228520" cy="712080"/>
+            <a:ext cx="8228160" cy="711720"/>
           </a:xfrm>
           <a:prstGeom prst="rect">
             <a:avLst/>
@@ -8032,7 +8032,7 @@
         <p:spPr>
           <a:xfrm>
             <a:off x="320040" y="1005840"/>
-            <a:ext cx="2193480" cy="437760"/>
+            <a:ext cx="2193120" cy="437400"/>
           </a:xfrm>
           <a:prstGeom prst="rect">
             <a:avLst/>
@@ -8063,7 +8063,7 @@
         <p:spPr>
           <a:xfrm>
             <a:off x="320040" y="1005840"/>
-            <a:ext cx="2193480" cy="437760"/>
+            <a:ext cx="2193120" cy="437400"/>
           </a:xfrm>
           <a:prstGeom prst="rect">
             <a:avLst/>
@@ -8118,7 +8118,7 @@
         <p:spPr>
           <a:xfrm>
             <a:off x="2606040" y="1005840"/>
-            <a:ext cx="3107880" cy="437760"/>
+            <a:ext cx="3107520" cy="437400"/>
           </a:xfrm>
           <a:prstGeom prst="rect">
             <a:avLst/>
@@ -8149,7 +8149,7 @@
         <p:spPr>
           <a:xfrm>
             <a:off x="2606040" y="1005840"/>
-            <a:ext cx="3107880" cy="437760"/>
+            <a:ext cx="3107520" cy="437400"/>
           </a:xfrm>
           <a:prstGeom prst="rect">
             <a:avLst/>
@@ -8204,7 +8204,7 @@
         <p:spPr>
           <a:xfrm>
             <a:off x="5897880" y="1005840"/>
-            <a:ext cx="3016440" cy="437760"/>
+            <a:ext cx="3016080" cy="437400"/>
           </a:xfrm>
           <a:prstGeom prst="rect">
             <a:avLst/>
@@ -8235,7 +8235,7 @@
         <p:spPr>
           <a:xfrm>
             <a:off x="5897880" y="1005840"/>
-            <a:ext cx="3016440" cy="437760"/>
+            <a:ext cx="3016080" cy="437400"/>
           </a:xfrm>
           <a:prstGeom prst="rect">
             <a:avLst/>
@@ -8290,7 +8290,7 @@
         <p:spPr>
           <a:xfrm>
             <a:off x="320040" y="1481400"/>
-            <a:ext cx="2193480" cy="456120"/>
+            <a:ext cx="2193120" cy="455760"/>
           </a:xfrm>
           <a:prstGeom prst="rect">
             <a:avLst/>
@@ -8321,7 +8321,7 @@
         <p:spPr>
           <a:xfrm>
             <a:off x="411480" y="1481400"/>
-            <a:ext cx="2010600" cy="456120"/>
+            <a:ext cx="2010240" cy="455760"/>
           </a:xfrm>
           <a:prstGeom prst="rect">
             <a:avLst/>
@@ -8376,7 +8376,7 @@
         <p:spPr>
           <a:xfrm>
             <a:off x="2606040" y="1481400"/>
-            <a:ext cx="3107880" cy="456120"/>
+            <a:ext cx="3107520" cy="455760"/>
           </a:xfrm>
           <a:prstGeom prst="rect">
             <a:avLst/>
@@ -8407,7 +8407,7 @@
         <p:spPr>
           <a:xfrm>
             <a:off x="2697480" y="1481400"/>
-            <a:ext cx="2925000" cy="456120"/>
+            <a:ext cx="2924640" cy="455760"/>
           </a:xfrm>
           <a:prstGeom prst="rect">
             <a:avLst/>
@@ -8462,7 +8462,7 @@
         <p:spPr>
           <a:xfrm>
             <a:off x="5897880" y="1481400"/>
-            <a:ext cx="3016440" cy="456120"/>
+            <a:ext cx="3016080" cy="455760"/>
           </a:xfrm>
           <a:prstGeom prst="rect">
             <a:avLst/>
@@ -8493,7 +8493,7 @@
         <p:spPr>
           <a:xfrm>
             <a:off x="5989320" y="1481400"/>
-            <a:ext cx="2833560" cy="456120"/>
+            <a:ext cx="2833200" cy="455760"/>
           </a:xfrm>
           <a:prstGeom prst="rect">
             <a:avLst/>
@@ -8548,7 +8548,7 @@
         <p:spPr>
           <a:xfrm>
             <a:off x="320040" y="1965960"/>
-            <a:ext cx="2193480" cy="456120"/>
+            <a:ext cx="2193120" cy="455760"/>
           </a:xfrm>
           <a:prstGeom prst="rect">
             <a:avLst/>
@@ -8579,7 +8579,7 @@
         <p:spPr>
           <a:xfrm>
             <a:off x="411480" y="1965960"/>
-            <a:ext cx="2010600" cy="456120"/>
+            <a:ext cx="2010240" cy="455760"/>
           </a:xfrm>
           <a:prstGeom prst="rect">
             <a:avLst/>
@@ -8634,7 +8634,7 @@
         <p:spPr>
           <a:xfrm>
             <a:off x="2606040" y="1965960"/>
-            <a:ext cx="3107880" cy="456120"/>
+            <a:ext cx="3107520" cy="455760"/>
           </a:xfrm>
           <a:prstGeom prst="rect">
             <a:avLst/>
@@ -8665,7 +8665,7 @@
         <p:spPr>
           <a:xfrm>
             <a:off x="2697480" y="1965960"/>
-            <a:ext cx="2925000" cy="456120"/>
+            <a:ext cx="2924640" cy="455760"/>
           </a:xfrm>
           <a:prstGeom prst="rect">
             <a:avLst/>
@@ -8720,7 +8720,7 @@
         <p:spPr>
           <a:xfrm>
             <a:off x="5897880" y="1965960"/>
-            <a:ext cx="3016440" cy="456120"/>
+            <a:ext cx="3016080" cy="455760"/>
           </a:xfrm>
           <a:prstGeom prst="rect">
             <a:avLst/>
@@ -8751,7 +8751,7 @@
         <p:spPr>
           <a:xfrm>
             <a:off x="5989320" y="1965960"/>
-            <a:ext cx="2833560" cy="456120"/>
+            <a:ext cx="2833200" cy="455760"/>
           </a:xfrm>
           <a:prstGeom prst="rect">
             <a:avLst/>
@@ -8806,7 +8806,7 @@
         <p:spPr>
           <a:xfrm>
             <a:off x="320040" y="2450520"/>
-            <a:ext cx="2193480" cy="456120"/>
+            <a:ext cx="2193120" cy="455760"/>
           </a:xfrm>
           <a:prstGeom prst="rect">
             <a:avLst/>
@@ -8837,7 +8837,7 @@
         <p:spPr>
           <a:xfrm>
             <a:off x="411480" y="2450520"/>
-            <a:ext cx="2010600" cy="456120"/>
+            <a:ext cx="2010240" cy="455760"/>
           </a:xfrm>
           <a:prstGeom prst="rect">
             <a:avLst/>
@@ -8892,7 +8892,7 @@
         <p:spPr>
           <a:xfrm>
             <a:off x="2606040" y="2450520"/>
-            <a:ext cx="3107880" cy="456120"/>
+            <a:ext cx="3107520" cy="455760"/>
           </a:xfrm>
           <a:prstGeom prst="rect">
             <a:avLst/>
@@ -8923,7 +8923,7 @@
         <p:spPr>
           <a:xfrm>
             <a:off x="2697480" y="2450520"/>
-            <a:ext cx="2925000" cy="456120"/>
+            <a:ext cx="2924640" cy="455760"/>
           </a:xfrm>
           <a:prstGeom prst="rect">
             <a:avLst/>
@@ -8978,7 +8978,7 @@
         <p:spPr>
           <a:xfrm>
             <a:off x="5897880" y="2450520"/>
-            <a:ext cx="3016440" cy="456120"/>
+            <a:ext cx="3016080" cy="455760"/>
           </a:xfrm>
           <a:prstGeom prst="rect">
             <a:avLst/>
@@ -9009,7 +9009,7 @@
         <p:spPr>
           <a:xfrm>
             <a:off x="5989320" y="2450520"/>
-            <a:ext cx="2833560" cy="456120"/>
+            <a:ext cx="2833200" cy="455760"/>
           </a:xfrm>
           <a:prstGeom prst="rect">
             <a:avLst/>
@@ -9064,7 +9064,7 @@
         <p:spPr>
           <a:xfrm>
             <a:off x="320040" y="2935080"/>
-            <a:ext cx="2193480" cy="456120"/>
+            <a:ext cx="2193120" cy="455760"/>
           </a:xfrm>
           <a:prstGeom prst="rect">
             <a:avLst/>
@@ -9095,7 +9095,7 @@
         <p:spPr>
           <a:xfrm>
             <a:off x="411480" y="2935080"/>
-            <a:ext cx="2010600" cy="456120"/>
+            <a:ext cx="2010240" cy="455760"/>
           </a:xfrm>
           <a:prstGeom prst="rect">
             <a:avLst/>
@@ -9150,7 +9150,7 @@
         <p:spPr>
           <a:xfrm>
             <a:off x="2606040" y="2935080"/>
-            <a:ext cx="3107880" cy="456120"/>
+            <a:ext cx="3107520" cy="455760"/>
           </a:xfrm>
           <a:prstGeom prst="rect">
             <a:avLst/>
@@ -9181,7 +9181,7 @@
         <p:spPr>
           <a:xfrm>
             <a:off x="2697480" y="2935080"/>
-            <a:ext cx="2925000" cy="456120"/>
+            <a:ext cx="2924640" cy="455760"/>
           </a:xfrm>
           <a:prstGeom prst="rect">
             <a:avLst/>
@@ -9236,7 +9236,7 @@
         <p:spPr>
           <a:xfrm>
             <a:off x="5897880" y="2935080"/>
-            <a:ext cx="3016440" cy="456120"/>
+            <a:ext cx="3016080" cy="455760"/>
           </a:xfrm>
           <a:prstGeom prst="rect">
             <a:avLst/>
@@ -9267,7 +9267,7 @@
         <p:spPr>
           <a:xfrm>
             <a:off x="5989320" y="2935080"/>
-            <a:ext cx="2833560" cy="456120"/>
+            <a:ext cx="2833200" cy="455760"/>
           </a:xfrm>
           <a:prstGeom prst="rect">
             <a:avLst/>
@@ -9322,7 +9322,7 @@
         <p:spPr>
           <a:xfrm>
             <a:off x="320040" y="3420000"/>
-            <a:ext cx="2193480" cy="456120"/>
+            <a:ext cx="2193120" cy="455760"/>
           </a:xfrm>
           <a:prstGeom prst="rect">
             <a:avLst/>
@@ -9353,7 +9353,7 @@
         <p:spPr>
           <a:xfrm>
             <a:off x="411480" y="3420000"/>
-            <a:ext cx="2010600" cy="456120"/>
+            <a:ext cx="2010240" cy="455760"/>
           </a:xfrm>
           <a:prstGeom prst="rect">
             <a:avLst/>
@@ -9408,7 +9408,7 @@
         <p:spPr>
           <a:xfrm>
             <a:off x="2606040" y="3420000"/>
-            <a:ext cx="3107880" cy="456120"/>
+            <a:ext cx="3107520" cy="455760"/>
           </a:xfrm>
           <a:prstGeom prst="rect">
             <a:avLst/>
@@ -9439,7 +9439,7 @@
         <p:spPr>
           <a:xfrm>
             <a:off x="2697480" y="3420000"/>
-            <a:ext cx="2925000" cy="456120"/>
+            <a:ext cx="2924640" cy="455760"/>
           </a:xfrm>
           <a:prstGeom prst="rect">
             <a:avLst/>
@@ -9494,7 +9494,7 @@
         <p:spPr>
           <a:xfrm>
             <a:off x="5897880" y="3420000"/>
-            <a:ext cx="3016440" cy="456120"/>
+            <a:ext cx="3016080" cy="455760"/>
           </a:xfrm>
           <a:prstGeom prst="rect">
             <a:avLst/>
@@ -9525,7 +9525,7 @@
         <p:spPr>
           <a:xfrm>
             <a:off x="5989320" y="3420000"/>
-            <a:ext cx="2833560" cy="456120"/>
+            <a:ext cx="2833200" cy="455760"/>
           </a:xfrm>
           <a:prstGeom prst="rect">
             <a:avLst/>
@@ -9580,7 +9580,7 @@
         <p:spPr>
           <a:xfrm>
             <a:off x="320040" y="3904560"/>
-            <a:ext cx="2193480" cy="456120"/>
+            <a:ext cx="2193120" cy="455760"/>
           </a:xfrm>
           <a:prstGeom prst="rect">
             <a:avLst/>
@@ -9611,7 +9611,7 @@
         <p:spPr>
           <a:xfrm>
             <a:off x="411480" y="3904560"/>
-            <a:ext cx="2010600" cy="456120"/>
+            <a:ext cx="2010240" cy="455760"/>
           </a:xfrm>
           <a:prstGeom prst="rect">
             <a:avLst/>
@@ -9666,7 +9666,7 @@
         <p:spPr>
           <a:xfrm>
             <a:off x="2606040" y="3904560"/>
-            <a:ext cx="3107880" cy="456120"/>
+            <a:ext cx="3107520" cy="455760"/>
           </a:xfrm>
           <a:prstGeom prst="rect">
             <a:avLst/>
@@ -9697,7 +9697,7 @@
         <p:spPr>
           <a:xfrm>
             <a:off x="2697480" y="3904560"/>
-            <a:ext cx="2925000" cy="456120"/>
+            <a:ext cx="2924640" cy="455760"/>
           </a:xfrm>
           <a:prstGeom prst="rect">
             <a:avLst/>
@@ -9752,7 +9752,7 @@
         <p:spPr>
           <a:xfrm>
             <a:off x="5897880" y="3904560"/>
-            <a:ext cx="3016440" cy="456120"/>
+            <a:ext cx="3016080" cy="455760"/>
           </a:xfrm>
           <a:prstGeom prst="rect">
             <a:avLst/>
@@ -9783,7 +9783,7 @@
         <p:spPr>
           <a:xfrm>
             <a:off x="5989320" y="3904560"/>
-            <a:ext cx="2833560" cy="456120"/>
+            <a:ext cx="2833200" cy="455760"/>
           </a:xfrm>
           <a:prstGeom prst="rect">
             <a:avLst/>
@@ -9838,7 +9838,7 @@
         <p:spPr>
           <a:xfrm>
             <a:off x="320040" y="4389120"/>
-            <a:ext cx="2193480" cy="456120"/>
+            <a:ext cx="2193120" cy="455760"/>
           </a:xfrm>
           <a:prstGeom prst="rect">
             <a:avLst/>
@@ -9869,7 +9869,7 @@
         <p:spPr>
           <a:xfrm>
             <a:off x="411480" y="4389120"/>
-            <a:ext cx="2010600" cy="456120"/>
+            <a:ext cx="2010240" cy="455760"/>
           </a:xfrm>
           <a:prstGeom prst="rect">
             <a:avLst/>
@@ -9924,7 +9924,7 @@
         <p:spPr>
           <a:xfrm>
             <a:off x="2606040" y="4389120"/>
-            <a:ext cx="3107880" cy="456120"/>
+            <a:ext cx="3107520" cy="455760"/>
           </a:xfrm>
           <a:prstGeom prst="rect">
             <a:avLst/>
@@ -9955,7 +9955,7 @@
         <p:spPr>
           <a:xfrm>
             <a:off x="2697480" y="4389120"/>
-            <a:ext cx="2925000" cy="456120"/>
+            <a:ext cx="2924640" cy="455760"/>
           </a:xfrm>
           <a:prstGeom prst="rect">
             <a:avLst/>
@@ -10010,7 +10010,7 @@
         <p:spPr>
           <a:xfrm>
             <a:off x="5897880" y="4389120"/>
-            <a:ext cx="3016440" cy="456120"/>
+            <a:ext cx="3016080" cy="455760"/>
           </a:xfrm>
           <a:prstGeom prst="rect">
             <a:avLst/>
@@ -10041,7 +10041,7 @@
         <p:spPr>
           <a:xfrm>
             <a:off x="5989320" y="4389120"/>
-            <a:ext cx="2833560" cy="456120"/>
+            <a:ext cx="2833200" cy="455760"/>
           </a:xfrm>
           <a:prstGeom prst="rect">
             <a:avLst/>
@@ -10133,7 +10133,7 @@
         <p:spPr>
           <a:xfrm>
             <a:off x="0" y="0"/>
-            <a:ext cx="163440" cy="5142600"/>
+            <a:ext cx="163080" cy="5142240"/>
           </a:xfrm>
           <a:prstGeom prst="rect">
             <a:avLst/>
@@ -10164,7 +10164,7 @@
         <p:spPr>
           <a:xfrm>
             <a:off x="0" y="0"/>
-            <a:ext cx="9142920" cy="913320"/>
+            <a:ext cx="9142560" cy="912960"/>
           </a:xfrm>
           <a:prstGeom prst="rect">
             <a:avLst/>
@@ -10195,7 +10195,7 @@
         <p:spPr>
           <a:xfrm>
             <a:off x="365760" y="109800"/>
-            <a:ext cx="8228520" cy="712080"/>
+            <a:ext cx="8228160" cy="711720"/>
           </a:xfrm>
           <a:prstGeom prst="rect">
             <a:avLst/>
@@ -10250,7 +10250,7 @@
         <p:spPr>
           <a:xfrm>
             <a:off x="320040" y="1005840"/>
-            <a:ext cx="5485320" cy="3839400"/>
+            <a:ext cx="5484960" cy="3839040"/>
           </a:xfrm>
           <a:prstGeom prst="rect">
             <a:avLst/>
@@ -10281,7 +10281,7 @@
         <p:spPr>
           <a:xfrm>
             <a:off x="457200" y="1097280"/>
-            <a:ext cx="5302440" cy="3656520"/>
+            <a:ext cx="5302080" cy="3656160"/>
           </a:xfrm>
           <a:prstGeom prst="rect">
             <a:avLst/>
@@ -10839,7 +10839,7 @@
         <p:spPr>
           <a:xfrm>
             <a:off x="5943600" y="1005840"/>
-            <a:ext cx="2925000" cy="1827720"/>
+            <a:ext cx="2924640" cy="1827360"/>
           </a:xfrm>
           <a:prstGeom prst="rect">
             <a:avLst/>
@@ -10870,7 +10870,7 @@
         <p:spPr>
           <a:xfrm>
             <a:off x="5943600" y="1005840"/>
-            <a:ext cx="2925000" cy="364680"/>
+            <a:ext cx="2924640" cy="364320"/>
           </a:xfrm>
           <a:prstGeom prst="rect">
             <a:avLst/>
@@ -10925,7 +10925,7 @@
         <p:spPr>
           <a:xfrm>
             <a:off x="6035040" y="1417320"/>
-            <a:ext cx="2742120" cy="1233360"/>
+            <a:ext cx="2741760" cy="1233000"/>
           </a:xfrm>
           <a:prstGeom prst="rect">
             <a:avLst/>
@@ -10951,7 +10951,7 @@
         <p:spPr>
           <a:xfrm>
             <a:off x="5943600" y="2971800"/>
-            <a:ext cx="2925000" cy="1873440"/>
+            <a:ext cx="2924640" cy="1873080"/>
           </a:xfrm>
           <a:prstGeom prst="rect">
             <a:avLst/>
@@ -10982,7 +10982,7 @@
         <p:spPr>
           <a:xfrm>
             <a:off x="5943600" y="2971800"/>
-            <a:ext cx="2925000" cy="364680"/>
+            <a:ext cx="2924640" cy="364320"/>
           </a:xfrm>
           <a:prstGeom prst="rect">
             <a:avLst/>
@@ -11037,7 +11037,7 @@
         <p:spPr>
           <a:xfrm>
             <a:off x="6080760" y="3401640"/>
-            <a:ext cx="2650680" cy="346320"/>
+            <a:ext cx="2650320" cy="345960"/>
           </a:xfrm>
           <a:prstGeom prst="rect">
             <a:avLst/>
@@ -11092,7 +11092,7 @@
         <p:spPr>
           <a:xfrm>
             <a:off x="6080760" y="3785760"/>
-            <a:ext cx="2650680" cy="346320"/>
+            <a:ext cx="2650320" cy="345960"/>
           </a:xfrm>
           <a:prstGeom prst="rect">
             <a:avLst/>
@@ -11147,7 +11147,7 @@
         <p:spPr>
           <a:xfrm>
             <a:off x="6080760" y="4169520"/>
-            <a:ext cx="2650680" cy="346320"/>
+            <a:ext cx="2650320" cy="345960"/>
           </a:xfrm>
           <a:prstGeom prst="rect">
             <a:avLst/>
@@ -11202,7 +11202,7 @@
         <p:spPr>
           <a:xfrm>
             <a:off x="6080760" y="4553640"/>
-            <a:ext cx="2650680" cy="346320"/>
+            <a:ext cx="2650320" cy="345960"/>
           </a:xfrm>
           <a:prstGeom prst="rect">
             <a:avLst/>
@@ -11294,7 +11294,7 @@
         <p:spPr>
           <a:xfrm>
             <a:off x="0" y="0"/>
-            <a:ext cx="163440" cy="5142600"/>
+            <a:ext cx="163080" cy="5142240"/>
           </a:xfrm>
           <a:prstGeom prst="rect">
             <a:avLst/>
@@ -11325,7 +11325,7 @@
         <p:spPr>
           <a:xfrm>
             <a:off x="0" y="0"/>
-            <a:ext cx="9142920" cy="913320"/>
+            <a:ext cx="9142560" cy="912960"/>
           </a:xfrm>
           <a:prstGeom prst="rect">
             <a:avLst/>
@@ -11356,7 +11356,7 @@
         <p:spPr>
           <a:xfrm>
             <a:off x="365760" y="109800"/>
-            <a:ext cx="8228520" cy="712080"/>
+            <a:ext cx="8228160" cy="711720"/>
           </a:xfrm>
           <a:prstGeom prst="rect">
             <a:avLst/>
@@ -11411,7 +11411,7 @@
         <p:spPr>
           <a:xfrm>
             <a:off x="320040" y="1005840"/>
-            <a:ext cx="5485320" cy="3839400"/>
+            <a:ext cx="5484960" cy="3839040"/>
           </a:xfrm>
           <a:prstGeom prst="rect">
             <a:avLst/>
@@ -11442,7 +11442,7 @@
         <p:spPr>
           <a:xfrm>
             <a:off x="457200" y="1097280"/>
-            <a:ext cx="5302440" cy="3656520"/>
+            <a:ext cx="5302080" cy="3656160"/>
           </a:xfrm>
           <a:prstGeom prst="rect">
             <a:avLst/>
@@ -12001,7 +12001,7 @@
         <p:spPr>
           <a:xfrm>
             <a:off x="5943600" y="1005840"/>
-            <a:ext cx="2925000" cy="1370520"/>
+            <a:ext cx="2924640" cy="1370160"/>
           </a:xfrm>
           <a:prstGeom prst="rect">
             <a:avLst/>
@@ -12032,7 +12032,7 @@
         <p:spPr>
           <a:xfrm>
             <a:off x="5943600" y="1005840"/>
-            <a:ext cx="2925000" cy="364680"/>
+            <a:ext cx="2924640" cy="364320"/>
           </a:xfrm>
           <a:prstGeom prst="rect">
             <a:avLst/>
@@ -12087,7 +12087,7 @@
         <p:spPr>
           <a:xfrm>
             <a:off x="6035040" y="1417320"/>
-            <a:ext cx="2742120" cy="821880"/>
+            <a:ext cx="2741760" cy="821520"/>
           </a:xfrm>
           <a:prstGeom prst="rect">
             <a:avLst/>
@@ -12113,7 +12113,7 @@
         <p:spPr>
           <a:xfrm>
             <a:off x="5943600" y="2514600"/>
-            <a:ext cx="2925000" cy="2330640"/>
+            <a:ext cx="2924640" cy="2330280"/>
           </a:xfrm>
           <a:prstGeom prst="rect">
             <a:avLst/>
@@ -12144,7 +12144,7 @@
         <p:spPr>
           <a:xfrm>
             <a:off x="5943600" y="2514600"/>
-            <a:ext cx="2925000" cy="364680"/>
+            <a:ext cx="2924640" cy="364320"/>
           </a:xfrm>
           <a:prstGeom prst="rect">
             <a:avLst/>
@@ -12199,7 +12199,7 @@
         <p:spPr>
           <a:xfrm>
             <a:off x="6080760" y="2944440"/>
-            <a:ext cx="2650680" cy="346320"/>
+            <a:ext cx="2650320" cy="345960"/>
           </a:xfrm>
           <a:prstGeom prst="rect">
             <a:avLst/>
@@ -12264,7 +12264,7 @@
         <p:spPr>
           <a:xfrm>
             <a:off x="6080760" y="3328560"/>
-            <a:ext cx="2650680" cy="346320"/>
+            <a:ext cx="2650320" cy="345960"/>
           </a:xfrm>
           <a:prstGeom prst="rect">
             <a:avLst/>
@@ -12329,7 +12329,7 @@
         <p:spPr>
           <a:xfrm>
             <a:off x="6080760" y="3712320"/>
-            <a:ext cx="2650680" cy="346320"/>
+            <a:ext cx="2650320" cy="345960"/>
           </a:xfrm>
           <a:prstGeom prst="rect">
             <a:avLst/>
@@ -12394,7 +12394,7 @@
         <p:spPr>
           <a:xfrm>
             <a:off x="6080760" y="4096440"/>
-            <a:ext cx="2650680" cy="346320"/>
+            <a:ext cx="2650320" cy="345960"/>
           </a:xfrm>
           <a:prstGeom prst="rect">
             <a:avLst/>
@@ -12459,7 +12459,7 @@
         <p:spPr>
           <a:xfrm>
             <a:off x="6080760" y="4480560"/>
-            <a:ext cx="2650680" cy="346320"/>
+            <a:ext cx="2650320" cy="345960"/>
           </a:xfrm>
           <a:prstGeom prst="rect">
             <a:avLst/>
@@ -12561,7 +12561,7 @@
         <p:spPr>
           <a:xfrm>
             <a:off x="0" y="0"/>
-            <a:ext cx="9142920" cy="5142600"/>
+            <a:ext cx="9142560" cy="5142240"/>
           </a:xfrm>
           <a:prstGeom prst="rect">
             <a:avLst/>
@@ -12592,7 +12592,7 @@
         <p:spPr>
           <a:xfrm>
             <a:off x="5486400" y="0"/>
-            <a:ext cx="4570920" cy="4570920"/>
+            <a:ext cx="4570560" cy="4570560"/>
           </a:xfrm>
           <a:prstGeom prst="ellipse">
             <a:avLst/>
@@ -12627,7 +12627,7 @@
         <p:spPr>
           <a:xfrm>
             <a:off x="-1828800" y="2743200"/>
-            <a:ext cx="4570920" cy="4570920"/>
+            <a:ext cx="4570560" cy="4570560"/>
           </a:xfrm>
           <a:prstGeom prst="ellipse">
             <a:avLst/>
@@ -12662,7 +12662,7 @@
         <p:spPr>
           <a:xfrm>
             <a:off x="640080" y="1645920"/>
-            <a:ext cx="108720" cy="1644840"/>
+            <a:ext cx="108360" cy="1644480"/>
           </a:xfrm>
           <a:prstGeom prst="rect">
             <a:avLst/>
@@ -12693,7 +12693,7 @@
         <p:spPr>
           <a:xfrm>
             <a:off x="914400" y="1554480"/>
-            <a:ext cx="6399720" cy="547560"/>
+            <a:ext cx="6399360" cy="547200"/>
           </a:xfrm>
           <a:prstGeom prst="rect">
             <a:avLst/>
@@ -12748,7 +12748,7 @@
         <p:spPr>
           <a:xfrm>
             <a:off x="914400" y="2011680"/>
-            <a:ext cx="7314120" cy="1370520"/>
+            <a:ext cx="7313760" cy="1370160"/>
           </a:xfrm>
           <a:prstGeom prst="rect">
             <a:avLst/>
@@ -12827,7 +12827,7 @@
         <p:spPr>
           <a:xfrm>
             <a:off x="914400" y="3657600"/>
-            <a:ext cx="7314120" cy="456120"/>
+            <a:ext cx="7313760" cy="455760"/>
           </a:xfrm>
           <a:prstGeom prst="rect">
             <a:avLst/>
@@ -12919,7 +12919,7 @@
         <p:spPr>
           <a:xfrm>
             <a:off x="0" y="0"/>
-            <a:ext cx="163440" cy="5142600"/>
+            <a:ext cx="163080" cy="5142240"/>
           </a:xfrm>
           <a:prstGeom prst="rect">
             <a:avLst/>
@@ -12950,7 +12950,7 @@
         <p:spPr>
           <a:xfrm>
             <a:off x="0" y="0"/>
-            <a:ext cx="9142920" cy="913320"/>
+            <a:ext cx="9142560" cy="912960"/>
           </a:xfrm>
           <a:prstGeom prst="rect">
             <a:avLst/>
@@ -12981,7 +12981,7 @@
         <p:spPr>
           <a:xfrm>
             <a:off x="365760" y="109800"/>
-            <a:ext cx="8228520" cy="712080"/>
+            <a:ext cx="8228160" cy="711720"/>
           </a:xfrm>
           <a:prstGeom prst="rect">
             <a:avLst/>
@@ -13036,7 +13036,7 @@
         <p:spPr>
           <a:xfrm>
             <a:off x="320040" y="1024200"/>
-            <a:ext cx="2376360" cy="1004760"/>
+            <a:ext cx="2376000" cy="1004400"/>
           </a:xfrm>
           <a:prstGeom prst="rect">
             <a:avLst/>
@@ -13067,7 +13067,7 @@
         <p:spPr>
           <a:xfrm>
             <a:off x="320040" y="1024200"/>
-            <a:ext cx="2376360" cy="1004760"/>
+            <a:ext cx="2376000" cy="1004400"/>
           </a:xfrm>
           <a:prstGeom prst="rect">
             <a:avLst/>
@@ -13146,7 +13146,7 @@
         <p:spPr>
           <a:xfrm>
             <a:off x="2743200" y="1298520"/>
-            <a:ext cx="730440" cy="501840"/>
+            <a:ext cx="730080" cy="501480"/>
           </a:xfrm>
           <a:prstGeom prst="rect">
             <a:avLst/>
@@ -13201,7 +13201,7 @@
         <p:spPr>
           <a:xfrm>
             <a:off x="3474720" y="1024200"/>
-            <a:ext cx="2102040" cy="1004760"/>
+            <a:ext cx="2101680" cy="1004400"/>
           </a:xfrm>
           <a:prstGeom prst="rect">
             <a:avLst/>
@@ -13232,7 +13232,7 @@
         <p:spPr>
           <a:xfrm>
             <a:off x="3474720" y="1024200"/>
-            <a:ext cx="2102040" cy="1004760"/>
+            <a:ext cx="2101680" cy="1004400"/>
           </a:xfrm>
           <a:prstGeom prst="rect">
             <a:avLst/>
@@ -13311,7 +13311,7 @@
         <p:spPr>
           <a:xfrm>
             <a:off x="5669280" y="1298520"/>
-            <a:ext cx="730440" cy="501840"/>
+            <a:ext cx="730080" cy="501480"/>
           </a:xfrm>
           <a:prstGeom prst="rect">
             <a:avLst/>
@@ -13366,7 +13366,7 @@
         <p:spPr>
           <a:xfrm>
             <a:off x="6400800" y="1024200"/>
-            <a:ext cx="2422080" cy="1004760"/>
+            <a:ext cx="2421720" cy="1004400"/>
           </a:xfrm>
           <a:prstGeom prst="rect">
             <a:avLst/>
@@ -13397,7 +13397,7 @@
         <p:spPr>
           <a:xfrm>
             <a:off x="6400800" y="1024200"/>
-            <a:ext cx="2422080" cy="1004760"/>
+            <a:ext cx="2421720" cy="1004400"/>
           </a:xfrm>
           <a:prstGeom prst="rect">
             <a:avLst/>
@@ -13476,7 +13476,7 @@
         <p:spPr>
           <a:xfrm>
             <a:off x="320040" y="2240280"/>
-            <a:ext cx="3839400" cy="346320"/>
+            <a:ext cx="3839040" cy="345960"/>
           </a:xfrm>
           <a:prstGeom prst="rect">
             <a:avLst/>
@@ -13531,7 +13531,7 @@
         <p:spPr>
           <a:xfrm>
             <a:off x="411480" y="2697480"/>
-            <a:ext cx="200160" cy="200160"/>
+            <a:ext cx="199800" cy="199800"/>
           </a:xfrm>
           <a:prstGeom prst="ellipse">
             <a:avLst/>
@@ -13562,7 +13562,7 @@
         <p:spPr>
           <a:xfrm>
             <a:off x="731520" y="2633400"/>
-            <a:ext cx="3382200" cy="346320"/>
+            <a:ext cx="3381840" cy="345960"/>
           </a:xfrm>
           <a:prstGeom prst="rect">
             <a:avLst/>
@@ -13617,7 +13617,7 @@
         <p:spPr>
           <a:xfrm>
             <a:off x="411480" y="3200400"/>
-            <a:ext cx="200160" cy="200160"/>
+            <a:ext cx="199800" cy="199800"/>
           </a:xfrm>
           <a:prstGeom prst="ellipse">
             <a:avLst/>
@@ -13648,7 +13648,7 @@
         <p:spPr>
           <a:xfrm>
             <a:off x="731520" y="3136320"/>
-            <a:ext cx="3382200" cy="346320"/>
+            <a:ext cx="3381840" cy="345960"/>
           </a:xfrm>
           <a:prstGeom prst="rect">
             <a:avLst/>
@@ -13703,7 +13703,7 @@
         <p:spPr>
           <a:xfrm>
             <a:off x="411480" y="3703320"/>
-            <a:ext cx="200160" cy="200160"/>
+            <a:ext cx="199800" cy="199800"/>
           </a:xfrm>
           <a:prstGeom prst="ellipse">
             <a:avLst/>
@@ -13734,7 +13734,7 @@
         <p:spPr>
           <a:xfrm>
             <a:off x="731520" y="3639240"/>
-            <a:ext cx="3382200" cy="346320"/>
+            <a:ext cx="3381840" cy="345960"/>
           </a:xfrm>
           <a:prstGeom prst="rect">
             <a:avLst/>
@@ -13789,7 +13789,7 @@
         <p:spPr>
           <a:xfrm>
             <a:off x="4663440" y="2240280"/>
-            <a:ext cx="4113720" cy="346320"/>
+            <a:ext cx="4113360" cy="345960"/>
           </a:xfrm>
           <a:prstGeom prst="rect">
             <a:avLst/>
@@ -13844,7 +13844,7 @@
         <p:spPr>
           <a:xfrm>
             <a:off x="4663440" y="2697480"/>
-            <a:ext cx="4113720" cy="437760"/>
+            <a:ext cx="4113360" cy="437400"/>
           </a:xfrm>
           <a:prstGeom prst="rect">
             <a:avLst/>
@@ -13882,7 +13882,7 @@
         <p:spPr>
           <a:xfrm>
             <a:off x="4663440" y="2697480"/>
-            <a:ext cx="90360" cy="437760"/>
+            <a:ext cx="90000" cy="437400"/>
           </a:xfrm>
           <a:prstGeom prst="rect">
             <a:avLst/>
@@ -13913,7 +13913,7 @@
         <p:spPr>
           <a:xfrm>
             <a:off x="4846320" y="2697480"/>
-            <a:ext cx="3839400" cy="437760"/>
+            <a:ext cx="3839040" cy="437400"/>
           </a:xfrm>
           <a:prstGeom prst="rect">
             <a:avLst/>
@@ -13968,7 +13968,7 @@
         <p:spPr>
           <a:xfrm>
             <a:off x="4663440" y="3246120"/>
-            <a:ext cx="4113720" cy="437760"/>
+            <a:ext cx="4113360" cy="437400"/>
           </a:xfrm>
           <a:prstGeom prst="rect">
             <a:avLst/>
@@ -14006,7 +14006,7 @@
         <p:spPr>
           <a:xfrm>
             <a:off x="4663440" y="3246120"/>
-            <a:ext cx="90360" cy="437760"/>
+            <a:ext cx="90000" cy="437400"/>
           </a:xfrm>
           <a:prstGeom prst="rect">
             <a:avLst/>
@@ -14037,7 +14037,7 @@
         <p:spPr>
           <a:xfrm>
             <a:off x="4846320" y="3246120"/>
-            <a:ext cx="3839400" cy="437760"/>
+            <a:ext cx="3839040" cy="437400"/>
           </a:xfrm>
           <a:prstGeom prst="rect">
             <a:avLst/>
@@ -14092,7 +14092,7 @@
         <p:spPr>
           <a:xfrm>
             <a:off x="4663440" y="3794760"/>
-            <a:ext cx="4113720" cy="437760"/>
+            <a:ext cx="4113360" cy="437400"/>
           </a:xfrm>
           <a:prstGeom prst="rect">
             <a:avLst/>
@@ -14130,7 +14130,7 @@
         <p:spPr>
           <a:xfrm>
             <a:off x="4663440" y="3794760"/>
-            <a:ext cx="90360" cy="437760"/>
+            <a:ext cx="90000" cy="437400"/>
           </a:xfrm>
           <a:prstGeom prst="rect">
             <a:avLst/>
@@ -14161,7 +14161,7 @@
         <p:spPr>
           <a:xfrm>
             <a:off x="4846320" y="3794760"/>
-            <a:ext cx="3839400" cy="437760"/>
+            <a:ext cx="3839040" cy="437400"/>
           </a:xfrm>
           <a:prstGeom prst="rect">
             <a:avLst/>
@@ -14216,7 +14216,7 @@
         <p:spPr>
           <a:xfrm>
             <a:off x="4663440" y="4343400"/>
-            <a:ext cx="4113720" cy="437760"/>
+            <a:ext cx="4113360" cy="437400"/>
           </a:xfrm>
           <a:prstGeom prst="rect">
             <a:avLst/>
@@ -14254,7 +14254,7 @@
         <p:spPr>
           <a:xfrm>
             <a:off x="4663440" y="4343400"/>
-            <a:ext cx="90360" cy="437760"/>
+            <a:ext cx="90000" cy="437400"/>
           </a:xfrm>
           <a:prstGeom prst="rect">
             <a:avLst/>
@@ -14285,7 +14285,7 @@
         <p:spPr>
           <a:xfrm>
             <a:off x="4846320" y="4343400"/>
-            <a:ext cx="3839400" cy="437760"/>
+            <a:ext cx="3839040" cy="437400"/>
           </a:xfrm>
           <a:prstGeom prst="rect">
             <a:avLst/>
@@ -14377,7 +14377,7 @@
         <p:spPr>
           <a:xfrm>
             <a:off x="0" y="0"/>
-            <a:ext cx="163440" cy="5142600"/>
+            <a:ext cx="163080" cy="5142240"/>
           </a:xfrm>
           <a:prstGeom prst="rect">
             <a:avLst/>
@@ -14408,7 +14408,7 @@
         <p:spPr>
           <a:xfrm>
             <a:off x="0" y="0"/>
-            <a:ext cx="9142920" cy="913320"/>
+            <a:ext cx="9142560" cy="912960"/>
           </a:xfrm>
           <a:prstGeom prst="rect">
             <a:avLst/>
@@ -14439,7 +14439,7 @@
         <p:spPr>
           <a:xfrm>
             <a:off x="365760" y="109800"/>
-            <a:ext cx="8228520" cy="712080"/>
+            <a:ext cx="8228160" cy="711720"/>
           </a:xfrm>
           <a:prstGeom prst="rect">
             <a:avLst/>
@@ -14494,7 +14494,7 @@
         <p:spPr>
           <a:xfrm>
             <a:off x="320040" y="1005840"/>
-            <a:ext cx="5485320" cy="3839400"/>
+            <a:ext cx="5484960" cy="3839040"/>
           </a:xfrm>
           <a:prstGeom prst="rect">
             <a:avLst/>
@@ -14525,7 +14525,7 @@
         <p:spPr>
           <a:xfrm>
             <a:off x="457200" y="1097280"/>
-            <a:ext cx="5302440" cy="3656520"/>
+            <a:ext cx="5302080" cy="3656160"/>
           </a:xfrm>
           <a:prstGeom prst="rect">
             <a:avLst/>
@@ -15039,7 +15039,7 @@
         <p:spPr>
           <a:xfrm>
             <a:off x="5943600" y="1005840"/>
-            <a:ext cx="2925000" cy="1827720"/>
+            <a:ext cx="2924640" cy="1827360"/>
           </a:xfrm>
           <a:prstGeom prst="rect">
             <a:avLst/>
@@ -15070,7 +15070,7 @@
         <p:spPr>
           <a:xfrm>
             <a:off x="5943600" y="1005840"/>
-            <a:ext cx="2925000" cy="364680"/>
+            <a:ext cx="2924640" cy="364320"/>
           </a:xfrm>
           <a:prstGeom prst="rect">
             <a:avLst/>
@@ -15125,7 +15125,7 @@
         <p:spPr>
           <a:xfrm>
             <a:off x="6035040" y="1417320"/>
-            <a:ext cx="2742120" cy="1233360"/>
+            <a:ext cx="2741760" cy="1233000"/>
           </a:xfrm>
           <a:prstGeom prst="rect">
             <a:avLst/>
@@ -15252,7 +15252,7 @@
         <p:spPr>
           <a:xfrm>
             <a:off x="5943600" y="2971800"/>
-            <a:ext cx="2925000" cy="1873440"/>
+            <a:ext cx="2924640" cy="1873080"/>
           </a:xfrm>
           <a:prstGeom prst="rect">
             <a:avLst/>
@@ -15283,7 +15283,7 @@
         <p:spPr>
           <a:xfrm>
             <a:off x="5943600" y="2971800"/>
-            <a:ext cx="2925000" cy="364680"/>
+            <a:ext cx="2924640" cy="364320"/>
           </a:xfrm>
           <a:prstGeom prst="rect">
             <a:avLst/>
@@ -15338,7 +15338,7 @@
         <p:spPr>
           <a:xfrm>
             <a:off x="6080760" y="3401640"/>
-            <a:ext cx="2650680" cy="346320"/>
+            <a:ext cx="2650320" cy="345960"/>
           </a:xfrm>
           <a:prstGeom prst="rect">
             <a:avLst/>
@@ -15403,7 +15403,7 @@
         <p:spPr>
           <a:xfrm>
             <a:off x="6080760" y="3803760"/>
-            <a:ext cx="2650680" cy="346320"/>
+            <a:ext cx="2650320" cy="345960"/>
           </a:xfrm>
           <a:prstGeom prst="rect">
             <a:avLst/>
@@ -15468,7 +15468,7 @@
         <p:spPr>
           <a:xfrm>
             <a:off x="6080760" y="4206240"/>
-            <a:ext cx="2650680" cy="346320"/>
+            <a:ext cx="2650320" cy="345960"/>
           </a:xfrm>
           <a:prstGeom prst="rect">
             <a:avLst/>
@@ -15533,7 +15533,7 @@
         <p:spPr>
           <a:xfrm>
             <a:off x="6080760" y="4608720"/>
-            <a:ext cx="2650680" cy="346320"/>
+            <a:ext cx="2650320" cy="345960"/>
           </a:xfrm>
           <a:prstGeom prst="rect">
             <a:avLst/>
@@ -15635,7 +15635,7 @@
         <p:spPr>
           <a:xfrm>
             <a:off x="0" y="0"/>
-            <a:ext cx="163440" cy="5142600"/>
+            <a:ext cx="163080" cy="5142240"/>
           </a:xfrm>
           <a:prstGeom prst="rect">
             <a:avLst/>
@@ -15666,7 +15666,7 @@
         <p:spPr>
           <a:xfrm>
             <a:off x="0" y="0"/>
-            <a:ext cx="9142920" cy="913320"/>
+            <a:ext cx="9142560" cy="912960"/>
           </a:xfrm>
           <a:prstGeom prst="rect">
             <a:avLst/>
@@ -15697,7 +15697,7 @@
         <p:spPr>
           <a:xfrm>
             <a:off x="365760" y="109800"/>
-            <a:ext cx="8228520" cy="712080"/>
+            <a:ext cx="8228160" cy="711720"/>
           </a:xfrm>
           <a:prstGeom prst="rect">
             <a:avLst/>
@@ -15752,7 +15752,7 @@
         <p:spPr>
           <a:xfrm>
             <a:off x="320040" y="1005840"/>
-            <a:ext cx="5485320" cy="3839400"/>
+            <a:ext cx="5484960" cy="3839040"/>
           </a:xfrm>
           <a:prstGeom prst="rect">
             <a:avLst/>
@@ -15783,7 +15783,7 @@
         <p:spPr>
           <a:xfrm>
             <a:off x="457200" y="1097280"/>
-            <a:ext cx="5302440" cy="3656520"/>
+            <a:ext cx="5302080" cy="3656160"/>
           </a:xfrm>
           <a:prstGeom prst="rect">
             <a:avLst/>
@@ -16331,7 +16331,7 @@
         <p:spPr>
           <a:xfrm>
             <a:off x="5943600" y="1005840"/>
-            <a:ext cx="2925000" cy="1919160"/>
+            <a:ext cx="2924640" cy="1918800"/>
           </a:xfrm>
           <a:prstGeom prst="rect">
             <a:avLst/>
@@ -16362,7 +16362,7 @@
         <p:spPr>
           <a:xfrm>
             <a:off x="5943600" y="1005840"/>
-            <a:ext cx="2925000" cy="364680"/>
+            <a:ext cx="2924640" cy="364320"/>
           </a:xfrm>
           <a:prstGeom prst="rect">
             <a:avLst/>
@@ -16417,7 +16417,7 @@
         <p:spPr>
           <a:xfrm>
             <a:off x="6035040" y="1417320"/>
-            <a:ext cx="2742120" cy="1279080"/>
+            <a:ext cx="2741760" cy="1278720"/>
           </a:xfrm>
           <a:prstGeom prst="rect">
             <a:avLst/>
@@ -16443,7 +16443,7 @@
         <p:spPr>
           <a:xfrm>
             <a:off x="5943600" y="3063240"/>
-            <a:ext cx="2925000" cy="1782000"/>
+            <a:ext cx="2924640" cy="1781640"/>
           </a:xfrm>
           <a:prstGeom prst="rect">
             <a:avLst/>
@@ -16474,7 +16474,7 @@
         <p:spPr>
           <a:xfrm>
             <a:off x="5943600" y="3063240"/>
-            <a:ext cx="2925000" cy="364680"/>
+            <a:ext cx="2924640" cy="364320"/>
           </a:xfrm>
           <a:prstGeom prst="rect">
             <a:avLst/>
@@ -16529,7 +16529,7 @@
         <p:spPr>
           <a:xfrm>
             <a:off x="6035040" y="3474720"/>
-            <a:ext cx="2742120" cy="1233360"/>
+            <a:ext cx="2741760" cy="1233000"/>
           </a:xfrm>
           <a:prstGeom prst="rect">
             <a:avLst/>
@@ -16727,7 +16727,7 @@
         <p:spPr>
           <a:xfrm>
             <a:off x="0" y="0"/>
-            <a:ext cx="163440" cy="5142600"/>
+            <a:ext cx="163080" cy="5142240"/>
           </a:xfrm>
           <a:prstGeom prst="rect">
             <a:avLst/>
@@ -16758,7 +16758,7 @@
         <p:spPr>
           <a:xfrm>
             <a:off x="0" y="0"/>
-            <a:ext cx="9142920" cy="913320"/>
+            <a:ext cx="9142560" cy="912960"/>
           </a:xfrm>
           <a:prstGeom prst="rect">
             <a:avLst/>
@@ -16789,7 +16789,7 @@
         <p:spPr>
           <a:xfrm>
             <a:off x="365760" y="109800"/>
-            <a:ext cx="8228520" cy="712080"/>
+            <a:ext cx="8228160" cy="711720"/>
           </a:xfrm>
           <a:prstGeom prst="rect">
             <a:avLst/>
@@ -16844,7 +16844,7 @@
         <p:spPr>
           <a:xfrm>
             <a:off x="320040" y="1005840"/>
-            <a:ext cx="5485320" cy="3839400"/>
+            <a:ext cx="5484960" cy="3839040"/>
           </a:xfrm>
           <a:prstGeom prst="rect">
             <a:avLst/>
@@ -16875,7 +16875,7 @@
         <p:spPr>
           <a:xfrm>
             <a:off x="457200" y="1097280"/>
-            <a:ext cx="5302440" cy="3656520"/>
+            <a:ext cx="5302080" cy="3656160"/>
           </a:xfrm>
           <a:prstGeom prst="rect">
             <a:avLst/>
@@ -17351,7 +17351,7 @@
         <p:spPr>
           <a:xfrm>
             <a:off x="5943600" y="1005840"/>
-            <a:ext cx="2925000" cy="1919160"/>
+            <a:ext cx="2924640" cy="1918800"/>
           </a:xfrm>
           <a:prstGeom prst="rect">
             <a:avLst/>
@@ -17382,7 +17382,7 @@
         <p:spPr>
           <a:xfrm>
             <a:off x="5943600" y="1005840"/>
-            <a:ext cx="2925000" cy="364680"/>
+            <a:ext cx="2924640" cy="364320"/>
           </a:xfrm>
           <a:prstGeom prst="rect">
             <a:avLst/>
@@ -17437,7 +17437,7 @@
         <p:spPr>
           <a:xfrm>
             <a:off x="6035040" y="1417320"/>
-            <a:ext cx="2742120" cy="1233360"/>
+            <a:ext cx="2741760" cy="1233000"/>
           </a:xfrm>
           <a:prstGeom prst="rect">
             <a:avLst/>
@@ -17564,7 +17564,7 @@
         <p:spPr>
           <a:xfrm>
             <a:off x="5943600" y="3063240"/>
-            <a:ext cx="2925000" cy="1782000"/>
+            <a:ext cx="2924640" cy="1781640"/>
           </a:xfrm>
           <a:prstGeom prst="rect">
             <a:avLst/>
@@ -17595,7 +17595,7 @@
         <p:spPr>
           <a:xfrm>
             <a:off x="5943600" y="3063240"/>
-            <a:ext cx="2925000" cy="364680"/>
+            <a:ext cx="2924640" cy="364320"/>
           </a:xfrm>
           <a:prstGeom prst="rect">
             <a:avLst/>
@@ -17650,7 +17650,7 @@
         <p:spPr>
           <a:xfrm>
             <a:off x="6080760" y="3493080"/>
-            <a:ext cx="2650680" cy="318960"/>
+            <a:ext cx="2650320" cy="318600"/>
           </a:xfrm>
           <a:prstGeom prst="rect">
             <a:avLst/>
@@ -17715,7 +17715,7 @@
         <p:spPr>
           <a:xfrm>
             <a:off x="6080760" y="3840480"/>
-            <a:ext cx="2650680" cy="318960"/>
+            <a:ext cx="2650320" cy="318600"/>
           </a:xfrm>
           <a:prstGeom prst="rect">
             <a:avLst/>
@@ -17780,7 +17780,7 @@
         <p:spPr>
           <a:xfrm>
             <a:off x="6080760" y="4187880"/>
-            <a:ext cx="2650680" cy="318960"/>
+            <a:ext cx="2650320" cy="318600"/>
           </a:xfrm>
           <a:prstGeom prst="rect">
             <a:avLst/>
@@ -17845,7 +17845,7 @@
         <p:spPr>
           <a:xfrm>
             <a:off x="6080760" y="4535280"/>
-            <a:ext cx="2650680" cy="318960"/>
+            <a:ext cx="2650320" cy="318600"/>
           </a:xfrm>
           <a:prstGeom prst="rect">
             <a:avLst/>
@@ -17947,7 +17947,7 @@
         <p:spPr>
           <a:xfrm>
             <a:off x="0" y="0"/>
-            <a:ext cx="9142920" cy="5142600"/>
+            <a:ext cx="9142560" cy="5142240"/>
           </a:xfrm>
           <a:prstGeom prst="rect">
             <a:avLst/>
@@ -17978,7 +17978,7 @@
         <p:spPr>
           <a:xfrm>
             <a:off x="0" y="0"/>
-            <a:ext cx="3656520" cy="5142600"/>
+            <a:ext cx="3656160" cy="5142240"/>
           </a:xfrm>
           <a:prstGeom prst="rect">
             <a:avLst/>
@@ -18009,7 +18009,7 @@
         <p:spPr>
           <a:xfrm>
             <a:off x="914400" y="914400"/>
-            <a:ext cx="3656520" cy="3656520"/>
+            <a:ext cx="3656160" cy="3656160"/>
           </a:xfrm>
           <a:prstGeom prst="ellipse">
             <a:avLst/>
@@ -18044,7 +18044,7 @@
         <p:spPr>
           <a:xfrm>
             <a:off x="4114800" y="1645920"/>
-            <a:ext cx="108720" cy="1644840"/>
+            <a:ext cx="108360" cy="1644480"/>
           </a:xfrm>
           <a:prstGeom prst="rect">
             <a:avLst/>
@@ -18075,7 +18075,7 @@
         <p:spPr>
           <a:xfrm>
             <a:off x="4389120" y="1554480"/>
-            <a:ext cx="4570920" cy="547560"/>
+            <a:ext cx="4570560" cy="547200"/>
           </a:xfrm>
           <a:prstGeom prst="rect">
             <a:avLst/>
@@ -18130,7 +18130,7 @@
         <p:spPr>
           <a:xfrm>
             <a:off x="4389120" y="2011680"/>
-            <a:ext cx="4570920" cy="1370520"/>
+            <a:ext cx="4570560" cy="1370160"/>
           </a:xfrm>
           <a:prstGeom prst="rect">
             <a:avLst/>
@@ -18209,7 +18209,7 @@
         <p:spPr>
           <a:xfrm>
             <a:off x="4389120" y="3657600"/>
-            <a:ext cx="4570920" cy="456120"/>
+            <a:ext cx="4570560" cy="455760"/>
           </a:xfrm>
           <a:prstGeom prst="rect">
             <a:avLst/>
@@ -18301,7 +18301,7 @@
         <p:spPr>
           <a:xfrm>
             <a:off x="0" y="0"/>
-            <a:ext cx="163440" cy="5142600"/>
+            <a:ext cx="163080" cy="5142240"/>
           </a:xfrm>
           <a:prstGeom prst="rect">
             <a:avLst/>
@@ -18332,7 +18332,7 @@
         <p:spPr>
           <a:xfrm>
             <a:off x="0" y="0"/>
-            <a:ext cx="9142920" cy="913320"/>
+            <a:ext cx="9142560" cy="912960"/>
           </a:xfrm>
           <a:prstGeom prst="rect">
             <a:avLst/>
@@ -18363,7 +18363,7 @@
         <p:spPr>
           <a:xfrm>
             <a:off x="365760" y="109800"/>
-            <a:ext cx="8228520" cy="712080"/>
+            <a:ext cx="8228160" cy="711720"/>
           </a:xfrm>
           <a:prstGeom prst="rect">
             <a:avLst/>
@@ -18418,7 +18418,7 @@
         <p:spPr>
           <a:xfrm>
             <a:off x="320040" y="1024200"/>
-            <a:ext cx="8502840" cy="547560"/>
+            <a:ext cx="8502480" cy="547200"/>
           </a:xfrm>
           <a:prstGeom prst="rect">
             <a:avLst/>
@@ -18456,7 +18456,7 @@
         <p:spPr>
           <a:xfrm>
             <a:off x="320040" y="1024200"/>
-            <a:ext cx="8502840" cy="547560"/>
+            <a:ext cx="8502480" cy="547200"/>
           </a:xfrm>
           <a:prstGeom prst="rect">
             <a:avLst/>
@@ -18521,7 +18521,7 @@
         <p:spPr>
           <a:xfrm>
             <a:off x="320040" y="1737360"/>
-            <a:ext cx="4159440" cy="1187640"/>
+            <a:ext cx="4159080" cy="1187280"/>
           </a:xfrm>
           <a:prstGeom prst="rect">
             <a:avLst/>
@@ -18559,7 +18559,7 @@
         <p:spPr>
           <a:xfrm>
             <a:off x="457200" y="1938600"/>
-            <a:ext cx="639000" cy="639000"/>
+            <a:ext cx="638640" cy="638640"/>
           </a:xfrm>
           <a:prstGeom prst="ellipse">
             <a:avLst/>
@@ -18590,7 +18590,7 @@
         <p:spPr>
           <a:xfrm>
             <a:off x="457200" y="1938600"/>
-            <a:ext cx="639000" cy="639000"/>
+            <a:ext cx="638640" cy="638640"/>
           </a:xfrm>
           <a:prstGeom prst="rect">
             <a:avLst/>
@@ -18645,7 +18645,7 @@
         <p:spPr>
           <a:xfrm>
             <a:off x="1216080" y="1874520"/>
-            <a:ext cx="3107880" cy="346320"/>
+            <a:ext cx="3107520" cy="345960"/>
           </a:xfrm>
           <a:prstGeom prst="rect">
             <a:avLst/>
@@ -18700,7 +18700,7 @@
         <p:spPr>
           <a:xfrm>
             <a:off x="1216080" y="2240280"/>
-            <a:ext cx="3107880" cy="501840"/>
+            <a:ext cx="3107520" cy="501480"/>
           </a:xfrm>
           <a:prstGeom prst="rect">
             <a:avLst/>
@@ -18755,7 +18755,7 @@
         <p:spPr>
           <a:xfrm>
             <a:off x="4709160" y="1737360"/>
-            <a:ext cx="4159440" cy="1187640"/>
+            <a:ext cx="4159080" cy="1187280"/>
           </a:xfrm>
           <a:prstGeom prst="rect">
             <a:avLst/>
@@ -18793,7 +18793,7 @@
         <p:spPr>
           <a:xfrm>
             <a:off x="4846320" y="1938600"/>
-            <a:ext cx="639000" cy="639000"/>
+            <a:ext cx="638640" cy="638640"/>
           </a:xfrm>
           <a:prstGeom prst="ellipse">
             <a:avLst/>
@@ -18824,7 +18824,7 @@
         <p:spPr>
           <a:xfrm>
             <a:off x="4846320" y="1938600"/>
-            <a:ext cx="639000" cy="639000"/>
+            <a:ext cx="638640" cy="638640"/>
           </a:xfrm>
           <a:prstGeom prst="rect">
             <a:avLst/>
@@ -18879,7 +18879,7 @@
         <p:spPr>
           <a:xfrm>
             <a:off x="5605200" y="1874520"/>
-            <a:ext cx="3107880" cy="346320"/>
+            <a:ext cx="3107520" cy="345960"/>
           </a:xfrm>
           <a:prstGeom prst="rect">
             <a:avLst/>
@@ -18934,7 +18934,7 @@
         <p:spPr>
           <a:xfrm>
             <a:off x="5605200" y="2240280"/>
-            <a:ext cx="3107880" cy="501840"/>
+            <a:ext cx="3107520" cy="501480"/>
           </a:xfrm>
           <a:prstGeom prst="rect">
             <a:avLst/>
@@ -18989,7 +18989,7 @@
         <p:spPr>
           <a:xfrm>
             <a:off x="320040" y="3108960"/>
-            <a:ext cx="4159440" cy="1187640"/>
+            <a:ext cx="4159080" cy="1187280"/>
           </a:xfrm>
           <a:prstGeom prst="rect">
             <a:avLst/>
@@ -19027,7 +19027,7 @@
         <p:spPr>
           <a:xfrm>
             <a:off x="457200" y="3310200"/>
-            <a:ext cx="639000" cy="639000"/>
+            <a:ext cx="638640" cy="638640"/>
           </a:xfrm>
           <a:prstGeom prst="ellipse">
             <a:avLst/>
@@ -19058,7 +19058,7 @@
         <p:spPr>
           <a:xfrm>
             <a:off x="457200" y="3310200"/>
-            <a:ext cx="639000" cy="639000"/>
+            <a:ext cx="638640" cy="638640"/>
           </a:xfrm>
           <a:prstGeom prst="rect">
             <a:avLst/>
@@ -19113,7 +19113,7 @@
         <p:spPr>
           <a:xfrm>
             <a:off x="1216080" y="3246120"/>
-            <a:ext cx="3107880" cy="346320"/>
+            <a:ext cx="3107520" cy="345960"/>
           </a:xfrm>
           <a:prstGeom prst="rect">
             <a:avLst/>
@@ -19168,7 +19168,7 @@
         <p:spPr>
           <a:xfrm>
             <a:off x="1216080" y="3611880"/>
-            <a:ext cx="3107880" cy="501840"/>
+            <a:ext cx="3107520" cy="501480"/>
           </a:xfrm>
           <a:prstGeom prst="rect">
             <a:avLst/>
@@ -19223,7 +19223,7 @@
         <p:spPr>
           <a:xfrm>
             <a:off x="4709160" y="3108960"/>
-            <a:ext cx="4159440" cy="1187640"/>
+            <a:ext cx="4159080" cy="1187280"/>
           </a:xfrm>
           <a:prstGeom prst="rect">
             <a:avLst/>
@@ -19261,7 +19261,7 @@
         <p:spPr>
           <a:xfrm>
             <a:off x="4846320" y="3310200"/>
-            <a:ext cx="639000" cy="639000"/>
+            <a:ext cx="638640" cy="638640"/>
           </a:xfrm>
           <a:prstGeom prst="ellipse">
             <a:avLst/>
@@ -19292,7 +19292,7 @@
         <p:spPr>
           <a:xfrm>
             <a:off x="4846320" y="3310200"/>
-            <a:ext cx="639000" cy="639000"/>
+            <a:ext cx="638640" cy="638640"/>
           </a:xfrm>
           <a:prstGeom prst="rect">
             <a:avLst/>
@@ -19347,7 +19347,7 @@
         <p:spPr>
           <a:xfrm>
             <a:off x="5605200" y="3246120"/>
-            <a:ext cx="3107880" cy="346320"/>
+            <a:ext cx="3107520" cy="345960"/>
           </a:xfrm>
           <a:prstGeom prst="rect">
             <a:avLst/>
@@ -19402,7 +19402,7 @@
         <p:spPr>
           <a:xfrm>
             <a:off x="5605200" y="3611880"/>
-            <a:ext cx="3107880" cy="501840"/>
+            <a:ext cx="3107520" cy="501480"/>
           </a:xfrm>
           <a:prstGeom prst="rect">
             <a:avLst/>
@@ -19494,7 +19494,7 @@
         <p:spPr>
           <a:xfrm>
             <a:off x="0" y="0"/>
-            <a:ext cx="163080" cy="5142240"/>
+            <a:ext cx="162720" cy="5141880"/>
           </a:xfrm>
           <a:prstGeom prst="rect">
             <a:avLst/>
@@ -19525,7 +19525,7 @@
         <p:spPr>
           <a:xfrm>
             <a:off x="0" y="0"/>
-            <a:ext cx="9142560" cy="912960"/>
+            <a:ext cx="9142200" cy="912600"/>
           </a:xfrm>
           <a:prstGeom prst="rect">
             <a:avLst/>
@@ -19556,7 +19556,7 @@
         <p:spPr>
           <a:xfrm>
             <a:off x="365760" y="109800"/>
-            <a:ext cx="8228160" cy="711720"/>
+            <a:ext cx="8227800" cy="711360"/>
           </a:xfrm>
           <a:prstGeom prst="rect">
             <a:avLst/>
@@ -19611,7 +19611,7 @@
         <p:spPr>
           <a:xfrm>
             <a:off x="320040" y="1024200"/>
-            <a:ext cx="8502480" cy="410040"/>
+            <a:ext cx="8502120" cy="409680"/>
           </a:xfrm>
           <a:prstGeom prst="rect">
             <a:avLst/>
@@ -19666,7 +19666,7 @@
         <p:spPr>
           <a:xfrm>
             <a:off x="320040" y="1554480"/>
-            <a:ext cx="2147400" cy="410040"/>
+            <a:ext cx="2147040" cy="409680"/>
           </a:xfrm>
           <a:prstGeom prst="rect">
             <a:avLst/>
@@ -19697,7 +19697,7 @@
         <p:spPr>
           <a:xfrm>
             <a:off x="2468880" y="1554480"/>
-            <a:ext cx="1370160" cy="410040"/>
+            <a:ext cx="1369800" cy="409680"/>
           </a:xfrm>
           <a:prstGeom prst="rect">
             <a:avLst/>
@@ -19728,7 +19728,7 @@
         <p:spPr>
           <a:xfrm>
             <a:off x="3840480" y="1554480"/>
-            <a:ext cx="1553040" cy="410040"/>
+            <a:ext cx="1552680" cy="409680"/>
           </a:xfrm>
           <a:prstGeom prst="rect">
             <a:avLst/>
@@ -19759,7 +19759,7 @@
         <p:spPr>
           <a:xfrm>
             <a:off x="5394960" y="1554480"/>
-            <a:ext cx="1461600" cy="410040"/>
+            <a:ext cx="1461240" cy="409680"/>
           </a:xfrm>
           <a:prstGeom prst="rect">
             <a:avLst/>
@@ -19790,7 +19790,7 @@
         <p:spPr>
           <a:xfrm>
             <a:off x="6858000" y="1554480"/>
-            <a:ext cx="1964520" cy="410040"/>
+            <a:ext cx="1964160" cy="409680"/>
           </a:xfrm>
           <a:prstGeom prst="rect">
             <a:avLst/>
@@ -19821,7 +19821,7 @@
         <p:spPr>
           <a:xfrm>
             <a:off x="320040" y="1554480"/>
-            <a:ext cx="2284560" cy="410040"/>
+            <a:ext cx="2284200" cy="409680"/>
           </a:xfrm>
           <a:prstGeom prst="rect">
             <a:avLst/>
@@ -19876,7 +19876,7 @@
         <p:spPr>
           <a:xfrm>
             <a:off x="6583680" y="1554480"/>
-            <a:ext cx="2284560" cy="410040"/>
+            <a:ext cx="2284200" cy="409680"/>
           </a:xfrm>
           <a:prstGeom prst="rect">
             <a:avLst/>
@@ -19931,7 +19931,7 @@
         <p:spPr>
           <a:xfrm>
             <a:off x="320040" y="2194560"/>
-            <a:ext cx="4159080" cy="1141560"/>
+            <a:ext cx="4158720" cy="1141200"/>
           </a:xfrm>
           <a:prstGeom prst="rect">
             <a:avLst/>
@@ -19969,7 +19969,7 @@
         <p:spPr>
           <a:xfrm>
             <a:off x="320040" y="2194560"/>
-            <a:ext cx="108360" cy="1141560"/>
+            <a:ext cx="108000" cy="1141200"/>
           </a:xfrm>
           <a:prstGeom prst="rect">
             <a:avLst/>
@@ -20000,7 +20000,7 @@
         <p:spPr>
           <a:xfrm>
             <a:off x="548640" y="2286000"/>
-            <a:ext cx="1095840" cy="364320"/>
+            <a:ext cx="1095480" cy="363960"/>
           </a:xfrm>
           <a:prstGeom prst="rect">
             <a:avLst/>
@@ -20055,7 +20055,7 @@
         <p:spPr>
           <a:xfrm>
             <a:off x="1691640" y="2304360"/>
-            <a:ext cx="2650320" cy="345960"/>
+            <a:ext cx="2649960" cy="345600"/>
           </a:xfrm>
           <a:prstGeom prst="rect">
             <a:avLst/>
@@ -20110,7 +20110,7 @@
         <p:spPr>
           <a:xfrm>
             <a:off x="548640" y="2788920"/>
-            <a:ext cx="3747600" cy="410040"/>
+            <a:ext cx="3747240" cy="409680"/>
           </a:xfrm>
           <a:prstGeom prst="rect">
             <a:avLst/>
@@ -20165,7 +20165,7 @@
         <p:spPr>
           <a:xfrm>
             <a:off x="4709160" y="2194560"/>
-            <a:ext cx="4159080" cy="1141560"/>
+            <a:ext cx="4158720" cy="1141200"/>
           </a:xfrm>
           <a:prstGeom prst="rect">
             <a:avLst/>
@@ -20203,7 +20203,7 @@
         <p:spPr>
           <a:xfrm>
             <a:off x="4709160" y="2194560"/>
-            <a:ext cx="108360" cy="1141560"/>
+            <a:ext cx="108000" cy="1141200"/>
           </a:xfrm>
           <a:prstGeom prst="rect">
             <a:avLst/>
@@ -20234,7 +20234,7 @@
         <p:spPr>
           <a:xfrm>
             <a:off x="4937760" y="2286000"/>
-            <a:ext cx="1095840" cy="364320"/>
+            <a:ext cx="1095480" cy="363960"/>
           </a:xfrm>
           <a:prstGeom prst="rect">
             <a:avLst/>
@@ -20289,7 +20289,7 @@
         <p:spPr>
           <a:xfrm>
             <a:off x="6080760" y="2304360"/>
-            <a:ext cx="2650320" cy="345960"/>
+            <a:ext cx="2649960" cy="345600"/>
           </a:xfrm>
           <a:prstGeom prst="rect">
             <a:avLst/>
@@ -20344,7 +20344,7 @@
         <p:spPr>
           <a:xfrm>
             <a:off x="4937760" y="2788920"/>
-            <a:ext cx="3747600" cy="410040"/>
+            <a:ext cx="3747240" cy="409680"/>
           </a:xfrm>
           <a:prstGeom prst="rect">
             <a:avLst/>
@@ -20399,7 +20399,7 @@
         <p:spPr>
           <a:xfrm>
             <a:off x="320040" y="3520440"/>
-            <a:ext cx="4159080" cy="1141560"/>
+            <a:ext cx="4158720" cy="1141200"/>
           </a:xfrm>
           <a:prstGeom prst="rect">
             <a:avLst/>
@@ -20437,7 +20437,7 @@
         <p:spPr>
           <a:xfrm>
             <a:off x="320040" y="3520440"/>
-            <a:ext cx="108360" cy="1141560"/>
+            <a:ext cx="108000" cy="1141200"/>
           </a:xfrm>
           <a:prstGeom prst="rect">
             <a:avLst/>
@@ -20468,7 +20468,7 @@
         <p:spPr>
           <a:xfrm>
             <a:off x="548640" y="3611880"/>
-            <a:ext cx="1095840" cy="364320"/>
+            <a:ext cx="1095480" cy="363960"/>
           </a:xfrm>
           <a:prstGeom prst="rect">
             <a:avLst/>
@@ -20523,7 +20523,7 @@
         <p:spPr>
           <a:xfrm>
             <a:off x="1691640" y="3630240"/>
-            <a:ext cx="2650320" cy="345960"/>
+            <a:ext cx="2649960" cy="345600"/>
           </a:xfrm>
           <a:prstGeom prst="rect">
             <a:avLst/>
@@ -20578,7 +20578,7 @@
         <p:spPr>
           <a:xfrm>
             <a:off x="548640" y="4114800"/>
-            <a:ext cx="3747600" cy="410040"/>
+            <a:ext cx="3747240" cy="409680"/>
           </a:xfrm>
           <a:prstGeom prst="rect">
             <a:avLst/>
@@ -20633,7 +20633,7 @@
         <p:spPr>
           <a:xfrm>
             <a:off x="4709160" y="3520440"/>
-            <a:ext cx="4159080" cy="1141560"/>
+            <a:ext cx="4158720" cy="1141200"/>
           </a:xfrm>
           <a:prstGeom prst="rect">
             <a:avLst/>
@@ -20671,7 +20671,7 @@
         <p:spPr>
           <a:xfrm>
             <a:off x="4709160" y="3520440"/>
-            <a:ext cx="108360" cy="1141560"/>
+            <a:ext cx="108000" cy="1141200"/>
           </a:xfrm>
           <a:prstGeom prst="rect">
             <a:avLst/>
@@ -20702,7 +20702,7 @@
         <p:spPr>
           <a:xfrm>
             <a:off x="4937760" y="3611880"/>
-            <a:ext cx="1095840" cy="364320"/>
+            <a:ext cx="1095480" cy="363960"/>
           </a:xfrm>
           <a:prstGeom prst="rect">
             <a:avLst/>
@@ -20757,7 +20757,7 @@
         <p:spPr>
           <a:xfrm>
             <a:off x="6080760" y="3630240"/>
-            <a:ext cx="2650320" cy="345960"/>
+            <a:ext cx="2649960" cy="345600"/>
           </a:xfrm>
           <a:prstGeom prst="rect">
             <a:avLst/>
@@ -20812,7 +20812,7 @@
         <p:spPr>
           <a:xfrm>
             <a:off x="4937760" y="4114800"/>
-            <a:ext cx="3747600" cy="410040"/>
+            <a:ext cx="3747240" cy="409680"/>
           </a:xfrm>
           <a:prstGeom prst="rect">
             <a:avLst/>
@@ -20904,7 +20904,7 @@
         <p:spPr>
           <a:xfrm>
             <a:off x="0" y="0"/>
-            <a:ext cx="163440" cy="5142600"/>
+            <a:ext cx="163080" cy="5142240"/>
           </a:xfrm>
           <a:prstGeom prst="rect">
             <a:avLst/>
@@ -20935,7 +20935,7 @@
         <p:spPr>
           <a:xfrm>
             <a:off x="0" y="0"/>
-            <a:ext cx="9142920" cy="913320"/>
+            <a:ext cx="9142560" cy="912960"/>
           </a:xfrm>
           <a:prstGeom prst="rect">
             <a:avLst/>
@@ -20966,7 +20966,7 @@
         <p:spPr>
           <a:xfrm>
             <a:off x="365760" y="109800"/>
-            <a:ext cx="8228520" cy="712080"/>
+            <a:ext cx="8228160" cy="711720"/>
           </a:xfrm>
           <a:prstGeom prst="rect">
             <a:avLst/>
@@ -21021,7 +21021,7 @@
         <p:spPr>
           <a:xfrm>
             <a:off x="320040" y="1024200"/>
-            <a:ext cx="8502840" cy="776160"/>
+            <a:ext cx="8502480" cy="775800"/>
           </a:xfrm>
           <a:prstGeom prst="rect">
             <a:avLst/>
@@ -21052,7 +21052,7 @@
         <p:spPr>
           <a:xfrm>
             <a:off x="548640" y="1024200"/>
-            <a:ext cx="1187640" cy="776160"/>
+            <a:ext cx="1187280" cy="775800"/>
           </a:xfrm>
           <a:prstGeom prst="rect">
             <a:avLst/>
@@ -21107,7 +21107,7 @@
         <p:spPr>
           <a:xfrm>
             <a:off x="1828800" y="1024200"/>
-            <a:ext cx="6765480" cy="776160"/>
+            <a:ext cx="6765120" cy="775800"/>
           </a:xfrm>
           <a:prstGeom prst="rect">
             <a:avLst/>
@@ -21162,7 +21162,7 @@
         <p:spPr>
           <a:xfrm>
             <a:off x="320040" y="1993320"/>
-            <a:ext cx="776160" cy="776160"/>
+            <a:ext cx="775800" cy="775800"/>
           </a:xfrm>
           <a:prstGeom prst="ellipse">
             <a:avLst/>
@@ -21193,7 +21193,7 @@
         <p:spPr>
           <a:xfrm>
             <a:off x="320040" y="1993320"/>
-            <a:ext cx="776160" cy="776160"/>
+            <a:ext cx="775800" cy="775800"/>
           </a:xfrm>
           <a:prstGeom prst="rect">
             <a:avLst/>
@@ -21248,7 +21248,7 @@
         <p:spPr>
           <a:xfrm>
             <a:off x="-137160" y="2834640"/>
-            <a:ext cx="1690560" cy="346320"/>
+            <a:ext cx="1690200" cy="345960"/>
           </a:xfrm>
           <a:prstGeom prst="rect">
             <a:avLst/>
@@ -21303,7 +21303,7 @@
         <p:spPr>
           <a:xfrm>
             <a:off x="3200400" y="1993320"/>
-            <a:ext cx="776160" cy="776160"/>
+            <a:ext cx="775800" cy="775800"/>
           </a:xfrm>
           <a:prstGeom prst="ellipse">
             <a:avLst/>
@@ -21334,7 +21334,7 @@
         <p:spPr>
           <a:xfrm>
             <a:off x="3200400" y="1993320"/>
-            <a:ext cx="776160" cy="776160"/>
+            <a:ext cx="775800" cy="775800"/>
           </a:xfrm>
           <a:prstGeom prst="rect">
             <a:avLst/>
@@ -21389,7 +21389,7 @@
         <p:spPr>
           <a:xfrm>
             <a:off x="2743200" y="2834640"/>
-            <a:ext cx="1690560" cy="346320"/>
+            <a:ext cx="1690200" cy="345960"/>
           </a:xfrm>
           <a:prstGeom prst="rect">
             <a:avLst/>
@@ -21444,7 +21444,7 @@
         <p:spPr>
           <a:xfrm>
             <a:off x="6080760" y="1993320"/>
-            <a:ext cx="776160" cy="776160"/>
+            <a:ext cx="775800" cy="775800"/>
           </a:xfrm>
           <a:prstGeom prst="ellipse">
             <a:avLst/>
@@ -21475,7 +21475,7 @@
         <p:spPr>
           <a:xfrm>
             <a:off x="6080760" y="1993320"/>
-            <a:ext cx="776160" cy="776160"/>
+            <a:ext cx="775800" cy="775800"/>
           </a:xfrm>
           <a:prstGeom prst="rect">
             <a:avLst/>
@@ -21530,7 +21530,7 @@
         <p:spPr>
           <a:xfrm>
             <a:off x="5623560" y="2834640"/>
-            <a:ext cx="1690560" cy="346320"/>
+            <a:ext cx="1690200" cy="345960"/>
           </a:xfrm>
           <a:prstGeom prst="rect">
             <a:avLst/>
@@ -21585,7 +21585,7 @@
         <p:spPr>
           <a:xfrm>
             <a:off x="1097280" y="2350080"/>
-            <a:ext cx="2102040" cy="53640"/>
+            <a:ext cx="2101680" cy="53280"/>
           </a:xfrm>
           <a:prstGeom prst="rect">
             <a:avLst/>
@@ -21616,7 +21616,7 @@
         <p:spPr>
           <a:xfrm>
             <a:off x="3977640" y="2350080"/>
-            <a:ext cx="2102040" cy="53640"/>
+            <a:ext cx="2101680" cy="53280"/>
           </a:xfrm>
           <a:prstGeom prst="rect">
             <a:avLst/>
@@ -21647,7 +21647,7 @@
         <p:spPr>
           <a:xfrm>
             <a:off x="320040" y="3337560"/>
-            <a:ext cx="8502840" cy="346320"/>
+            <a:ext cx="8502480" cy="345960"/>
           </a:xfrm>
           <a:prstGeom prst="rect">
             <a:avLst/>
@@ -21702,7 +21702,7 @@
         <p:spPr>
           <a:xfrm>
             <a:off x="320040" y="3749040"/>
-            <a:ext cx="2742120" cy="684720"/>
+            <a:ext cx="2741760" cy="684360"/>
           </a:xfrm>
           <a:prstGeom prst="rect">
             <a:avLst/>
@@ -21740,7 +21740,7 @@
         <p:spPr>
           <a:xfrm>
             <a:off x="320040" y="3749040"/>
-            <a:ext cx="2742120" cy="90360"/>
+            <a:ext cx="2741760" cy="90000"/>
           </a:xfrm>
           <a:prstGeom prst="rect">
             <a:avLst/>
@@ -21771,7 +21771,7 @@
         <p:spPr>
           <a:xfrm>
             <a:off x="320040" y="3840480"/>
-            <a:ext cx="2742120" cy="501840"/>
+            <a:ext cx="2741760" cy="501480"/>
           </a:xfrm>
           <a:prstGeom prst="rect">
             <a:avLst/>
@@ -21826,7 +21826,7 @@
         <p:spPr>
           <a:xfrm>
             <a:off x="3264480" y="3749040"/>
-            <a:ext cx="2742120" cy="684720"/>
+            <a:ext cx="2741760" cy="684360"/>
           </a:xfrm>
           <a:prstGeom prst="rect">
             <a:avLst/>
@@ -21864,7 +21864,7 @@
         <p:spPr>
           <a:xfrm>
             <a:off x="3264480" y="3749040"/>
-            <a:ext cx="2742120" cy="90360"/>
+            <a:ext cx="2741760" cy="90000"/>
           </a:xfrm>
           <a:prstGeom prst="rect">
             <a:avLst/>
@@ -21895,7 +21895,7 @@
         <p:spPr>
           <a:xfrm>
             <a:off x="3264480" y="3840480"/>
-            <a:ext cx="2742120" cy="501840"/>
+            <a:ext cx="2741760" cy="501480"/>
           </a:xfrm>
           <a:prstGeom prst="rect">
             <a:avLst/>
@@ -21950,7 +21950,7 @@
         <p:spPr>
           <a:xfrm>
             <a:off x="6208920" y="3749040"/>
-            <a:ext cx="2742120" cy="684720"/>
+            <a:ext cx="2741760" cy="684360"/>
           </a:xfrm>
           <a:prstGeom prst="rect">
             <a:avLst/>
@@ -21988,7 +21988,7 @@
         <p:spPr>
           <a:xfrm>
             <a:off x="6208920" y="3749040"/>
-            <a:ext cx="2742120" cy="90360"/>
+            <a:ext cx="2741760" cy="90000"/>
           </a:xfrm>
           <a:prstGeom prst="rect">
             <a:avLst/>
@@ -22019,7 +22019,7 @@
         <p:spPr>
           <a:xfrm>
             <a:off x="6208920" y="3840480"/>
-            <a:ext cx="2742120" cy="501840"/>
+            <a:ext cx="2741760" cy="501480"/>
           </a:xfrm>
           <a:prstGeom prst="rect">
             <a:avLst/>
@@ -22074,7 +22074,7 @@
         <p:spPr>
           <a:xfrm>
             <a:off x="320040" y="4544640"/>
-            <a:ext cx="8502840" cy="383040"/>
+            <a:ext cx="8502480" cy="382680"/>
           </a:xfrm>
           <a:prstGeom prst="rect">
             <a:avLst/>
@@ -22166,7 +22166,7 @@
         <p:spPr>
           <a:xfrm>
             <a:off x="0" y="0"/>
-            <a:ext cx="163440" cy="5142600"/>
+            <a:ext cx="163080" cy="5142240"/>
           </a:xfrm>
           <a:prstGeom prst="rect">
             <a:avLst/>
@@ -22197,7 +22197,7 @@
         <p:spPr>
           <a:xfrm>
             <a:off x="0" y="0"/>
-            <a:ext cx="9142920" cy="913320"/>
+            <a:ext cx="9142560" cy="912960"/>
           </a:xfrm>
           <a:prstGeom prst="rect">
             <a:avLst/>
@@ -22228,7 +22228,7 @@
         <p:spPr>
           <a:xfrm>
             <a:off x="365760" y="109800"/>
-            <a:ext cx="8228520" cy="712080"/>
+            <a:ext cx="8228160" cy="711720"/>
           </a:xfrm>
           <a:prstGeom prst="rect">
             <a:avLst/>
@@ -22283,7 +22283,7 @@
         <p:spPr>
           <a:xfrm>
             <a:off x="320040" y="1005840"/>
-            <a:ext cx="5485320" cy="3839400"/>
+            <a:ext cx="5484960" cy="3839040"/>
           </a:xfrm>
           <a:prstGeom prst="rect">
             <a:avLst/>
@@ -22314,7 +22314,7 @@
         <p:spPr>
           <a:xfrm>
             <a:off x="457200" y="1097280"/>
-            <a:ext cx="5302440" cy="3656520"/>
+            <a:ext cx="5302080" cy="3656160"/>
           </a:xfrm>
           <a:prstGeom prst="rect">
             <a:avLst/>
@@ -22831,7 +22831,7 @@
         <p:spPr>
           <a:xfrm>
             <a:off x="5943600" y="1005840"/>
-            <a:ext cx="2925000" cy="3839400"/>
+            <a:ext cx="2924640" cy="3839040"/>
           </a:xfrm>
           <a:prstGeom prst="rect">
             <a:avLst/>
@@ -22862,7 +22862,7 @@
         <p:spPr>
           <a:xfrm>
             <a:off x="5943600" y="1005840"/>
-            <a:ext cx="2925000" cy="364680"/>
+            <a:ext cx="2924640" cy="364320"/>
           </a:xfrm>
           <a:prstGeom prst="rect">
             <a:avLst/>
@@ -22917,7 +22917,7 @@
         <p:spPr>
           <a:xfrm>
             <a:off x="6080760" y="1463040"/>
-            <a:ext cx="730440" cy="501840"/>
+            <a:ext cx="730080" cy="501480"/>
           </a:xfrm>
           <a:prstGeom prst="rect">
             <a:avLst/>
@@ -22972,7 +22972,7 @@
         <p:spPr>
           <a:xfrm>
             <a:off x="6858000" y="1463040"/>
-            <a:ext cx="1827720" cy="501840"/>
+            <a:ext cx="1827360" cy="501480"/>
           </a:xfrm>
           <a:prstGeom prst="rect">
             <a:avLst/>
@@ -23027,7 +23027,7 @@
         <p:spPr>
           <a:xfrm>
             <a:off x="6080760" y="2103120"/>
-            <a:ext cx="730440" cy="501840"/>
+            <a:ext cx="730080" cy="501480"/>
           </a:xfrm>
           <a:prstGeom prst="rect">
             <a:avLst/>
@@ -23082,7 +23082,7 @@
         <p:spPr>
           <a:xfrm>
             <a:off x="6858000" y="2103120"/>
-            <a:ext cx="1827720" cy="501840"/>
+            <a:ext cx="1827360" cy="501480"/>
           </a:xfrm>
           <a:prstGeom prst="rect">
             <a:avLst/>
@@ -23137,7 +23137,7 @@
         <p:spPr>
           <a:xfrm>
             <a:off x="6080760" y="2743200"/>
-            <a:ext cx="730440" cy="501840"/>
+            <a:ext cx="730080" cy="501480"/>
           </a:xfrm>
           <a:prstGeom prst="rect">
             <a:avLst/>
@@ -23192,7 +23192,7 @@
         <p:spPr>
           <a:xfrm>
             <a:off x="6858000" y="2743200"/>
-            <a:ext cx="1827720" cy="501840"/>
+            <a:ext cx="1827360" cy="501480"/>
           </a:xfrm>
           <a:prstGeom prst="rect">
             <a:avLst/>
@@ -23247,7 +23247,7 @@
         <p:spPr>
           <a:xfrm>
             <a:off x="6080760" y="3383280"/>
-            <a:ext cx="730440" cy="501840"/>
+            <a:ext cx="730080" cy="501480"/>
           </a:xfrm>
           <a:prstGeom prst="rect">
             <a:avLst/>
@@ -23302,7 +23302,7 @@
         <p:spPr>
           <a:xfrm>
             <a:off x="6858000" y="3383280"/>
-            <a:ext cx="1827720" cy="501840"/>
+            <a:ext cx="1827360" cy="501480"/>
           </a:xfrm>
           <a:prstGeom prst="rect">
             <a:avLst/>
@@ -23357,7 +23357,7 @@
         <p:spPr>
           <a:xfrm>
             <a:off x="6080760" y="4023360"/>
-            <a:ext cx="730440" cy="501840"/>
+            <a:ext cx="730080" cy="501480"/>
           </a:xfrm>
           <a:prstGeom prst="rect">
             <a:avLst/>
@@ -23412,7 +23412,7 @@
         <p:spPr>
           <a:xfrm>
             <a:off x="6858000" y="4023360"/>
-            <a:ext cx="1827720" cy="501840"/>
+            <a:ext cx="1827360" cy="501480"/>
           </a:xfrm>
           <a:prstGeom prst="rect">
             <a:avLst/>
@@ -23504,7 +23504,7 @@
         <p:spPr>
           <a:xfrm>
             <a:off x="0" y="0"/>
-            <a:ext cx="163440" cy="5142600"/>
+            <a:ext cx="163080" cy="5142240"/>
           </a:xfrm>
           <a:prstGeom prst="rect">
             <a:avLst/>
@@ -23535,7 +23535,7 @@
         <p:spPr>
           <a:xfrm>
             <a:off x="0" y="0"/>
-            <a:ext cx="9142920" cy="913320"/>
+            <a:ext cx="9142560" cy="912960"/>
           </a:xfrm>
           <a:prstGeom prst="rect">
             <a:avLst/>
@@ -23566,7 +23566,7 @@
         <p:spPr>
           <a:xfrm>
             <a:off x="365760" y="109800"/>
-            <a:ext cx="8228520" cy="712080"/>
+            <a:ext cx="8228160" cy="711720"/>
           </a:xfrm>
           <a:prstGeom prst="rect">
             <a:avLst/>
@@ -23621,7 +23621,7 @@
         <p:spPr>
           <a:xfrm>
             <a:off x="320040" y="1005840"/>
-            <a:ext cx="5485320" cy="3839400"/>
+            <a:ext cx="5484960" cy="3839040"/>
           </a:xfrm>
           <a:prstGeom prst="rect">
             <a:avLst/>
@@ -23652,7 +23652,7 @@
         <p:spPr>
           <a:xfrm>
             <a:off x="457200" y="1097280"/>
-            <a:ext cx="5302440" cy="3656520"/>
+            <a:ext cx="5302080" cy="3656160"/>
           </a:xfrm>
           <a:prstGeom prst="rect">
             <a:avLst/>
@@ -24170,7 +24170,7 @@
         <p:spPr>
           <a:xfrm>
             <a:off x="5943600" y="1005840"/>
-            <a:ext cx="2925000" cy="2010600"/>
+            <a:ext cx="2924640" cy="2010240"/>
           </a:xfrm>
           <a:prstGeom prst="rect">
             <a:avLst/>
@@ -24201,7 +24201,7 @@
         <p:spPr>
           <a:xfrm>
             <a:off x="5943600" y="1005840"/>
-            <a:ext cx="2925000" cy="364680"/>
+            <a:ext cx="2924640" cy="364320"/>
           </a:xfrm>
           <a:prstGeom prst="rect">
             <a:avLst/>
@@ -24256,7 +24256,7 @@
         <p:spPr>
           <a:xfrm>
             <a:off x="6035040" y="1417320"/>
-            <a:ext cx="2742120" cy="1416240"/>
+            <a:ext cx="2741760" cy="1415880"/>
           </a:xfrm>
           <a:prstGeom prst="rect">
             <a:avLst/>
@@ -24411,7 +24411,7 @@
         <p:spPr>
           <a:xfrm>
             <a:off x="5943600" y="3154680"/>
-            <a:ext cx="2925000" cy="1690560"/>
+            <a:ext cx="2924640" cy="1690200"/>
           </a:xfrm>
           <a:prstGeom prst="rect">
             <a:avLst/>
@@ -24442,7 +24442,7 @@
         <p:spPr>
           <a:xfrm>
             <a:off x="5943600" y="3154680"/>
-            <a:ext cx="2925000" cy="364680"/>
+            <a:ext cx="2924640" cy="364320"/>
           </a:xfrm>
           <a:prstGeom prst="rect">
             <a:avLst/>
@@ -24497,7 +24497,7 @@
         <p:spPr>
           <a:xfrm>
             <a:off x="6080760" y="3584520"/>
-            <a:ext cx="2650680" cy="291600"/>
+            <a:ext cx="2650320" cy="291240"/>
           </a:xfrm>
           <a:prstGeom prst="rect">
             <a:avLst/>
@@ -24552,7 +24552,7 @@
         <p:spPr>
           <a:xfrm>
             <a:off x="6080760" y="3904560"/>
-            <a:ext cx="2650680" cy="291600"/>
+            <a:ext cx="2650320" cy="291240"/>
           </a:xfrm>
           <a:prstGeom prst="rect">
             <a:avLst/>
@@ -24607,7 +24607,7 @@
         <p:spPr>
           <a:xfrm>
             <a:off x="6080760" y="4224600"/>
-            <a:ext cx="2650680" cy="291600"/>
+            <a:ext cx="2650320" cy="291240"/>
           </a:xfrm>
           <a:prstGeom prst="rect">
             <a:avLst/>
@@ -24662,7 +24662,7 @@
         <p:spPr>
           <a:xfrm>
             <a:off x="6080760" y="4544640"/>
-            <a:ext cx="2650680" cy="291600"/>
+            <a:ext cx="2650320" cy="291240"/>
           </a:xfrm>
           <a:prstGeom prst="rect">
             <a:avLst/>
@@ -24754,7 +24754,7 @@
         <p:spPr>
           <a:xfrm>
             <a:off x="0" y="0"/>
-            <a:ext cx="163440" cy="5142600"/>
+            <a:ext cx="163080" cy="5142240"/>
           </a:xfrm>
           <a:prstGeom prst="rect">
             <a:avLst/>
@@ -24785,7 +24785,7 @@
         <p:spPr>
           <a:xfrm>
             <a:off x="0" y="0"/>
-            <a:ext cx="9142920" cy="913320"/>
+            <a:ext cx="9142560" cy="912960"/>
           </a:xfrm>
           <a:prstGeom prst="rect">
             <a:avLst/>
@@ -24816,7 +24816,7 @@
         <p:spPr>
           <a:xfrm>
             <a:off x="365760" y="109800"/>
-            <a:ext cx="8228520" cy="712080"/>
+            <a:ext cx="8228160" cy="711720"/>
           </a:xfrm>
           <a:prstGeom prst="rect">
             <a:avLst/>
@@ -24871,7 +24871,7 @@
         <p:spPr>
           <a:xfrm>
             <a:off x="320040" y="1005840"/>
-            <a:ext cx="5485320" cy="3839400"/>
+            <a:ext cx="5484960" cy="3839040"/>
           </a:xfrm>
           <a:prstGeom prst="rect">
             <a:avLst/>
@@ -24902,7 +24902,7 @@
         <p:spPr>
           <a:xfrm>
             <a:off x="457200" y="1097280"/>
-            <a:ext cx="5302440" cy="3656520"/>
+            <a:ext cx="5302080" cy="3656160"/>
           </a:xfrm>
           <a:prstGeom prst="rect">
             <a:avLst/>
@@ -25355,7 +25355,7 @@
         <p:spPr>
           <a:xfrm>
             <a:off x="5943600" y="1005840"/>
-            <a:ext cx="2925000" cy="1644840"/>
+            <a:ext cx="2924640" cy="1644480"/>
           </a:xfrm>
           <a:prstGeom prst="rect">
             <a:avLst/>
@@ -25386,7 +25386,7 @@
         <p:spPr>
           <a:xfrm>
             <a:off x="5943600" y="1005840"/>
-            <a:ext cx="2925000" cy="346320"/>
+            <a:ext cx="2924640" cy="345960"/>
           </a:xfrm>
           <a:prstGeom prst="rect">
             <a:avLst/>
@@ -25441,7 +25441,7 @@
         <p:spPr>
           <a:xfrm>
             <a:off x="6035040" y="1389960"/>
-            <a:ext cx="2742120" cy="776160"/>
+            <a:ext cx="2741760" cy="775800"/>
           </a:xfrm>
           <a:prstGeom prst="rect">
             <a:avLst/>
@@ -25510,7 +25510,7 @@
         <p:spPr>
           <a:xfrm>
             <a:off x="5943600" y="2788920"/>
-            <a:ext cx="2925000" cy="1827720"/>
+            <a:ext cx="2924640" cy="1827360"/>
           </a:xfrm>
           <a:prstGeom prst="rect">
             <a:avLst/>
@@ -25541,7 +25541,7 @@
         <p:spPr>
           <a:xfrm>
             <a:off x="5943600" y="2788920"/>
-            <a:ext cx="2925000" cy="346320"/>
+            <a:ext cx="2924640" cy="345960"/>
           </a:xfrm>
           <a:prstGeom prst="rect">
             <a:avLst/>
@@ -25596,7 +25596,7 @@
         <p:spPr>
           <a:xfrm>
             <a:off x="6035040" y="3173040"/>
-            <a:ext cx="2742120" cy="1187640"/>
+            <a:ext cx="2741760" cy="1187280"/>
           </a:xfrm>
           <a:prstGeom prst="rect">
             <a:avLst/>
@@ -25659,7 +25659,7 @@
         <p:spPr>
           <a:xfrm>
             <a:off x="0" y="0"/>
-            <a:ext cx="163440" cy="5142600"/>
+            <a:ext cx="163080" cy="5142240"/>
           </a:xfrm>
           <a:prstGeom prst="rect">
             <a:avLst/>
@@ -25690,7 +25690,7 @@
         <p:spPr>
           <a:xfrm>
             <a:off x="0" y="0"/>
-            <a:ext cx="9142920" cy="913320"/>
+            <a:ext cx="9142560" cy="912960"/>
           </a:xfrm>
           <a:prstGeom prst="rect">
             <a:avLst/>
@@ -25721,7 +25721,7 @@
         <p:spPr>
           <a:xfrm>
             <a:off x="365760" y="109800"/>
-            <a:ext cx="8228520" cy="712080"/>
+            <a:ext cx="8228160" cy="711720"/>
           </a:xfrm>
           <a:prstGeom prst="rect">
             <a:avLst/>
@@ -25776,7 +25776,7 @@
         <p:spPr>
           <a:xfrm>
             <a:off x="320040" y="1024200"/>
-            <a:ext cx="8502840" cy="593280"/>
+            <a:ext cx="8502480" cy="592920"/>
           </a:xfrm>
           <a:prstGeom prst="rect">
             <a:avLst/>
@@ -25814,7 +25814,7 @@
         <p:spPr>
           <a:xfrm>
             <a:off x="320040" y="1024200"/>
-            <a:ext cx="8502840" cy="593280"/>
+            <a:ext cx="8502480" cy="592920"/>
           </a:xfrm>
           <a:prstGeom prst="rect">
             <a:avLst/>
@@ -25889,7 +25889,7 @@
         <p:spPr>
           <a:xfrm>
             <a:off x="320040" y="1755720"/>
-            <a:ext cx="2742120" cy="2193480"/>
+            <a:ext cx="2741760" cy="2193120"/>
           </a:xfrm>
           <a:prstGeom prst="rect">
             <a:avLst/>
@@ -25927,7 +25927,7 @@
         <p:spPr>
           <a:xfrm>
             <a:off x="320040" y="1755720"/>
-            <a:ext cx="2742120" cy="456120"/>
+            <a:ext cx="2741760" cy="455760"/>
           </a:xfrm>
           <a:prstGeom prst="rect">
             <a:avLst/>
@@ -25958,7 +25958,7 @@
         <p:spPr>
           <a:xfrm>
             <a:off x="320040" y="1755720"/>
-            <a:ext cx="2742120" cy="456120"/>
+            <a:ext cx="2741760" cy="455760"/>
           </a:xfrm>
           <a:prstGeom prst="rect">
             <a:avLst/>
@@ -26023,7 +26023,7 @@
         <p:spPr>
           <a:xfrm>
             <a:off x="457200" y="2286000"/>
-            <a:ext cx="2467800" cy="1461960"/>
+            <a:ext cx="2467440" cy="1461600"/>
           </a:xfrm>
           <a:prstGeom prst="rect">
             <a:avLst/>
@@ -26078,7 +26078,7 @@
         <p:spPr>
           <a:xfrm>
             <a:off x="3264480" y="1755720"/>
-            <a:ext cx="2742120" cy="2193480"/>
+            <a:ext cx="2741760" cy="2193120"/>
           </a:xfrm>
           <a:prstGeom prst="rect">
             <a:avLst/>
@@ -26116,7 +26116,7 @@
         <p:spPr>
           <a:xfrm>
             <a:off x="3264480" y="1755720"/>
-            <a:ext cx="2742120" cy="456120"/>
+            <a:ext cx="2741760" cy="455760"/>
           </a:xfrm>
           <a:prstGeom prst="rect">
             <a:avLst/>
@@ -26147,7 +26147,7 @@
         <p:spPr>
           <a:xfrm>
             <a:off x="3264480" y="1755720"/>
-            <a:ext cx="2742120" cy="456120"/>
+            <a:ext cx="2741760" cy="455760"/>
           </a:xfrm>
           <a:prstGeom prst="rect">
             <a:avLst/>
@@ -26212,7 +26212,7 @@
         <p:spPr>
           <a:xfrm>
             <a:off x="3401640" y="2286000"/>
-            <a:ext cx="2467800" cy="1461960"/>
+            <a:ext cx="2467440" cy="1461600"/>
           </a:xfrm>
           <a:prstGeom prst="rect">
             <a:avLst/>
@@ -26267,7 +26267,7 @@
         <p:spPr>
           <a:xfrm>
             <a:off x="6208920" y="1755720"/>
-            <a:ext cx="2742120" cy="2193480"/>
+            <a:ext cx="2741760" cy="2193120"/>
           </a:xfrm>
           <a:prstGeom prst="rect">
             <a:avLst/>
@@ -26305,7 +26305,7 @@
         <p:spPr>
           <a:xfrm>
             <a:off x="6208920" y="1755720"/>
-            <a:ext cx="2742120" cy="456120"/>
+            <a:ext cx="2741760" cy="455760"/>
           </a:xfrm>
           <a:prstGeom prst="rect">
             <a:avLst/>
@@ -26336,7 +26336,7 @@
         <p:spPr>
           <a:xfrm>
             <a:off x="6208920" y="1755720"/>
-            <a:ext cx="2742120" cy="456120"/>
+            <a:ext cx="2741760" cy="455760"/>
           </a:xfrm>
           <a:prstGeom prst="rect">
             <a:avLst/>
@@ -26401,7 +26401,7 @@
         <p:spPr>
           <a:xfrm>
             <a:off x="6346080" y="2286000"/>
-            <a:ext cx="2467800" cy="1461960"/>
+            <a:ext cx="2467440" cy="1461600"/>
           </a:xfrm>
           <a:prstGeom prst="rect">
             <a:avLst/>
@@ -26456,7 +26456,7 @@
         <p:spPr>
           <a:xfrm>
             <a:off x="320040" y="4096440"/>
-            <a:ext cx="8502840" cy="821880"/>
+            <a:ext cx="8502480" cy="821520"/>
           </a:xfrm>
           <a:prstGeom prst="rect">
             <a:avLst/>
@@ -26487,7 +26487,7 @@
         <p:spPr>
           <a:xfrm>
             <a:off x="457200" y="4096440"/>
-            <a:ext cx="8228520" cy="821880"/>
+            <a:ext cx="8228160" cy="821520"/>
           </a:xfrm>
           <a:prstGeom prst="rect">
             <a:avLst/>
@@ -26599,7 +26599,7 @@
         <p:spPr>
           <a:xfrm>
             <a:off x="0" y="0"/>
-            <a:ext cx="163440" cy="5142600"/>
+            <a:ext cx="163080" cy="5142240"/>
           </a:xfrm>
           <a:prstGeom prst="rect">
             <a:avLst/>
@@ -26630,7 +26630,7 @@
         <p:spPr>
           <a:xfrm>
             <a:off x="0" y="0"/>
-            <a:ext cx="9142920" cy="913320"/>
+            <a:ext cx="9142560" cy="912960"/>
           </a:xfrm>
           <a:prstGeom prst="rect">
             <a:avLst/>
@@ -26661,7 +26661,7 @@
         <p:spPr>
           <a:xfrm>
             <a:off x="365760" y="109800"/>
-            <a:ext cx="8228520" cy="712080"/>
+            <a:ext cx="8228160" cy="711720"/>
           </a:xfrm>
           <a:prstGeom prst="rect">
             <a:avLst/>
@@ -26716,7 +26716,7 @@
         <p:spPr>
           <a:xfrm>
             <a:off x="320040" y="1005840"/>
-            <a:ext cx="5485320" cy="3839400"/>
+            <a:ext cx="5484960" cy="3839040"/>
           </a:xfrm>
           <a:prstGeom prst="rect">
             <a:avLst/>
@@ -26747,7 +26747,7 @@
         <p:spPr>
           <a:xfrm>
             <a:off x="457200" y="1097280"/>
-            <a:ext cx="5302440" cy="3656520"/>
+            <a:ext cx="5302080" cy="3656160"/>
           </a:xfrm>
           <a:prstGeom prst="rect">
             <a:avLst/>
@@ -27220,7 +27220,7 @@
         <p:spPr>
           <a:xfrm>
             <a:off x="5943600" y="1005840"/>
-            <a:ext cx="2925000" cy="2010600"/>
+            <a:ext cx="2924640" cy="2010240"/>
           </a:xfrm>
           <a:prstGeom prst="rect">
             <a:avLst/>
@@ -27251,7 +27251,7 @@
         <p:spPr>
           <a:xfrm>
             <a:off x="5943600" y="1005840"/>
-            <a:ext cx="2925000" cy="364680"/>
+            <a:ext cx="2924640" cy="364320"/>
           </a:xfrm>
           <a:prstGeom prst="rect">
             <a:avLst/>
@@ -27306,7 +27306,7 @@
         <p:spPr>
           <a:xfrm>
             <a:off x="6035040" y="1417320"/>
-            <a:ext cx="2742120" cy="1370520"/>
+            <a:ext cx="2741760" cy="1370160"/>
           </a:xfrm>
           <a:prstGeom prst="rect">
             <a:avLst/>
@@ -27332,7 +27332,7 @@
         <p:spPr>
           <a:xfrm>
             <a:off x="5943600" y="3154680"/>
-            <a:ext cx="2925000" cy="1690560"/>
+            <a:ext cx="2924640" cy="1690200"/>
           </a:xfrm>
           <a:prstGeom prst="rect">
             <a:avLst/>
@@ -27363,7 +27363,7 @@
         <p:spPr>
           <a:xfrm>
             <a:off x="5943600" y="3154680"/>
-            <a:ext cx="2925000" cy="364680"/>
+            <a:ext cx="2924640" cy="364320"/>
           </a:xfrm>
           <a:prstGeom prst="rect">
             <a:avLst/>
@@ -27418,7 +27418,7 @@
         <p:spPr>
           <a:xfrm>
             <a:off x="6035040" y="3566160"/>
-            <a:ext cx="2742120" cy="1141920"/>
+            <a:ext cx="2741760" cy="1141560"/>
           </a:xfrm>
           <a:prstGeom prst="rect">
             <a:avLst/>
@@ -27510,7 +27510,7 @@
         <p:spPr>
           <a:xfrm>
             <a:off x="0" y="0"/>
-            <a:ext cx="163440" cy="5142600"/>
+            <a:ext cx="163080" cy="5142240"/>
           </a:xfrm>
           <a:prstGeom prst="rect">
             <a:avLst/>
@@ -27541,7 +27541,7 @@
         <p:spPr>
           <a:xfrm>
             <a:off x="0" y="0"/>
-            <a:ext cx="9142920" cy="913320"/>
+            <a:ext cx="9142560" cy="912960"/>
           </a:xfrm>
           <a:prstGeom prst="rect">
             <a:avLst/>
@@ -27572,7 +27572,7 @@
         <p:spPr>
           <a:xfrm>
             <a:off x="365760" y="109800"/>
-            <a:ext cx="8228520" cy="712080"/>
+            <a:ext cx="8228160" cy="711720"/>
           </a:xfrm>
           <a:prstGeom prst="rect">
             <a:avLst/>
@@ -27627,7 +27627,7 @@
         <p:spPr>
           <a:xfrm>
             <a:off x="320040" y="1005840"/>
-            <a:ext cx="5485320" cy="3839400"/>
+            <a:ext cx="5484960" cy="3839040"/>
           </a:xfrm>
           <a:prstGeom prst="rect">
             <a:avLst/>
@@ -27658,7 +27658,7 @@
         <p:spPr>
           <a:xfrm>
             <a:off x="457200" y="1097280"/>
-            <a:ext cx="5302440" cy="3656520"/>
+            <a:ext cx="5302080" cy="3656160"/>
           </a:xfrm>
           <a:prstGeom prst="rect">
             <a:avLst/>
@@ -28135,7 +28135,7 @@
         <p:spPr>
           <a:xfrm>
             <a:off x="5943600" y="1005840"/>
-            <a:ext cx="2925000" cy="1644840"/>
+            <a:ext cx="2924640" cy="1644480"/>
           </a:xfrm>
           <a:prstGeom prst="rect">
             <a:avLst/>
@@ -28166,7 +28166,7 @@
         <p:spPr>
           <a:xfrm>
             <a:off x="5943600" y="1005840"/>
-            <a:ext cx="2925000" cy="364680"/>
+            <a:ext cx="2924640" cy="364320"/>
           </a:xfrm>
           <a:prstGeom prst="rect">
             <a:avLst/>
@@ -28221,7 +28221,7 @@
         <p:spPr>
           <a:xfrm>
             <a:off x="6035040" y="1417320"/>
-            <a:ext cx="2742120" cy="1096200"/>
+            <a:ext cx="2741760" cy="1095840"/>
           </a:xfrm>
           <a:prstGeom prst="rect">
             <a:avLst/>
@@ -28247,7 +28247,7 @@
         <p:spPr>
           <a:xfrm>
             <a:off x="5943600" y="2788920"/>
-            <a:ext cx="2925000" cy="2056320"/>
+            <a:ext cx="2924640" cy="2055960"/>
           </a:xfrm>
           <a:prstGeom prst="rect">
             <a:avLst/>
@@ -28278,7 +28278,7 @@
         <p:spPr>
           <a:xfrm>
             <a:off x="5943600" y="2788920"/>
-            <a:ext cx="2925000" cy="364680"/>
+            <a:ext cx="2924640" cy="364320"/>
           </a:xfrm>
           <a:prstGeom prst="rect">
             <a:avLst/>
@@ -28333,7 +28333,7 @@
         <p:spPr>
           <a:xfrm>
             <a:off x="6080760" y="3218760"/>
-            <a:ext cx="2650680" cy="346320"/>
+            <a:ext cx="2650320" cy="345960"/>
           </a:xfrm>
           <a:prstGeom prst="rect">
             <a:avLst/>
@@ -28398,7 +28398,7 @@
         <p:spPr>
           <a:xfrm>
             <a:off x="6080760" y="3620880"/>
-            <a:ext cx="2650680" cy="346320"/>
+            <a:ext cx="2650320" cy="345960"/>
           </a:xfrm>
           <a:prstGeom prst="rect">
             <a:avLst/>
@@ -28463,7 +28463,7 @@
         <p:spPr>
           <a:xfrm>
             <a:off x="6080760" y="4023360"/>
-            <a:ext cx="2650680" cy="346320"/>
+            <a:ext cx="2650320" cy="345960"/>
           </a:xfrm>
           <a:prstGeom prst="rect">
             <a:avLst/>
@@ -28528,7 +28528,7 @@
         <p:spPr>
           <a:xfrm>
             <a:off x="6080760" y="4425840"/>
-            <a:ext cx="2650680" cy="346320"/>
+            <a:ext cx="2650320" cy="345960"/>
           </a:xfrm>
           <a:prstGeom prst="rect">
             <a:avLst/>
@@ -28630,7 +28630,7 @@
         <p:spPr>
           <a:xfrm>
             <a:off x="0" y="0"/>
-            <a:ext cx="163440" cy="5142600"/>
+            <a:ext cx="163080" cy="5142240"/>
           </a:xfrm>
           <a:prstGeom prst="rect">
             <a:avLst/>
@@ -28661,7 +28661,7 @@
         <p:spPr>
           <a:xfrm>
             <a:off x="0" y="0"/>
-            <a:ext cx="9142920" cy="913320"/>
+            <a:ext cx="9142560" cy="912960"/>
           </a:xfrm>
           <a:prstGeom prst="rect">
             <a:avLst/>
@@ -28692,7 +28692,7 @@
         <p:spPr>
           <a:xfrm>
             <a:off x="365760" y="109800"/>
-            <a:ext cx="8228520" cy="712080"/>
+            <a:ext cx="8228160" cy="711720"/>
           </a:xfrm>
           <a:prstGeom prst="rect">
             <a:avLst/>
@@ -28747,7 +28747,7 @@
         <p:spPr>
           <a:xfrm>
             <a:off x="320040" y="1005840"/>
-            <a:ext cx="5485320" cy="3839400"/>
+            <a:ext cx="5484960" cy="3839040"/>
           </a:xfrm>
           <a:prstGeom prst="rect">
             <a:avLst/>
@@ -28778,7 +28778,7 @@
         <p:spPr>
           <a:xfrm>
             <a:off x="457200" y="1097280"/>
-            <a:ext cx="5302440" cy="3656520"/>
+            <a:ext cx="5302080" cy="3656160"/>
           </a:xfrm>
           <a:prstGeom prst="rect">
             <a:avLst/>
@@ -29183,7 +29183,7 @@
         <p:spPr>
           <a:xfrm>
             <a:off x="5943600" y="1005840"/>
-            <a:ext cx="2925000" cy="1461960"/>
+            <a:ext cx="2924640" cy="1461600"/>
           </a:xfrm>
           <a:prstGeom prst="rect">
             <a:avLst/>
@@ -29214,7 +29214,7 @@
         <p:spPr>
           <a:xfrm>
             <a:off x="5943600" y="1005840"/>
-            <a:ext cx="2925000" cy="364680"/>
+            <a:ext cx="2924640" cy="364320"/>
           </a:xfrm>
           <a:prstGeom prst="rect">
             <a:avLst/>
@@ -29269,7 +29269,7 @@
         <p:spPr>
           <a:xfrm>
             <a:off x="6035040" y="1417320"/>
-            <a:ext cx="2742120" cy="867600"/>
+            <a:ext cx="2741760" cy="867240"/>
           </a:xfrm>
           <a:prstGeom prst="rect">
             <a:avLst/>
@@ -29295,7 +29295,7 @@
         <p:spPr>
           <a:xfrm>
             <a:off x="5943600" y="2606040"/>
-            <a:ext cx="2925000" cy="2239200"/>
+            <a:ext cx="2924640" cy="2238840"/>
           </a:xfrm>
           <a:prstGeom prst="rect">
             <a:avLst/>
@@ -29326,7 +29326,7 @@
         <p:spPr>
           <a:xfrm>
             <a:off x="5943600" y="2606040"/>
-            <a:ext cx="2925000" cy="364680"/>
+            <a:ext cx="2924640" cy="364320"/>
           </a:xfrm>
           <a:prstGeom prst="rect">
             <a:avLst/>
@@ -29381,7 +29381,7 @@
         <p:spPr>
           <a:xfrm>
             <a:off x="6080760" y="3035880"/>
-            <a:ext cx="2650680" cy="346320"/>
+            <a:ext cx="2650320" cy="345960"/>
           </a:xfrm>
           <a:prstGeom prst="rect">
             <a:avLst/>
@@ -29446,7 +29446,7 @@
         <p:spPr>
           <a:xfrm>
             <a:off x="6080760" y="3420000"/>
-            <a:ext cx="2650680" cy="346320"/>
+            <a:ext cx="2650320" cy="345960"/>
           </a:xfrm>
           <a:prstGeom prst="rect">
             <a:avLst/>
@@ -29511,7 +29511,7 @@
         <p:spPr>
           <a:xfrm>
             <a:off x="6080760" y="3803760"/>
-            <a:ext cx="2650680" cy="346320"/>
+            <a:ext cx="2650320" cy="345960"/>
           </a:xfrm>
           <a:prstGeom prst="rect">
             <a:avLst/>
@@ -29576,7 +29576,7 @@
         <p:spPr>
           <a:xfrm>
             <a:off x="6080760" y="4187880"/>
-            <a:ext cx="2650680" cy="346320"/>
+            <a:ext cx="2650320" cy="345960"/>
           </a:xfrm>
           <a:prstGeom prst="rect">
             <a:avLst/>
@@ -29641,7 +29641,7 @@
         <p:spPr>
           <a:xfrm>
             <a:off x="6080760" y="4572000"/>
-            <a:ext cx="2650680" cy="346320"/>
+            <a:ext cx="2650320" cy="345960"/>
           </a:xfrm>
           <a:prstGeom prst="rect">
             <a:avLst/>
@@ -29743,7 +29743,7 @@
         <p:spPr>
           <a:xfrm>
             <a:off x="0" y="0"/>
-            <a:ext cx="9142920" cy="5142600"/>
+            <a:ext cx="9142560" cy="5142240"/>
           </a:xfrm>
           <a:prstGeom prst="rect">
             <a:avLst/>
@@ -29774,7 +29774,7 @@
         <p:spPr>
           <a:xfrm>
             <a:off x="-1371600" y="-914400"/>
-            <a:ext cx="5485320" cy="5485320"/>
+            <a:ext cx="5484960" cy="5484960"/>
           </a:xfrm>
           <a:prstGeom prst="ellipse">
             <a:avLst/>
@@ -29809,7 +29809,7 @@
         <p:spPr>
           <a:xfrm>
             <a:off x="7315200" y="2743200"/>
-            <a:ext cx="3656520" cy="3656520"/>
+            <a:ext cx="3656160" cy="3656160"/>
           </a:xfrm>
           <a:prstGeom prst="ellipse">
             <a:avLst/>
@@ -29844,7 +29844,7 @@
         <p:spPr>
           <a:xfrm>
             <a:off x="640080" y="1645920"/>
-            <a:ext cx="108720" cy="1644840"/>
+            <a:ext cx="108360" cy="1644480"/>
           </a:xfrm>
           <a:prstGeom prst="rect">
             <a:avLst/>
@@ -29875,7 +29875,7 @@
         <p:spPr>
           <a:xfrm>
             <a:off x="914400" y="1554480"/>
-            <a:ext cx="6399720" cy="547560"/>
+            <a:ext cx="6399360" cy="547200"/>
           </a:xfrm>
           <a:prstGeom prst="rect">
             <a:avLst/>
@@ -29930,7 +29930,7 @@
         <p:spPr>
           <a:xfrm>
             <a:off x="914400" y="2011680"/>
-            <a:ext cx="7314120" cy="1370520"/>
+            <a:ext cx="7313760" cy="1370160"/>
           </a:xfrm>
           <a:prstGeom prst="rect">
             <a:avLst/>
@@ -30009,7 +30009,7 @@
         <p:spPr>
           <a:xfrm>
             <a:off x="914400" y="3657600"/>
-            <a:ext cx="7314120" cy="456120"/>
+            <a:ext cx="7313760" cy="455760"/>
           </a:xfrm>
           <a:prstGeom prst="rect">
             <a:avLst/>
@@ -30101,7 +30101,7 @@
         <p:spPr>
           <a:xfrm>
             <a:off x="0" y="0"/>
-            <a:ext cx="163440" cy="5142600"/>
+            <a:ext cx="163080" cy="5142240"/>
           </a:xfrm>
           <a:prstGeom prst="rect">
             <a:avLst/>
@@ -30132,7 +30132,7 @@
         <p:spPr>
           <a:xfrm>
             <a:off x="0" y="0"/>
-            <a:ext cx="9142920" cy="913320"/>
+            <a:ext cx="9142560" cy="912960"/>
           </a:xfrm>
           <a:prstGeom prst="rect">
             <a:avLst/>
@@ -30163,7 +30163,7 @@
         <p:spPr>
           <a:xfrm>
             <a:off x="365760" y="109800"/>
-            <a:ext cx="8228520" cy="712080"/>
+            <a:ext cx="8228160" cy="711720"/>
           </a:xfrm>
           <a:prstGeom prst="rect">
             <a:avLst/>
@@ -30218,7 +30218,7 @@
         <p:spPr>
           <a:xfrm>
             <a:off x="320040" y="1024200"/>
-            <a:ext cx="8502840" cy="501840"/>
+            <a:ext cx="8502480" cy="501480"/>
           </a:xfrm>
           <a:prstGeom prst="rect">
             <a:avLst/>
@@ -30273,7 +30273,7 @@
         <p:spPr>
           <a:xfrm>
             <a:off x="320040" y="1645920"/>
-            <a:ext cx="2742120" cy="1919160"/>
+            <a:ext cx="2741760" cy="1918800"/>
           </a:xfrm>
           <a:prstGeom prst="rect">
             <a:avLst/>
@@ -30311,7 +30311,7 @@
         <p:spPr>
           <a:xfrm>
             <a:off x="320040" y="1645920"/>
-            <a:ext cx="2742120" cy="456120"/>
+            <a:ext cx="2741760" cy="455760"/>
           </a:xfrm>
           <a:prstGeom prst="rect">
             <a:avLst/>
@@ -30342,7 +30342,7 @@
         <p:spPr>
           <a:xfrm>
             <a:off x="320040" y="1645920"/>
-            <a:ext cx="2742120" cy="456120"/>
+            <a:ext cx="2741760" cy="455760"/>
           </a:xfrm>
           <a:prstGeom prst="rect">
             <a:avLst/>
@@ -30397,7 +30397,7 @@
         <p:spPr>
           <a:xfrm>
             <a:off x="457200" y="2176200"/>
-            <a:ext cx="2467800" cy="318960"/>
+            <a:ext cx="2467440" cy="318600"/>
           </a:xfrm>
           <a:prstGeom prst="rect">
             <a:avLst/>
@@ -30452,7 +30452,7 @@
         <p:spPr>
           <a:xfrm>
             <a:off x="457200" y="2514600"/>
-            <a:ext cx="2467800" cy="821880"/>
+            <a:ext cx="2467440" cy="821520"/>
           </a:xfrm>
           <a:prstGeom prst="rect">
             <a:avLst/>
@@ -30507,7 +30507,7 @@
         <p:spPr>
           <a:xfrm>
             <a:off x="3264480" y="1645920"/>
-            <a:ext cx="2742120" cy="1919160"/>
+            <a:ext cx="2741760" cy="1918800"/>
           </a:xfrm>
           <a:prstGeom prst="rect">
             <a:avLst/>
@@ -30545,7 +30545,7 @@
         <p:spPr>
           <a:xfrm>
             <a:off x="3264480" y="1645920"/>
-            <a:ext cx="2742120" cy="456120"/>
+            <a:ext cx="2741760" cy="455760"/>
           </a:xfrm>
           <a:prstGeom prst="rect">
             <a:avLst/>
@@ -30576,7 +30576,7 @@
         <p:spPr>
           <a:xfrm>
             <a:off x="3264480" y="1645920"/>
-            <a:ext cx="2742120" cy="456120"/>
+            <a:ext cx="2741760" cy="455760"/>
           </a:xfrm>
           <a:prstGeom prst="rect">
             <a:avLst/>
@@ -30631,7 +30631,7 @@
         <p:spPr>
           <a:xfrm>
             <a:off x="3401640" y="2176200"/>
-            <a:ext cx="2467800" cy="318960"/>
+            <a:ext cx="2467440" cy="318600"/>
           </a:xfrm>
           <a:prstGeom prst="rect">
             <a:avLst/>
@@ -30686,7 +30686,7 @@
         <p:spPr>
           <a:xfrm>
             <a:off x="3401640" y="2514600"/>
-            <a:ext cx="2467800" cy="821880"/>
+            <a:ext cx="2467440" cy="821520"/>
           </a:xfrm>
           <a:prstGeom prst="rect">
             <a:avLst/>
@@ -30741,7 +30741,7 @@
         <p:spPr>
           <a:xfrm>
             <a:off x="6208920" y="1645920"/>
-            <a:ext cx="2742120" cy="1919160"/>
+            <a:ext cx="2741760" cy="1918800"/>
           </a:xfrm>
           <a:prstGeom prst="rect">
             <a:avLst/>
@@ -30779,7 +30779,7 @@
         <p:spPr>
           <a:xfrm>
             <a:off x="6208920" y="1645920"/>
-            <a:ext cx="2742120" cy="456120"/>
+            <a:ext cx="2741760" cy="455760"/>
           </a:xfrm>
           <a:prstGeom prst="rect">
             <a:avLst/>
@@ -30810,7 +30810,7 @@
         <p:spPr>
           <a:xfrm>
             <a:off x="6208920" y="1645920"/>
-            <a:ext cx="2742120" cy="456120"/>
+            <a:ext cx="2741760" cy="455760"/>
           </a:xfrm>
           <a:prstGeom prst="rect">
             <a:avLst/>
@@ -30865,7 +30865,7 @@
         <p:spPr>
           <a:xfrm>
             <a:off x="6346080" y="2176200"/>
-            <a:ext cx="2467800" cy="318960"/>
+            <a:ext cx="2467440" cy="318600"/>
           </a:xfrm>
           <a:prstGeom prst="rect">
             <a:avLst/>
@@ -30920,7 +30920,7 @@
         <p:spPr>
           <a:xfrm>
             <a:off x="6346080" y="2514600"/>
-            <a:ext cx="2467800" cy="821880"/>
+            <a:ext cx="2467440" cy="821520"/>
           </a:xfrm>
           <a:prstGeom prst="rect">
             <a:avLst/>
@@ -30975,7 +30975,7 @@
         <p:spPr>
           <a:xfrm>
             <a:off x="320040" y="3739320"/>
-            <a:ext cx="8502840" cy="1187640"/>
+            <a:ext cx="8502480" cy="1187280"/>
           </a:xfrm>
           <a:prstGeom prst="rect">
             <a:avLst/>
@@ -31006,7 +31006,7 @@
         <p:spPr>
           <a:xfrm>
             <a:off x="548640" y="3749040"/>
-            <a:ext cx="1827720" cy="456120"/>
+            <a:ext cx="1827360" cy="455760"/>
           </a:xfrm>
           <a:prstGeom prst="rect">
             <a:avLst/>
@@ -31071,7 +31071,7 @@
         <p:spPr>
           <a:xfrm>
             <a:off x="2286000" y="3749040"/>
-            <a:ext cx="2742120" cy="456120"/>
+            <a:ext cx="2741760" cy="455760"/>
           </a:xfrm>
           <a:prstGeom prst="rect">
             <a:avLst/>
@@ -31126,7 +31126,7 @@
         <p:spPr>
           <a:xfrm>
             <a:off x="5029200" y="3749040"/>
-            <a:ext cx="3656520" cy="456120"/>
+            <a:ext cx="3656160" cy="455760"/>
           </a:xfrm>
           <a:prstGeom prst="rect">
             <a:avLst/>
@@ -31181,7 +31181,7 @@
         <p:spPr>
           <a:xfrm>
             <a:off x="548640" y="4224600"/>
-            <a:ext cx="8228520" cy="501840"/>
+            <a:ext cx="8228160" cy="501480"/>
           </a:xfrm>
           <a:prstGeom prst="rect">
             <a:avLst/>

--- a/02.Various_Models_&_parameters_14_March/LangChain_Part2_Implementations.pptx
+++ b/02.Various_Models_&_parameters_14_March/LangChain_Part2_Implementations.pptx
@@ -89,13 +89,7 @@
               <a:rPr b="0" lang="en-IN" sz="4400" spc="-1" strike="noStrike">
                 <a:latin typeface="Arial"/>
               </a:rPr>
-              <a:t>Click to move the </a:t>
-            </a:r>
-            <a:r>
-              <a:rPr b="0" lang="en-IN" sz="4400" spc="-1" strike="noStrike">
-                <a:latin typeface="Arial"/>
-              </a:rPr>
-              <a:t>slide</a:t>
+              <a:t>Click to move the slide</a:t>
             </a:r>
             <a:endParaRPr b="0" lang="en-IN" sz="4400" spc="-1" strike="noStrike">
               <a:latin typeface="Arial"/>
@@ -320,7 +314,7 @@
             <a:pPr algn="r">
               <a:buNone/>
             </a:pPr>
-            <a:fld id="{19378963-B180-4053-807E-3EF44B8633FB}" type="slidenum">
+            <a:fld id="{770BD626-B68B-45DE-B7CF-46FD7D324EBD}" type="slidenum">
               <a:rPr b="0" lang="en-IN" sz="1400" spc="-1" strike="noStrike">
                 <a:latin typeface="Times New Roman"/>
               </a:rPr>
@@ -368,7 +362,7 @@
         <p:spPr>
           <a:xfrm>
             <a:off x="685800" y="1143000"/>
-            <a:ext cx="5484960" cy="3084840"/>
+            <a:ext cx="5484600" cy="3084480"/>
           </a:xfrm>
           <a:prstGeom prst="rect">
             <a:avLst/>
@@ -391,7 +385,7 @@
         <p:spPr>
           <a:xfrm>
             <a:off x="685800" y="4400640"/>
-            <a:ext cx="5484960" cy="3598920"/>
+            <a:ext cx="5484600" cy="3598560"/>
           </a:xfrm>
           <a:prstGeom prst="rect">
             <a:avLst/>
@@ -425,7 +419,7 @@
         <p:spPr>
           <a:xfrm>
             <a:off x="3884760" y="8685360"/>
-            <a:ext cx="2970360" cy="457200"/>
+            <a:ext cx="2970000" cy="456840"/>
           </a:xfrm>
           <a:prstGeom prst="rect">
             <a:avLst/>
@@ -461,7 +455,7 @@
               </a:lnSpc>
               <a:buNone/>
             </a:pPr>
-            <a:fld id="{E4A90A82-AED5-40A1-AC36-41084250943E}" type="slidenum">
+            <a:fld id="{45E40F0C-9252-41C0-B41E-E51F85DAEBE4}" type="slidenum">
               <a:rPr b="0" lang="en-US" sz="1200" spc="-1" strike="noStrike">
                 <a:solidFill>
                   <a:srgbClr val="000000"/>
@@ -512,7 +506,7 @@
         <p:spPr>
           <a:xfrm>
             <a:off x="685800" y="1143000"/>
-            <a:ext cx="5484960" cy="3084840"/>
+            <a:ext cx="5484600" cy="3084480"/>
           </a:xfrm>
           <a:prstGeom prst="rect">
             <a:avLst/>
@@ -535,7 +529,7 @@
         <p:spPr>
           <a:xfrm>
             <a:off x="685800" y="4400640"/>
-            <a:ext cx="5484960" cy="3598920"/>
+            <a:ext cx="5484600" cy="3598560"/>
           </a:xfrm>
           <a:prstGeom prst="rect">
             <a:avLst/>
@@ -569,7 +563,7 @@
         <p:spPr>
           <a:xfrm>
             <a:off x="3884760" y="8685360"/>
-            <a:ext cx="2970360" cy="457200"/>
+            <a:ext cx="2970000" cy="456840"/>
           </a:xfrm>
           <a:prstGeom prst="rect">
             <a:avLst/>
@@ -605,7 +599,7 @@
               </a:lnSpc>
               <a:buNone/>
             </a:pPr>
-            <a:fld id="{12B0161C-8A62-4132-A25E-A3867276E500}" type="slidenum">
+            <a:fld id="{48115823-047D-4395-967E-D7B8B28BD471}" type="slidenum">
               <a:rPr b="0" lang="en-US" sz="1200" spc="-1" strike="noStrike">
                 <a:solidFill>
                   <a:srgbClr val="000000"/>
@@ -656,7 +650,7 @@
         <p:spPr>
           <a:xfrm>
             <a:off x="685800" y="1143000"/>
-            <a:ext cx="5484960" cy="3084840"/>
+            <a:ext cx="5484600" cy="3084480"/>
           </a:xfrm>
           <a:prstGeom prst="rect">
             <a:avLst/>
@@ -679,7 +673,7 @@
         <p:spPr>
           <a:xfrm>
             <a:off x="685800" y="4400640"/>
-            <a:ext cx="5484960" cy="3598920"/>
+            <a:ext cx="5484600" cy="3598560"/>
           </a:xfrm>
           <a:prstGeom prst="rect">
             <a:avLst/>
@@ -713,7 +707,7 @@
         <p:spPr>
           <a:xfrm>
             <a:off x="3884760" y="8685360"/>
-            <a:ext cx="2970360" cy="457200"/>
+            <a:ext cx="2970000" cy="456840"/>
           </a:xfrm>
           <a:prstGeom prst="rect">
             <a:avLst/>
@@ -749,7 +743,7 @@
               </a:lnSpc>
               <a:buNone/>
             </a:pPr>
-            <a:fld id="{40DD8973-3A6C-4D3A-8BBB-5DFAC823339D}" type="slidenum">
+            <a:fld id="{8A350166-5E42-455A-BEA8-B94BD523C21A}" type="slidenum">
               <a:rPr b="0" lang="en-US" sz="1200" spc="-1" strike="noStrike">
                 <a:solidFill>
                   <a:srgbClr val="000000"/>
@@ -800,7 +794,7 @@
         <p:spPr>
           <a:xfrm>
             <a:off x="685800" y="1143000"/>
-            <a:ext cx="5484960" cy="3084840"/>
+            <a:ext cx="5484600" cy="3084480"/>
           </a:xfrm>
           <a:prstGeom prst="rect">
             <a:avLst/>
@@ -823,7 +817,7 @@
         <p:spPr>
           <a:xfrm>
             <a:off x="685800" y="4400640"/>
-            <a:ext cx="5484960" cy="3598920"/>
+            <a:ext cx="5484600" cy="3598560"/>
           </a:xfrm>
           <a:prstGeom prst="rect">
             <a:avLst/>
@@ -857,7 +851,7 @@
         <p:spPr>
           <a:xfrm>
             <a:off x="3884760" y="8685360"/>
-            <a:ext cx="2970360" cy="457200"/>
+            <a:ext cx="2970000" cy="456840"/>
           </a:xfrm>
           <a:prstGeom prst="rect">
             <a:avLst/>
@@ -893,7 +887,7 @@
               </a:lnSpc>
               <a:buNone/>
             </a:pPr>
-            <a:fld id="{287143D5-09FB-436D-A49E-D4EC4A2C0EE2}" type="slidenum">
+            <a:fld id="{3A219519-A71C-4003-8F64-2D06B6505B19}" type="slidenum">
               <a:rPr b="0" lang="en-US" sz="1200" spc="-1" strike="noStrike">
                 <a:solidFill>
                   <a:srgbClr val="000000"/>
@@ -944,7 +938,7 @@
         <p:spPr>
           <a:xfrm>
             <a:off x="685800" y="1143000"/>
-            <a:ext cx="5484960" cy="3084840"/>
+            <a:ext cx="5484600" cy="3084480"/>
           </a:xfrm>
           <a:prstGeom prst="rect">
             <a:avLst/>
@@ -967,7 +961,7 @@
         <p:spPr>
           <a:xfrm>
             <a:off x="685800" y="4400640"/>
-            <a:ext cx="5484960" cy="3598920"/>
+            <a:ext cx="5484600" cy="3598560"/>
           </a:xfrm>
           <a:prstGeom prst="rect">
             <a:avLst/>
@@ -1001,7 +995,7 @@
         <p:spPr>
           <a:xfrm>
             <a:off x="3884760" y="8685360"/>
-            <a:ext cx="2970360" cy="457200"/>
+            <a:ext cx="2970000" cy="456840"/>
           </a:xfrm>
           <a:prstGeom prst="rect">
             <a:avLst/>
@@ -1037,7 +1031,7 @@
               </a:lnSpc>
               <a:buNone/>
             </a:pPr>
-            <a:fld id="{F91DFCA5-3F84-491A-A7A9-918F23C47CF8}" type="slidenum">
+            <a:fld id="{2D047BD3-21C6-42B6-A8E1-8272AA193106}" type="slidenum">
               <a:rPr b="0" lang="en-US" sz="1200" spc="-1" strike="noStrike">
                 <a:solidFill>
                   <a:srgbClr val="000000"/>
@@ -1088,7 +1082,7 @@
         <p:spPr>
           <a:xfrm>
             <a:off x="685800" y="1143000"/>
-            <a:ext cx="5484960" cy="3084840"/>
+            <a:ext cx="5484600" cy="3084480"/>
           </a:xfrm>
           <a:prstGeom prst="rect">
             <a:avLst/>
@@ -1111,7 +1105,7 @@
         <p:spPr>
           <a:xfrm>
             <a:off x="685800" y="4400640"/>
-            <a:ext cx="5484960" cy="3598920"/>
+            <a:ext cx="5484600" cy="3598560"/>
           </a:xfrm>
           <a:prstGeom prst="rect">
             <a:avLst/>
@@ -1145,7 +1139,7 @@
         <p:spPr>
           <a:xfrm>
             <a:off x="3884760" y="8685360"/>
-            <a:ext cx="2970360" cy="457200"/>
+            <a:ext cx="2970000" cy="456840"/>
           </a:xfrm>
           <a:prstGeom prst="rect">
             <a:avLst/>
@@ -1181,7 +1175,7 @@
               </a:lnSpc>
               <a:buNone/>
             </a:pPr>
-            <a:fld id="{1B00F04D-E2DB-4DCC-8C4C-BFE4D6FBAD2D}" type="slidenum">
+            <a:fld id="{A03661B0-1407-47F3-A4D1-B0D6FB4B38B2}" type="slidenum">
               <a:rPr b="0" lang="en-US" sz="1200" spc="-1" strike="noStrike">
                 <a:solidFill>
                   <a:srgbClr val="000000"/>
@@ -1232,7 +1226,7 @@
         <p:spPr>
           <a:xfrm>
             <a:off x="685800" y="1143000"/>
-            <a:ext cx="5484960" cy="3084840"/>
+            <a:ext cx="5484600" cy="3084480"/>
           </a:xfrm>
           <a:prstGeom prst="rect">
             <a:avLst/>
@@ -1255,7 +1249,7 @@
         <p:spPr>
           <a:xfrm>
             <a:off x="685800" y="4400640"/>
-            <a:ext cx="5484960" cy="3598920"/>
+            <a:ext cx="5484600" cy="3598560"/>
           </a:xfrm>
           <a:prstGeom prst="rect">
             <a:avLst/>
@@ -1289,7 +1283,7 @@
         <p:spPr>
           <a:xfrm>
             <a:off x="3884760" y="8685360"/>
-            <a:ext cx="2970360" cy="457200"/>
+            <a:ext cx="2970000" cy="456840"/>
           </a:xfrm>
           <a:prstGeom prst="rect">
             <a:avLst/>
@@ -1325,7 +1319,7 @@
               </a:lnSpc>
               <a:buNone/>
             </a:pPr>
-            <a:fld id="{C5F61AC4-F233-4E41-8A74-4B944B9C8442}" type="slidenum">
+            <a:fld id="{50093776-A29B-4067-A48A-65FDD645376B}" type="slidenum">
               <a:rPr b="0" lang="en-US" sz="1200" spc="-1" strike="noStrike">
                 <a:solidFill>
                   <a:srgbClr val="000000"/>
@@ -1376,7 +1370,7 @@
         <p:spPr>
           <a:xfrm>
             <a:off x="685800" y="1143000"/>
-            <a:ext cx="5484960" cy="3084840"/>
+            <a:ext cx="5484600" cy="3084480"/>
           </a:xfrm>
           <a:prstGeom prst="rect">
             <a:avLst/>
@@ -1399,7 +1393,7 @@
         <p:spPr>
           <a:xfrm>
             <a:off x="685800" y="4400640"/>
-            <a:ext cx="5484960" cy="3598920"/>
+            <a:ext cx="5484600" cy="3598560"/>
           </a:xfrm>
           <a:prstGeom prst="rect">
             <a:avLst/>
@@ -1433,7 +1427,7 @@
         <p:spPr>
           <a:xfrm>
             <a:off x="3884760" y="8685360"/>
-            <a:ext cx="2970360" cy="457200"/>
+            <a:ext cx="2970000" cy="456840"/>
           </a:xfrm>
           <a:prstGeom prst="rect">
             <a:avLst/>
@@ -1469,7 +1463,7 @@
               </a:lnSpc>
               <a:buNone/>
             </a:pPr>
-            <a:fld id="{B8618954-A5F0-4838-983B-9B2ADE869BF3}" type="slidenum">
+            <a:fld id="{35841046-BBE4-4E46-945A-16988415CA3E}" type="slidenum">
               <a:rPr b="0" lang="en-US" sz="1200" spc="-1" strike="noStrike">
                 <a:solidFill>
                   <a:srgbClr val="000000"/>
@@ -1520,7 +1514,7 @@
         <p:spPr>
           <a:xfrm>
             <a:off x="685800" y="1143000"/>
-            <a:ext cx="5484960" cy="3084840"/>
+            <a:ext cx="5484600" cy="3084480"/>
           </a:xfrm>
           <a:prstGeom prst="rect">
             <a:avLst/>
@@ -1543,7 +1537,7 @@
         <p:spPr>
           <a:xfrm>
             <a:off x="685800" y="4400640"/>
-            <a:ext cx="5484960" cy="3598920"/>
+            <a:ext cx="5484600" cy="3598560"/>
           </a:xfrm>
           <a:prstGeom prst="rect">
             <a:avLst/>
@@ -1577,7 +1571,7 @@
         <p:spPr>
           <a:xfrm>
             <a:off x="3884760" y="8685360"/>
-            <a:ext cx="2970360" cy="457200"/>
+            <a:ext cx="2970000" cy="456840"/>
           </a:xfrm>
           <a:prstGeom prst="rect">
             <a:avLst/>
@@ -1613,7 +1607,7 @@
               </a:lnSpc>
               <a:buNone/>
             </a:pPr>
-            <a:fld id="{67E0C8D0-6ABB-4265-ADA3-5B314352AEBF}" type="slidenum">
+            <a:fld id="{4261FE9E-C59E-4CAF-A90B-BDDF9DFAB61F}" type="slidenum">
               <a:rPr b="0" lang="en-US" sz="1200" spc="-1" strike="noStrike">
                 <a:solidFill>
                   <a:srgbClr val="000000"/>
@@ -1664,7 +1658,7 @@
         <p:spPr>
           <a:xfrm>
             <a:off x="685800" y="1143000"/>
-            <a:ext cx="5484960" cy="3084840"/>
+            <a:ext cx="5484600" cy="3084480"/>
           </a:xfrm>
           <a:prstGeom prst="rect">
             <a:avLst/>
@@ -1687,7 +1681,7 @@
         <p:spPr>
           <a:xfrm>
             <a:off x="685800" y="4400640"/>
-            <a:ext cx="5484960" cy="3598920"/>
+            <a:ext cx="5484600" cy="3598560"/>
           </a:xfrm>
           <a:prstGeom prst="rect">
             <a:avLst/>
@@ -1721,7 +1715,7 @@
         <p:spPr>
           <a:xfrm>
             <a:off x="3884760" y="8685360"/>
-            <a:ext cx="2970360" cy="457200"/>
+            <a:ext cx="2970000" cy="456840"/>
           </a:xfrm>
           <a:prstGeom prst="rect">
             <a:avLst/>
@@ -1757,7 +1751,7 @@
               </a:lnSpc>
               <a:buNone/>
             </a:pPr>
-            <a:fld id="{49082FBE-83D2-46C6-B0C3-CC179E6976D8}" type="slidenum">
+            <a:fld id="{E2C389E1-F743-4CAC-9CFC-FBBAE7E5C9C5}" type="slidenum">
               <a:rPr b="0" lang="en-US" sz="1200" spc="-1" strike="noStrike">
                 <a:solidFill>
                   <a:srgbClr val="000000"/>
@@ -1808,7 +1802,7 @@
         <p:spPr>
           <a:xfrm>
             <a:off x="685800" y="1143000"/>
-            <a:ext cx="5484960" cy="3084840"/>
+            <a:ext cx="5484600" cy="3084480"/>
           </a:xfrm>
           <a:prstGeom prst="rect">
             <a:avLst/>
@@ -1831,7 +1825,7 @@
         <p:spPr>
           <a:xfrm>
             <a:off x="685800" y="4400640"/>
-            <a:ext cx="5484960" cy="3598920"/>
+            <a:ext cx="5484600" cy="3598560"/>
           </a:xfrm>
           <a:prstGeom prst="rect">
             <a:avLst/>
@@ -1865,7 +1859,7 @@
         <p:spPr>
           <a:xfrm>
             <a:off x="3884760" y="8685360"/>
-            <a:ext cx="2970360" cy="457200"/>
+            <a:ext cx="2970000" cy="456840"/>
           </a:xfrm>
           <a:prstGeom prst="rect">
             <a:avLst/>
@@ -1901,7 +1895,7 @@
               </a:lnSpc>
               <a:buNone/>
             </a:pPr>
-            <a:fld id="{AC9C846A-3600-40BB-A454-50D3EEC11BE5}" type="slidenum">
+            <a:fld id="{54D59BA1-C7E4-484F-B28C-B021AED4C5C6}" type="slidenum">
               <a:rPr b="0" lang="en-US" sz="1200" spc="-1" strike="noStrike">
                 <a:solidFill>
                   <a:srgbClr val="000000"/>
@@ -1952,7 +1946,7 @@
         <p:spPr>
           <a:xfrm>
             <a:off x="685800" y="1143000"/>
-            <a:ext cx="5484600" cy="3084480"/>
+            <a:ext cx="5484240" cy="3084120"/>
           </a:xfrm>
           <a:prstGeom prst="rect">
             <a:avLst/>
@@ -1975,7 +1969,7 @@
         <p:spPr>
           <a:xfrm>
             <a:off x="685800" y="4400640"/>
-            <a:ext cx="5484600" cy="3598560"/>
+            <a:ext cx="5484240" cy="3598200"/>
           </a:xfrm>
           <a:prstGeom prst="rect">
             <a:avLst/>
@@ -2009,7 +2003,7 @@
         <p:spPr>
           <a:xfrm>
             <a:off x="3884760" y="8685360"/>
-            <a:ext cx="2970000" cy="456840"/>
+            <a:ext cx="2969640" cy="456480"/>
           </a:xfrm>
           <a:prstGeom prst="rect">
             <a:avLst/>
@@ -2045,7 +2039,7 @@
               </a:lnSpc>
               <a:buNone/>
             </a:pPr>
-            <a:fld id="{A5B532D4-0498-448B-A971-6DDDECE91026}" type="slidenum">
+            <a:fld id="{BEAD335D-4F7E-4C4B-AAE4-B1829DB67605}" type="slidenum">
               <a:rPr b="0" lang="en-US" sz="1200" spc="-1" strike="noStrike">
                 <a:solidFill>
                   <a:srgbClr val="000000"/>
@@ -2096,7 +2090,7 @@
         <p:spPr>
           <a:xfrm>
             <a:off x="685800" y="1143000"/>
-            <a:ext cx="5484960" cy="3084840"/>
+            <a:ext cx="5484600" cy="3084480"/>
           </a:xfrm>
           <a:prstGeom prst="rect">
             <a:avLst/>
@@ -2119,7 +2113,7 @@
         <p:spPr>
           <a:xfrm>
             <a:off x="685800" y="4400640"/>
-            <a:ext cx="5484960" cy="3598920"/>
+            <a:ext cx="5484600" cy="3598560"/>
           </a:xfrm>
           <a:prstGeom prst="rect">
             <a:avLst/>
@@ -2153,7 +2147,7 @@
         <p:spPr>
           <a:xfrm>
             <a:off x="3884760" y="8685360"/>
-            <a:ext cx="2970360" cy="457200"/>
+            <a:ext cx="2970000" cy="456840"/>
           </a:xfrm>
           <a:prstGeom prst="rect">
             <a:avLst/>
@@ -2189,7 +2183,7 @@
               </a:lnSpc>
               <a:buNone/>
             </a:pPr>
-            <a:fld id="{0DC039C1-CA21-49CA-82C8-F874A41ABA76}" type="slidenum">
+            <a:fld id="{C26A96E8-3150-433D-B9FE-A4005DD13702}" type="slidenum">
               <a:rPr b="0" lang="en-US" sz="1200" spc="-1" strike="noStrike">
                 <a:solidFill>
                   <a:srgbClr val="000000"/>
@@ -2240,7 +2234,7 @@
         <p:spPr>
           <a:xfrm>
             <a:off x="685800" y="1143000"/>
-            <a:ext cx="5484960" cy="3084840"/>
+            <a:ext cx="5484600" cy="3084480"/>
           </a:xfrm>
           <a:prstGeom prst="rect">
             <a:avLst/>
@@ -2263,7 +2257,7 @@
         <p:spPr>
           <a:xfrm>
             <a:off x="685800" y="4400640"/>
-            <a:ext cx="5484960" cy="3598920"/>
+            <a:ext cx="5484600" cy="3598560"/>
           </a:xfrm>
           <a:prstGeom prst="rect">
             <a:avLst/>
@@ -2297,7 +2291,7 @@
         <p:spPr>
           <a:xfrm>
             <a:off x="3884760" y="8685360"/>
-            <a:ext cx="2970360" cy="457200"/>
+            <a:ext cx="2970000" cy="456840"/>
           </a:xfrm>
           <a:prstGeom prst="rect">
             <a:avLst/>
@@ -2333,7 +2327,7 @@
               </a:lnSpc>
               <a:buNone/>
             </a:pPr>
-            <a:fld id="{EF5076CA-19E8-44A7-BEFC-D42D2B06912D}" type="slidenum">
+            <a:fld id="{0010BAE8-A696-42F0-9BA6-D19285021671}" type="slidenum">
               <a:rPr b="0" lang="en-US" sz="1200" spc="-1" strike="noStrike">
                 <a:solidFill>
                   <a:srgbClr val="000000"/>
@@ -2384,7 +2378,7 @@
         <p:spPr>
           <a:xfrm>
             <a:off x="685800" y="1143000"/>
-            <a:ext cx="5484960" cy="3084840"/>
+            <a:ext cx="5484600" cy="3084480"/>
           </a:xfrm>
           <a:prstGeom prst="rect">
             <a:avLst/>
@@ -2407,7 +2401,7 @@
         <p:spPr>
           <a:xfrm>
             <a:off x="685800" y="4400640"/>
-            <a:ext cx="5484960" cy="3598920"/>
+            <a:ext cx="5484600" cy="3598560"/>
           </a:xfrm>
           <a:prstGeom prst="rect">
             <a:avLst/>
@@ -2441,7 +2435,7 @@
         <p:spPr>
           <a:xfrm>
             <a:off x="3884760" y="8685360"/>
-            <a:ext cx="2970360" cy="457200"/>
+            <a:ext cx="2970000" cy="456840"/>
           </a:xfrm>
           <a:prstGeom prst="rect">
             <a:avLst/>
@@ -2477,7 +2471,7 @@
               </a:lnSpc>
               <a:buNone/>
             </a:pPr>
-            <a:fld id="{D4C65414-5F44-4685-9A03-732D435EAD14}" type="slidenum">
+            <a:fld id="{D7019710-CA75-4188-AF80-5F198EBD345F}" type="slidenum">
               <a:rPr b="0" lang="en-US" sz="1200" spc="-1" strike="noStrike">
                 <a:solidFill>
                   <a:srgbClr val="000000"/>
@@ -2528,7 +2522,7 @@
         <p:spPr>
           <a:xfrm>
             <a:off x="685800" y="1143000"/>
-            <a:ext cx="5484960" cy="3084840"/>
+            <a:ext cx="5484600" cy="3084480"/>
           </a:xfrm>
           <a:prstGeom prst="rect">
             <a:avLst/>
@@ -2551,7 +2545,7 @@
         <p:spPr>
           <a:xfrm>
             <a:off x="685800" y="4400640"/>
-            <a:ext cx="5484960" cy="3598920"/>
+            <a:ext cx="5484600" cy="3598560"/>
           </a:xfrm>
           <a:prstGeom prst="rect">
             <a:avLst/>
@@ -2585,7 +2579,7 @@
         <p:spPr>
           <a:xfrm>
             <a:off x="3884760" y="8685360"/>
-            <a:ext cx="2970360" cy="457200"/>
+            <a:ext cx="2970000" cy="456840"/>
           </a:xfrm>
           <a:prstGeom prst="rect">
             <a:avLst/>
@@ -2621,7 +2615,7 @@
               </a:lnSpc>
               <a:buNone/>
             </a:pPr>
-            <a:fld id="{CEB91F83-7314-4251-AB7E-5863E05C7D58}" type="slidenum">
+            <a:fld id="{4059E17A-6415-4A56-9ED4-9E81EB7FF685}" type="slidenum">
               <a:rPr b="0" lang="en-US" sz="1200" spc="-1" strike="noStrike">
                 <a:solidFill>
                   <a:srgbClr val="000000"/>
@@ -2672,7 +2666,7 @@
         <p:spPr>
           <a:xfrm>
             <a:off x="685800" y="1143000"/>
-            <a:ext cx="5484960" cy="3084840"/>
+            <a:ext cx="5484600" cy="3084480"/>
           </a:xfrm>
           <a:prstGeom prst="rect">
             <a:avLst/>
@@ -2695,7 +2689,7 @@
         <p:spPr>
           <a:xfrm>
             <a:off x="685800" y="4400640"/>
-            <a:ext cx="5484960" cy="3598920"/>
+            <a:ext cx="5484600" cy="3598560"/>
           </a:xfrm>
           <a:prstGeom prst="rect">
             <a:avLst/>
@@ -2729,7 +2723,7 @@
         <p:spPr>
           <a:xfrm>
             <a:off x="3884760" y="8685360"/>
-            <a:ext cx="2970360" cy="457200"/>
+            <a:ext cx="2970000" cy="456840"/>
           </a:xfrm>
           <a:prstGeom prst="rect">
             <a:avLst/>
@@ -2765,7 +2759,7 @@
               </a:lnSpc>
               <a:buNone/>
             </a:pPr>
-            <a:fld id="{E01AB43D-7FF2-4802-988A-CBC41C189653}" type="slidenum">
+            <a:fld id="{3CA80422-64C4-4ADB-9E4A-7139715D02A5}" type="slidenum">
               <a:rPr b="0" lang="en-US" sz="1200" spc="-1" strike="noStrike">
                 <a:solidFill>
                   <a:srgbClr val="000000"/>
@@ -2816,7 +2810,7 @@
         <p:spPr>
           <a:xfrm>
             <a:off x="685800" y="1143000"/>
-            <a:ext cx="5484960" cy="3084840"/>
+            <a:ext cx="5484600" cy="3084480"/>
           </a:xfrm>
           <a:prstGeom prst="rect">
             <a:avLst/>
@@ -2839,7 +2833,7 @@
         <p:spPr>
           <a:xfrm>
             <a:off x="685800" y="4400640"/>
-            <a:ext cx="5484960" cy="3598920"/>
+            <a:ext cx="5484600" cy="3598560"/>
           </a:xfrm>
           <a:prstGeom prst="rect">
             <a:avLst/>
@@ -2873,7 +2867,7 @@
         <p:spPr>
           <a:xfrm>
             <a:off x="3884760" y="8685360"/>
-            <a:ext cx="2970360" cy="457200"/>
+            <a:ext cx="2970000" cy="456840"/>
           </a:xfrm>
           <a:prstGeom prst="rect">
             <a:avLst/>
@@ -2909,7 +2903,7 @@
               </a:lnSpc>
               <a:buNone/>
             </a:pPr>
-            <a:fld id="{E61BC909-8051-4258-B62B-F74A44CB2924}" type="slidenum">
+            <a:fld id="{4CCC50BF-E50E-4084-98FA-21F8771A6956}" type="slidenum">
               <a:rPr b="0" lang="en-US" sz="1200" spc="-1" strike="noStrike">
                 <a:solidFill>
                   <a:srgbClr val="000000"/>
@@ -2960,7 +2954,7 @@
         <p:spPr>
           <a:xfrm>
             <a:off x="685800" y="1143000"/>
-            <a:ext cx="5484960" cy="3084840"/>
+            <a:ext cx="5484600" cy="3084480"/>
           </a:xfrm>
           <a:prstGeom prst="rect">
             <a:avLst/>
@@ -2983,7 +2977,7 @@
         <p:spPr>
           <a:xfrm>
             <a:off x="685800" y="4400640"/>
-            <a:ext cx="5484960" cy="3598920"/>
+            <a:ext cx="5484600" cy="3598560"/>
           </a:xfrm>
           <a:prstGeom prst="rect">
             <a:avLst/>
@@ -3017,7 +3011,7 @@
         <p:spPr>
           <a:xfrm>
             <a:off x="3884760" y="8685360"/>
-            <a:ext cx="2970360" cy="457200"/>
+            <a:ext cx="2970000" cy="456840"/>
           </a:xfrm>
           <a:prstGeom prst="rect">
             <a:avLst/>
@@ -3053,7 +3047,7 @@
               </a:lnSpc>
               <a:buNone/>
             </a:pPr>
-            <a:fld id="{F75563BD-F17E-4900-BA5F-493794A420A6}" type="slidenum">
+            <a:fld id="{CE9DBA72-7FF6-4FE6-B5A2-24CA6B3A2AE1}" type="slidenum">
               <a:rPr b="0" lang="en-US" sz="1200" spc="-1" strike="noStrike">
                 <a:solidFill>
                   <a:srgbClr val="000000"/>
@@ -3104,7 +3098,7 @@
         <p:spPr>
           <a:xfrm>
             <a:off x="685800" y="1143000"/>
-            <a:ext cx="5484960" cy="3084840"/>
+            <a:ext cx="5484600" cy="3084480"/>
           </a:xfrm>
           <a:prstGeom prst="rect">
             <a:avLst/>
@@ -3127,7 +3121,7 @@
         <p:spPr>
           <a:xfrm>
             <a:off x="685800" y="4400640"/>
-            <a:ext cx="5484960" cy="3598920"/>
+            <a:ext cx="5484600" cy="3598560"/>
           </a:xfrm>
           <a:prstGeom prst="rect">
             <a:avLst/>
@@ -3161,7 +3155,7 @@
         <p:spPr>
           <a:xfrm>
             <a:off x="3884760" y="8685360"/>
-            <a:ext cx="2970360" cy="457200"/>
+            <a:ext cx="2970000" cy="456840"/>
           </a:xfrm>
           <a:prstGeom prst="rect">
             <a:avLst/>
@@ -3197,7 +3191,7 @@
               </a:lnSpc>
               <a:buNone/>
             </a:pPr>
-            <a:fld id="{78A14F97-B183-4CE6-BEAB-468DF4AE8802}" type="slidenum">
+            <a:fld id="{7E4BF324-9AD2-4CD7-B936-59E53F60BBD7}" type="slidenum">
               <a:rPr b="0" lang="en-US" sz="1200" spc="-1" strike="noStrike">
                 <a:solidFill>
                   <a:srgbClr val="000000"/>
@@ -3248,7 +3242,7 @@
         <p:spPr>
           <a:xfrm>
             <a:off x="685800" y="1143000"/>
-            <a:ext cx="5484960" cy="3084840"/>
+            <a:ext cx="5484600" cy="3084480"/>
           </a:xfrm>
           <a:prstGeom prst="rect">
             <a:avLst/>
@@ -3271,7 +3265,7 @@
         <p:spPr>
           <a:xfrm>
             <a:off x="685800" y="4400640"/>
-            <a:ext cx="5484960" cy="3598920"/>
+            <a:ext cx="5484600" cy="3598560"/>
           </a:xfrm>
           <a:prstGeom prst="rect">
             <a:avLst/>
@@ -3305,7 +3299,7 @@
         <p:spPr>
           <a:xfrm>
             <a:off x="3884760" y="8685360"/>
-            <a:ext cx="2970360" cy="457200"/>
+            <a:ext cx="2970000" cy="456840"/>
           </a:xfrm>
           <a:prstGeom prst="rect">
             <a:avLst/>
@@ -3341,7 +3335,7 @@
               </a:lnSpc>
               <a:buNone/>
             </a:pPr>
-            <a:fld id="{0AF3F49C-F3B6-4C60-91AF-533B8DBF0B6D}" type="slidenum">
+            <a:fld id="{EFF3650E-F5FA-4D6D-8F49-C88DA601A1DD}" type="slidenum">
               <a:rPr b="0" lang="en-US" sz="1200" spc="-1" strike="noStrike">
                 <a:solidFill>
                   <a:srgbClr val="000000"/>
@@ -3392,7 +3386,7 @@
         <p:spPr>
           <a:xfrm>
             <a:off x="685800" y="1143000"/>
-            <a:ext cx="5484960" cy="3084840"/>
+            <a:ext cx="5484600" cy="3084480"/>
           </a:xfrm>
           <a:prstGeom prst="rect">
             <a:avLst/>
@@ -3415,7 +3409,7 @@
         <p:spPr>
           <a:xfrm>
             <a:off x="685800" y="4400640"/>
-            <a:ext cx="5484960" cy="3598920"/>
+            <a:ext cx="5484600" cy="3598560"/>
           </a:xfrm>
           <a:prstGeom prst="rect">
             <a:avLst/>
@@ -3449,7 +3443,7 @@
         <p:spPr>
           <a:xfrm>
             <a:off x="3884760" y="8685360"/>
-            <a:ext cx="2970360" cy="457200"/>
+            <a:ext cx="2970000" cy="456840"/>
           </a:xfrm>
           <a:prstGeom prst="rect">
             <a:avLst/>
@@ -3485,7 +3479,7 @@
               </a:lnSpc>
               <a:buNone/>
             </a:pPr>
-            <a:fld id="{B1448D14-DA8C-4D1E-8BE6-DDBCE0A024BC}" type="slidenum">
+            <a:fld id="{60A61300-B75C-4CEB-8FDB-852B9AC4B9AA}" type="slidenum">
               <a:rPr b="0" lang="en-US" sz="1200" spc="-1" strike="noStrike">
                 <a:solidFill>
                   <a:srgbClr val="000000"/>
@@ -6613,103 +6607,7 @@
               <a:rPr b="0" lang="en-IN" sz="4400" spc="-1" strike="noStrike">
                 <a:latin typeface="Arial"/>
               </a:rPr>
-              <a:t>Cl</a:t>
-            </a:r>
-            <a:r>
-              <a:rPr b="0" lang="en-IN" sz="4400" spc="-1" strike="noStrike">
-                <a:latin typeface="Arial"/>
-              </a:rPr>
-              <a:t>ic</a:t>
-            </a:r>
-            <a:r>
-              <a:rPr b="0" lang="en-IN" sz="4400" spc="-1" strike="noStrike">
-                <a:latin typeface="Arial"/>
-              </a:rPr>
-              <a:t>k </a:t>
-            </a:r>
-            <a:r>
-              <a:rPr b="0" lang="en-IN" sz="4400" spc="-1" strike="noStrike">
-                <a:latin typeface="Arial"/>
-              </a:rPr>
-              <a:t>to </a:t>
-            </a:r>
-            <a:r>
-              <a:rPr b="0" lang="en-IN" sz="4400" spc="-1" strike="noStrike">
-                <a:latin typeface="Arial"/>
-              </a:rPr>
-              <a:t>e</a:t>
-            </a:r>
-            <a:r>
-              <a:rPr b="0" lang="en-IN" sz="4400" spc="-1" strike="noStrike">
-                <a:latin typeface="Arial"/>
-              </a:rPr>
-              <a:t>di</a:t>
-            </a:r>
-            <a:r>
-              <a:rPr b="0" lang="en-IN" sz="4400" spc="-1" strike="noStrike">
-                <a:latin typeface="Arial"/>
-              </a:rPr>
-              <a:t>t </a:t>
-            </a:r>
-            <a:r>
-              <a:rPr b="0" lang="en-IN" sz="4400" spc="-1" strike="noStrike">
-                <a:latin typeface="Arial"/>
-              </a:rPr>
-              <a:t>th</a:t>
-            </a:r>
-            <a:r>
-              <a:rPr b="0" lang="en-IN" sz="4400" spc="-1" strike="noStrike">
-                <a:latin typeface="Arial"/>
-              </a:rPr>
-              <a:t>e </a:t>
-            </a:r>
-            <a:r>
-              <a:rPr b="0" lang="en-IN" sz="4400" spc="-1" strike="noStrike">
-                <a:latin typeface="Arial"/>
-              </a:rPr>
-              <a:t>tit</a:t>
-            </a:r>
-            <a:r>
-              <a:rPr b="0" lang="en-IN" sz="4400" spc="-1" strike="noStrike">
-                <a:latin typeface="Arial"/>
-              </a:rPr>
-              <a:t>le </a:t>
-            </a:r>
-            <a:r>
-              <a:rPr b="0" lang="en-IN" sz="4400" spc="-1" strike="noStrike">
-                <a:latin typeface="Arial"/>
-              </a:rPr>
-              <a:t>te</a:t>
-            </a:r>
-            <a:r>
-              <a:rPr b="0" lang="en-IN" sz="4400" spc="-1" strike="noStrike">
-                <a:latin typeface="Arial"/>
-              </a:rPr>
-              <a:t>xt </a:t>
-            </a:r>
-            <a:r>
-              <a:rPr b="0" lang="en-IN" sz="4400" spc="-1" strike="noStrike">
-                <a:latin typeface="Arial"/>
-              </a:rPr>
-              <a:t>fo</a:t>
-            </a:r>
-            <a:r>
-              <a:rPr b="0" lang="en-IN" sz="4400" spc="-1" strike="noStrike">
-                <a:latin typeface="Arial"/>
-              </a:rPr>
-              <a:t>r</a:t>
-            </a:r>
-            <a:r>
-              <a:rPr b="0" lang="en-IN" sz="4400" spc="-1" strike="noStrike">
-                <a:latin typeface="Arial"/>
-              </a:rPr>
-              <a:t>m</a:t>
-            </a:r>
-            <a:r>
-              <a:rPr b="0" lang="en-IN" sz="4400" spc="-1" strike="noStrike">
-                <a:latin typeface="Arial"/>
-              </a:rPr>
-              <a:t>at</a:t>
+              <a:t>Click to edit the title text format</a:t>
             </a:r>
             <a:endParaRPr b="0" lang="en-IN" sz="4400" spc="-1" strike="noStrike">
               <a:latin typeface="Arial"/>
@@ -6979,25 +6877,7 @@
               <a:rPr b="0" lang="en-IN" sz="4400" spc="-1" strike="noStrike">
                 <a:latin typeface="Arial"/>
               </a:rPr>
-              <a:t>Click to </a:t>
-            </a:r>
-            <a:r>
-              <a:rPr b="0" lang="en-IN" sz="4400" spc="-1" strike="noStrike">
-                <a:latin typeface="Arial"/>
-              </a:rPr>
-              <a:t>edit the </a:t>
-            </a:r>
-            <a:r>
-              <a:rPr b="0" lang="en-IN" sz="4400" spc="-1" strike="noStrike">
-                <a:latin typeface="Arial"/>
-              </a:rPr>
-              <a:t>title text </a:t>
-            </a:r>
-            <a:r>
-              <a:rPr b="0" lang="en-IN" sz="4400" spc="-1" strike="noStrike">
-                <a:latin typeface="Arial"/>
-              </a:rPr>
-              <a:t>format</a:t>
+              <a:t>Click to edit the title text format</a:t>
             </a:r>
             <a:endParaRPr b="0" lang="en-IN" sz="4400" spc="-1" strike="noStrike">
               <a:latin typeface="Arial"/>
@@ -7241,7 +7121,7 @@
         <p:spPr>
           <a:xfrm>
             <a:off x="0" y="0"/>
-            <a:ext cx="9142560" cy="5142240"/>
+            <a:ext cx="9142200" cy="5141880"/>
           </a:xfrm>
           <a:prstGeom prst="rect">
             <a:avLst/>
@@ -7272,7 +7152,7 @@
         <p:spPr>
           <a:xfrm>
             <a:off x="0" y="0"/>
-            <a:ext cx="9142560" cy="1827360"/>
+            <a:ext cx="9142200" cy="1827000"/>
           </a:xfrm>
           <a:prstGeom prst="rect">
             <a:avLst/>
@@ -7303,7 +7183,7 @@
         <p:spPr>
           <a:xfrm>
             <a:off x="6400800" y="-731520"/>
-            <a:ext cx="4113360" cy="4113360"/>
+            <a:ext cx="4113000" cy="4113000"/>
           </a:xfrm>
           <a:prstGeom prst="ellipse">
             <a:avLst/>
@@ -7338,7 +7218,7 @@
         <p:spPr>
           <a:xfrm>
             <a:off x="640080" y="274320"/>
-            <a:ext cx="2284560" cy="364320"/>
+            <a:ext cx="2284200" cy="363960"/>
           </a:xfrm>
           <a:prstGeom prst="rect">
             <a:avLst/>
@@ -7369,7 +7249,7 @@
         <p:spPr>
           <a:xfrm>
             <a:off x="640080" y="274320"/>
-            <a:ext cx="2284560" cy="364320"/>
+            <a:ext cx="2284200" cy="363960"/>
           </a:xfrm>
           <a:prstGeom prst="rect">
             <a:avLst/>
@@ -7424,7 +7304,7 @@
         <p:spPr>
           <a:xfrm>
             <a:off x="640080" y="749880"/>
-            <a:ext cx="7313760" cy="748440"/>
+            <a:ext cx="7313400" cy="748080"/>
           </a:xfrm>
           <a:prstGeom prst="rect">
             <a:avLst/>
@@ -7479,7 +7359,7 @@
         <p:spPr>
           <a:xfrm>
             <a:off x="640080" y="1444680"/>
-            <a:ext cx="7313760" cy="638640"/>
+            <a:ext cx="7313400" cy="638280"/>
           </a:xfrm>
           <a:prstGeom prst="rect">
             <a:avLst/>
@@ -7534,7 +7414,7 @@
         <p:spPr>
           <a:xfrm>
             <a:off x="640080" y="2240280"/>
-            <a:ext cx="7770960" cy="53280"/>
+            <a:ext cx="7770600" cy="52920"/>
           </a:xfrm>
           <a:prstGeom prst="rect">
             <a:avLst/>
@@ -7565,7 +7445,7 @@
         <p:spPr>
           <a:xfrm>
             <a:off x="640080" y="2377440"/>
-            <a:ext cx="7770960" cy="455760"/>
+            <a:ext cx="7770600" cy="455400"/>
           </a:xfrm>
           <a:prstGeom prst="rect">
             <a:avLst/>
@@ -7620,7 +7500,7 @@
         <p:spPr>
           <a:xfrm>
             <a:off x="640080" y="3017520"/>
-            <a:ext cx="2284560" cy="501480"/>
+            <a:ext cx="2284200" cy="501120"/>
           </a:xfrm>
           <a:prstGeom prst="rect">
             <a:avLst/>
@@ -7651,7 +7531,7 @@
         <p:spPr>
           <a:xfrm>
             <a:off x="640080" y="3017520"/>
-            <a:ext cx="2284560" cy="501480"/>
+            <a:ext cx="2284200" cy="501120"/>
           </a:xfrm>
           <a:prstGeom prst="rect">
             <a:avLst/>
@@ -7706,7 +7586,7 @@
         <p:spPr>
           <a:xfrm>
             <a:off x="3383280" y="3017520"/>
-            <a:ext cx="2284560" cy="501480"/>
+            <a:ext cx="2284200" cy="501120"/>
           </a:xfrm>
           <a:prstGeom prst="rect">
             <a:avLst/>
@@ -7737,7 +7617,7 @@
         <p:spPr>
           <a:xfrm>
             <a:off x="3383280" y="3017520"/>
-            <a:ext cx="2284560" cy="501480"/>
+            <a:ext cx="2284200" cy="501120"/>
           </a:xfrm>
           <a:prstGeom prst="rect">
             <a:avLst/>
@@ -7792,7 +7672,7 @@
         <p:spPr>
           <a:xfrm>
             <a:off x="6126480" y="3017520"/>
-            <a:ext cx="2284560" cy="501480"/>
+            <a:ext cx="2284200" cy="501120"/>
           </a:xfrm>
           <a:prstGeom prst="rect">
             <a:avLst/>
@@ -7823,7 +7703,7 @@
         <p:spPr>
           <a:xfrm>
             <a:off x="6126480" y="3017520"/>
-            <a:ext cx="2284560" cy="501480"/>
+            <a:ext cx="2284200" cy="501120"/>
           </a:xfrm>
           <a:prstGeom prst="rect">
             <a:avLst/>
@@ -7915,7 +7795,7 @@
         <p:spPr>
           <a:xfrm>
             <a:off x="0" y="0"/>
-            <a:ext cx="163080" cy="5142240"/>
+            <a:ext cx="162720" cy="5141880"/>
           </a:xfrm>
           <a:prstGeom prst="rect">
             <a:avLst/>
@@ -7946,7 +7826,7 @@
         <p:spPr>
           <a:xfrm>
             <a:off x="0" y="0"/>
-            <a:ext cx="9142560" cy="912960"/>
+            <a:ext cx="9142200" cy="912600"/>
           </a:xfrm>
           <a:prstGeom prst="rect">
             <a:avLst/>
@@ -7977,7 +7857,7 @@
         <p:spPr>
           <a:xfrm>
             <a:off x="365760" y="109800"/>
-            <a:ext cx="8228160" cy="711720"/>
+            <a:ext cx="8227800" cy="711360"/>
           </a:xfrm>
           <a:prstGeom prst="rect">
             <a:avLst/>
@@ -8032,7 +7912,7 @@
         <p:spPr>
           <a:xfrm>
             <a:off x="320040" y="1005840"/>
-            <a:ext cx="2193120" cy="437400"/>
+            <a:ext cx="2192760" cy="437040"/>
           </a:xfrm>
           <a:prstGeom prst="rect">
             <a:avLst/>
@@ -8063,7 +7943,7 @@
         <p:spPr>
           <a:xfrm>
             <a:off x="320040" y="1005840"/>
-            <a:ext cx="2193120" cy="437400"/>
+            <a:ext cx="2192760" cy="437040"/>
           </a:xfrm>
           <a:prstGeom prst="rect">
             <a:avLst/>
@@ -8118,7 +7998,7 @@
         <p:spPr>
           <a:xfrm>
             <a:off x="2606040" y="1005840"/>
-            <a:ext cx="3107520" cy="437400"/>
+            <a:ext cx="3107160" cy="437040"/>
           </a:xfrm>
           <a:prstGeom prst="rect">
             <a:avLst/>
@@ -8149,7 +8029,7 @@
         <p:spPr>
           <a:xfrm>
             <a:off x="2606040" y="1005840"/>
-            <a:ext cx="3107520" cy="437400"/>
+            <a:ext cx="3107160" cy="437040"/>
           </a:xfrm>
           <a:prstGeom prst="rect">
             <a:avLst/>
@@ -8204,7 +8084,7 @@
         <p:spPr>
           <a:xfrm>
             <a:off x="5897880" y="1005840"/>
-            <a:ext cx="3016080" cy="437400"/>
+            <a:ext cx="3015720" cy="437040"/>
           </a:xfrm>
           <a:prstGeom prst="rect">
             <a:avLst/>
@@ -8235,7 +8115,7 @@
         <p:spPr>
           <a:xfrm>
             <a:off x="5897880" y="1005840"/>
-            <a:ext cx="3016080" cy="437400"/>
+            <a:ext cx="3015720" cy="437040"/>
           </a:xfrm>
           <a:prstGeom prst="rect">
             <a:avLst/>
@@ -8290,7 +8170,7 @@
         <p:spPr>
           <a:xfrm>
             <a:off x="320040" y="1481400"/>
-            <a:ext cx="2193120" cy="455760"/>
+            <a:ext cx="2192760" cy="455400"/>
           </a:xfrm>
           <a:prstGeom prst="rect">
             <a:avLst/>
@@ -8321,7 +8201,7 @@
         <p:spPr>
           <a:xfrm>
             <a:off x="411480" y="1481400"/>
-            <a:ext cx="2010240" cy="455760"/>
+            <a:ext cx="2009880" cy="455400"/>
           </a:xfrm>
           <a:prstGeom prst="rect">
             <a:avLst/>
@@ -8376,7 +8256,7 @@
         <p:spPr>
           <a:xfrm>
             <a:off x="2606040" y="1481400"/>
-            <a:ext cx="3107520" cy="455760"/>
+            <a:ext cx="3107160" cy="455400"/>
           </a:xfrm>
           <a:prstGeom prst="rect">
             <a:avLst/>
@@ -8407,7 +8287,7 @@
         <p:spPr>
           <a:xfrm>
             <a:off x="2697480" y="1481400"/>
-            <a:ext cx="2924640" cy="455760"/>
+            <a:ext cx="2924280" cy="455400"/>
           </a:xfrm>
           <a:prstGeom prst="rect">
             <a:avLst/>
@@ -8462,7 +8342,7 @@
         <p:spPr>
           <a:xfrm>
             <a:off x="5897880" y="1481400"/>
-            <a:ext cx="3016080" cy="455760"/>
+            <a:ext cx="3015720" cy="455400"/>
           </a:xfrm>
           <a:prstGeom prst="rect">
             <a:avLst/>
@@ -8493,7 +8373,7 @@
         <p:spPr>
           <a:xfrm>
             <a:off x="5989320" y="1481400"/>
-            <a:ext cx="2833200" cy="455760"/>
+            <a:ext cx="2832840" cy="455400"/>
           </a:xfrm>
           <a:prstGeom prst="rect">
             <a:avLst/>
@@ -8548,7 +8428,7 @@
         <p:spPr>
           <a:xfrm>
             <a:off x="320040" y="1965960"/>
-            <a:ext cx="2193120" cy="455760"/>
+            <a:ext cx="2192760" cy="455400"/>
           </a:xfrm>
           <a:prstGeom prst="rect">
             <a:avLst/>
@@ -8579,7 +8459,7 @@
         <p:spPr>
           <a:xfrm>
             <a:off x="411480" y="1965960"/>
-            <a:ext cx="2010240" cy="455760"/>
+            <a:ext cx="2009880" cy="455400"/>
           </a:xfrm>
           <a:prstGeom prst="rect">
             <a:avLst/>
@@ -8634,7 +8514,7 @@
         <p:spPr>
           <a:xfrm>
             <a:off x="2606040" y="1965960"/>
-            <a:ext cx="3107520" cy="455760"/>
+            <a:ext cx="3107160" cy="455400"/>
           </a:xfrm>
           <a:prstGeom prst="rect">
             <a:avLst/>
@@ -8665,7 +8545,7 @@
         <p:spPr>
           <a:xfrm>
             <a:off x="2697480" y="1965960"/>
-            <a:ext cx="2924640" cy="455760"/>
+            <a:ext cx="2924280" cy="455400"/>
           </a:xfrm>
           <a:prstGeom prst="rect">
             <a:avLst/>
@@ -8720,7 +8600,7 @@
         <p:spPr>
           <a:xfrm>
             <a:off x="5897880" y="1965960"/>
-            <a:ext cx="3016080" cy="455760"/>
+            <a:ext cx="3015720" cy="455400"/>
           </a:xfrm>
           <a:prstGeom prst="rect">
             <a:avLst/>
@@ -8751,7 +8631,7 @@
         <p:spPr>
           <a:xfrm>
             <a:off x="5989320" y="1965960"/>
-            <a:ext cx="2833200" cy="455760"/>
+            <a:ext cx="2832840" cy="455400"/>
           </a:xfrm>
           <a:prstGeom prst="rect">
             <a:avLst/>
@@ -8806,7 +8686,7 @@
         <p:spPr>
           <a:xfrm>
             <a:off x="320040" y="2450520"/>
-            <a:ext cx="2193120" cy="455760"/>
+            <a:ext cx="2192760" cy="455400"/>
           </a:xfrm>
           <a:prstGeom prst="rect">
             <a:avLst/>
@@ -8837,7 +8717,7 @@
         <p:spPr>
           <a:xfrm>
             <a:off x="411480" y="2450520"/>
-            <a:ext cx="2010240" cy="455760"/>
+            <a:ext cx="2009880" cy="455400"/>
           </a:xfrm>
           <a:prstGeom prst="rect">
             <a:avLst/>
@@ -8892,7 +8772,7 @@
         <p:spPr>
           <a:xfrm>
             <a:off x="2606040" y="2450520"/>
-            <a:ext cx="3107520" cy="455760"/>
+            <a:ext cx="3107160" cy="455400"/>
           </a:xfrm>
           <a:prstGeom prst="rect">
             <a:avLst/>
@@ -8923,7 +8803,7 @@
         <p:spPr>
           <a:xfrm>
             <a:off x="2697480" y="2450520"/>
-            <a:ext cx="2924640" cy="455760"/>
+            <a:ext cx="2924280" cy="455400"/>
           </a:xfrm>
           <a:prstGeom prst="rect">
             <a:avLst/>
@@ -8978,7 +8858,7 @@
         <p:spPr>
           <a:xfrm>
             <a:off x="5897880" y="2450520"/>
-            <a:ext cx="3016080" cy="455760"/>
+            <a:ext cx="3015720" cy="455400"/>
           </a:xfrm>
           <a:prstGeom prst="rect">
             <a:avLst/>
@@ -9009,7 +8889,7 @@
         <p:spPr>
           <a:xfrm>
             <a:off x="5989320" y="2450520"/>
-            <a:ext cx="2833200" cy="455760"/>
+            <a:ext cx="2832840" cy="455400"/>
           </a:xfrm>
           <a:prstGeom prst="rect">
             <a:avLst/>
@@ -9064,7 +8944,7 @@
         <p:spPr>
           <a:xfrm>
             <a:off x="320040" y="2935080"/>
-            <a:ext cx="2193120" cy="455760"/>
+            <a:ext cx="2192760" cy="455400"/>
           </a:xfrm>
           <a:prstGeom prst="rect">
             <a:avLst/>
@@ -9095,7 +8975,7 @@
         <p:spPr>
           <a:xfrm>
             <a:off x="411480" y="2935080"/>
-            <a:ext cx="2010240" cy="455760"/>
+            <a:ext cx="2009880" cy="455400"/>
           </a:xfrm>
           <a:prstGeom prst="rect">
             <a:avLst/>
@@ -9150,7 +9030,7 @@
         <p:spPr>
           <a:xfrm>
             <a:off x="2606040" y="2935080"/>
-            <a:ext cx="3107520" cy="455760"/>
+            <a:ext cx="3107160" cy="455400"/>
           </a:xfrm>
           <a:prstGeom prst="rect">
             <a:avLst/>
@@ -9181,7 +9061,7 @@
         <p:spPr>
           <a:xfrm>
             <a:off x="2697480" y="2935080"/>
-            <a:ext cx="2924640" cy="455760"/>
+            <a:ext cx="2924280" cy="455400"/>
           </a:xfrm>
           <a:prstGeom prst="rect">
             <a:avLst/>
@@ -9236,7 +9116,7 @@
         <p:spPr>
           <a:xfrm>
             <a:off x="5897880" y="2935080"/>
-            <a:ext cx="3016080" cy="455760"/>
+            <a:ext cx="3015720" cy="455400"/>
           </a:xfrm>
           <a:prstGeom prst="rect">
             <a:avLst/>
@@ -9267,7 +9147,7 @@
         <p:spPr>
           <a:xfrm>
             <a:off x="5989320" y="2935080"/>
-            <a:ext cx="2833200" cy="455760"/>
+            <a:ext cx="2832840" cy="455400"/>
           </a:xfrm>
           <a:prstGeom prst="rect">
             <a:avLst/>
@@ -9322,7 +9202,7 @@
         <p:spPr>
           <a:xfrm>
             <a:off x="320040" y="3420000"/>
-            <a:ext cx="2193120" cy="455760"/>
+            <a:ext cx="2192760" cy="455400"/>
           </a:xfrm>
           <a:prstGeom prst="rect">
             <a:avLst/>
@@ -9353,7 +9233,7 @@
         <p:spPr>
           <a:xfrm>
             <a:off x="411480" y="3420000"/>
-            <a:ext cx="2010240" cy="455760"/>
+            <a:ext cx="2009880" cy="455400"/>
           </a:xfrm>
           <a:prstGeom prst="rect">
             <a:avLst/>
@@ -9408,7 +9288,7 @@
         <p:spPr>
           <a:xfrm>
             <a:off x="2606040" y="3420000"/>
-            <a:ext cx="3107520" cy="455760"/>
+            <a:ext cx="3107160" cy="455400"/>
           </a:xfrm>
           <a:prstGeom prst="rect">
             <a:avLst/>
@@ -9439,7 +9319,7 @@
         <p:spPr>
           <a:xfrm>
             <a:off x="2697480" y="3420000"/>
-            <a:ext cx="2924640" cy="455760"/>
+            <a:ext cx="2924280" cy="455400"/>
           </a:xfrm>
           <a:prstGeom prst="rect">
             <a:avLst/>
@@ -9494,7 +9374,7 @@
         <p:spPr>
           <a:xfrm>
             <a:off x="5897880" y="3420000"/>
-            <a:ext cx="3016080" cy="455760"/>
+            <a:ext cx="3015720" cy="455400"/>
           </a:xfrm>
           <a:prstGeom prst="rect">
             <a:avLst/>
@@ -9525,7 +9405,7 @@
         <p:spPr>
           <a:xfrm>
             <a:off x="5989320" y="3420000"/>
-            <a:ext cx="2833200" cy="455760"/>
+            <a:ext cx="2832840" cy="455400"/>
           </a:xfrm>
           <a:prstGeom prst="rect">
             <a:avLst/>
@@ -9580,7 +9460,7 @@
         <p:spPr>
           <a:xfrm>
             <a:off x="320040" y="3904560"/>
-            <a:ext cx="2193120" cy="455760"/>
+            <a:ext cx="2192760" cy="455400"/>
           </a:xfrm>
           <a:prstGeom prst="rect">
             <a:avLst/>
@@ -9611,7 +9491,7 @@
         <p:spPr>
           <a:xfrm>
             <a:off x="411480" y="3904560"/>
-            <a:ext cx="2010240" cy="455760"/>
+            <a:ext cx="2009880" cy="455400"/>
           </a:xfrm>
           <a:prstGeom prst="rect">
             <a:avLst/>
@@ -9666,7 +9546,7 @@
         <p:spPr>
           <a:xfrm>
             <a:off x="2606040" y="3904560"/>
-            <a:ext cx="3107520" cy="455760"/>
+            <a:ext cx="3107160" cy="455400"/>
           </a:xfrm>
           <a:prstGeom prst="rect">
             <a:avLst/>
@@ -9697,7 +9577,7 @@
         <p:spPr>
           <a:xfrm>
             <a:off x="2697480" y="3904560"/>
-            <a:ext cx="2924640" cy="455760"/>
+            <a:ext cx="2924280" cy="455400"/>
           </a:xfrm>
           <a:prstGeom prst="rect">
             <a:avLst/>
@@ -9752,7 +9632,7 @@
         <p:spPr>
           <a:xfrm>
             <a:off x="5897880" y="3904560"/>
-            <a:ext cx="3016080" cy="455760"/>
+            <a:ext cx="3015720" cy="455400"/>
           </a:xfrm>
           <a:prstGeom prst="rect">
             <a:avLst/>
@@ -9783,7 +9663,7 @@
         <p:spPr>
           <a:xfrm>
             <a:off x="5989320" y="3904560"/>
-            <a:ext cx="2833200" cy="455760"/>
+            <a:ext cx="2832840" cy="455400"/>
           </a:xfrm>
           <a:prstGeom prst="rect">
             <a:avLst/>
@@ -9838,7 +9718,7 @@
         <p:spPr>
           <a:xfrm>
             <a:off x="320040" y="4389120"/>
-            <a:ext cx="2193120" cy="455760"/>
+            <a:ext cx="2192760" cy="455400"/>
           </a:xfrm>
           <a:prstGeom prst="rect">
             <a:avLst/>
@@ -9869,7 +9749,7 @@
         <p:spPr>
           <a:xfrm>
             <a:off x="411480" y="4389120"/>
-            <a:ext cx="2010240" cy="455760"/>
+            <a:ext cx="2009880" cy="455400"/>
           </a:xfrm>
           <a:prstGeom prst="rect">
             <a:avLst/>
@@ -9924,7 +9804,7 @@
         <p:spPr>
           <a:xfrm>
             <a:off x="2606040" y="4389120"/>
-            <a:ext cx="3107520" cy="455760"/>
+            <a:ext cx="3107160" cy="455400"/>
           </a:xfrm>
           <a:prstGeom prst="rect">
             <a:avLst/>
@@ -9955,7 +9835,7 @@
         <p:spPr>
           <a:xfrm>
             <a:off x="2697480" y="4389120"/>
-            <a:ext cx="2924640" cy="455760"/>
+            <a:ext cx="2924280" cy="455400"/>
           </a:xfrm>
           <a:prstGeom prst="rect">
             <a:avLst/>
@@ -10010,7 +9890,7 @@
         <p:spPr>
           <a:xfrm>
             <a:off x="5897880" y="4389120"/>
-            <a:ext cx="3016080" cy="455760"/>
+            <a:ext cx="3015720" cy="455400"/>
           </a:xfrm>
           <a:prstGeom prst="rect">
             <a:avLst/>
@@ -10041,7 +9921,7 @@
         <p:spPr>
           <a:xfrm>
             <a:off x="5989320" y="4389120"/>
-            <a:ext cx="2833200" cy="455760"/>
+            <a:ext cx="2832840" cy="455400"/>
           </a:xfrm>
           <a:prstGeom prst="rect">
             <a:avLst/>
@@ -10133,7 +10013,7 @@
         <p:spPr>
           <a:xfrm>
             <a:off x="0" y="0"/>
-            <a:ext cx="163080" cy="5142240"/>
+            <a:ext cx="162720" cy="5141880"/>
           </a:xfrm>
           <a:prstGeom prst="rect">
             <a:avLst/>
@@ -10164,7 +10044,7 @@
         <p:spPr>
           <a:xfrm>
             <a:off x="0" y="0"/>
-            <a:ext cx="9142560" cy="912960"/>
+            <a:ext cx="9142200" cy="912600"/>
           </a:xfrm>
           <a:prstGeom prst="rect">
             <a:avLst/>
@@ -10195,7 +10075,7 @@
         <p:spPr>
           <a:xfrm>
             <a:off x="365760" y="109800"/>
-            <a:ext cx="8228160" cy="711720"/>
+            <a:ext cx="8227800" cy="711360"/>
           </a:xfrm>
           <a:prstGeom prst="rect">
             <a:avLst/>
@@ -10250,7 +10130,7 @@
         <p:spPr>
           <a:xfrm>
             <a:off x="320040" y="1005840"/>
-            <a:ext cx="5484960" cy="3839040"/>
+            <a:ext cx="5484600" cy="3838680"/>
           </a:xfrm>
           <a:prstGeom prst="rect">
             <a:avLst/>
@@ -10281,7 +10161,7 @@
         <p:spPr>
           <a:xfrm>
             <a:off x="457200" y="1097280"/>
-            <a:ext cx="5302080" cy="3656160"/>
+            <a:ext cx="5301720" cy="3655800"/>
           </a:xfrm>
           <a:prstGeom prst="rect">
             <a:avLst/>
@@ -10839,7 +10719,7 @@
         <p:spPr>
           <a:xfrm>
             <a:off x="5943600" y="1005840"/>
-            <a:ext cx="2924640" cy="1827360"/>
+            <a:ext cx="2924280" cy="1827000"/>
           </a:xfrm>
           <a:prstGeom prst="rect">
             <a:avLst/>
@@ -10870,7 +10750,7 @@
         <p:spPr>
           <a:xfrm>
             <a:off x="5943600" y="1005840"/>
-            <a:ext cx="2924640" cy="364320"/>
+            <a:ext cx="2924280" cy="363960"/>
           </a:xfrm>
           <a:prstGeom prst="rect">
             <a:avLst/>
@@ -10925,7 +10805,7 @@
         <p:spPr>
           <a:xfrm>
             <a:off x="6035040" y="1417320"/>
-            <a:ext cx="2741760" cy="1233000"/>
+            <a:ext cx="2741400" cy="1232640"/>
           </a:xfrm>
           <a:prstGeom prst="rect">
             <a:avLst/>
@@ -10951,7 +10831,7 @@
         <p:spPr>
           <a:xfrm>
             <a:off x="5943600" y="2971800"/>
-            <a:ext cx="2924640" cy="1873080"/>
+            <a:ext cx="2924280" cy="1872720"/>
           </a:xfrm>
           <a:prstGeom prst="rect">
             <a:avLst/>
@@ -10982,7 +10862,7 @@
         <p:spPr>
           <a:xfrm>
             <a:off x="5943600" y="2971800"/>
-            <a:ext cx="2924640" cy="364320"/>
+            <a:ext cx="2924280" cy="363960"/>
           </a:xfrm>
           <a:prstGeom prst="rect">
             <a:avLst/>
@@ -11037,7 +10917,7 @@
         <p:spPr>
           <a:xfrm>
             <a:off x="6080760" y="3401640"/>
-            <a:ext cx="2650320" cy="345960"/>
+            <a:ext cx="2649960" cy="345600"/>
           </a:xfrm>
           <a:prstGeom prst="rect">
             <a:avLst/>
@@ -11092,7 +10972,7 @@
         <p:spPr>
           <a:xfrm>
             <a:off x="6080760" y="3785760"/>
-            <a:ext cx="2650320" cy="345960"/>
+            <a:ext cx="2649960" cy="345600"/>
           </a:xfrm>
           <a:prstGeom prst="rect">
             <a:avLst/>
@@ -11147,7 +11027,7 @@
         <p:spPr>
           <a:xfrm>
             <a:off x="6080760" y="4169520"/>
-            <a:ext cx="2650320" cy="345960"/>
+            <a:ext cx="2649960" cy="345600"/>
           </a:xfrm>
           <a:prstGeom prst="rect">
             <a:avLst/>
@@ -11202,7 +11082,7 @@
         <p:spPr>
           <a:xfrm>
             <a:off x="6080760" y="4553640"/>
-            <a:ext cx="2650320" cy="345960"/>
+            <a:ext cx="2649960" cy="345600"/>
           </a:xfrm>
           <a:prstGeom prst="rect">
             <a:avLst/>
@@ -11294,7 +11174,7 @@
         <p:spPr>
           <a:xfrm>
             <a:off x="0" y="0"/>
-            <a:ext cx="163080" cy="5142240"/>
+            <a:ext cx="162720" cy="5141880"/>
           </a:xfrm>
           <a:prstGeom prst="rect">
             <a:avLst/>
@@ -11325,7 +11205,7 @@
         <p:spPr>
           <a:xfrm>
             <a:off x="0" y="0"/>
-            <a:ext cx="9142560" cy="912960"/>
+            <a:ext cx="9142200" cy="912600"/>
           </a:xfrm>
           <a:prstGeom prst="rect">
             <a:avLst/>
@@ -11356,7 +11236,7 @@
         <p:spPr>
           <a:xfrm>
             <a:off x="365760" y="109800"/>
-            <a:ext cx="8228160" cy="711720"/>
+            <a:ext cx="8227800" cy="711360"/>
           </a:xfrm>
           <a:prstGeom prst="rect">
             <a:avLst/>
@@ -11411,7 +11291,7 @@
         <p:spPr>
           <a:xfrm>
             <a:off x="320040" y="1005840"/>
-            <a:ext cx="5484960" cy="3839040"/>
+            <a:ext cx="5484600" cy="3838680"/>
           </a:xfrm>
           <a:prstGeom prst="rect">
             <a:avLst/>
@@ -11442,7 +11322,7 @@
         <p:spPr>
           <a:xfrm>
             <a:off x="457200" y="1097280"/>
-            <a:ext cx="5302080" cy="3656160"/>
+            <a:ext cx="5301720" cy="3655800"/>
           </a:xfrm>
           <a:prstGeom prst="rect">
             <a:avLst/>
@@ -12001,7 +11881,7 @@
         <p:spPr>
           <a:xfrm>
             <a:off x="5943600" y="1005840"/>
-            <a:ext cx="2924640" cy="1370160"/>
+            <a:ext cx="2924280" cy="1369800"/>
           </a:xfrm>
           <a:prstGeom prst="rect">
             <a:avLst/>
@@ -12032,7 +11912,7 @@
         <p:spPr>
           <a:xfrm>
             <a:off x="5943600" y="1005840"/>
-            <a:ext cx="2924640" cy="364320"/>
+            <a:ext cx="2924280" cy="363960"/>
           </a:xfrm>
           <a:prstGeom prst="rect">
             <a:avLst/>
@@ -12087,7 +11967,7 @@
         <p:spPr>
           <a:xfrm>
             <a:off x="6035040" y="1417320"/>
-            <a:ext cx="2741760" cy="821520"/>
+            <a:ext cx="2741400" cy="821160"/>
           </a:xfrm>
           <a:prstGeom prst="rect">
             <a:avLst/>
@@ -12113,7 +11993,7 @@
         <p:spPr>
           <a:xfrm>
             <a:off x="5943600" y="2514600"/>
-            <a:ext cx="2924640" cy="2330280"/>
+            <a:ext cx="2924280" cy="2329920"/>
           </a:xfrm>
           <a:prstGeom prst="rect">
             <a:avLst/>
@@ -12144,7 +12024,7 @@
         <p:spPr>
           <a:xfrm>
             <a:off x="5943600" y="2514600"/>
-            <a:ext cx="2924640" cy="364320"/>
+            <a:ext cx="2924280" cy="363960"/>
           </a:xfrm>
           <a:prstGeom prst="rect">
             <a:avLst/>
@@ -12199,7 +12079,7 @@
         <p:spPr>
           <a:xfrm>
             <a:off x="6080760" y="2944440"/>
-            <a:ext cx="2650320" cy="345960"/>
+            <a:ext cx="2649960" cy="345600"/>
           </a:xfrm>
           <a:prstGeom prst="rect">
             <a:avLst/>
@@ -12264,7 +12144,7 @@
         <p:spPr>
           <a:xfrm>
             <a:off x="6080760" y="3328560"/>
-            <a:ext cx="2650320" cy="345960"/>
+            <a:ext cx="2649960" cy="345600"/>
           </a:xfrm>
           <a:prstGeom prst="rect">
             <a:avLst/>
@@ -12329,7 +12209,7 @@
         <p:spPr>
           <a:xfrm>
             <a:off x="6080760" y="3712320"/>
-            <a:ext cx="2650320" cy="345960"/>
+            <a:ext cx="2649960" cy="345600"/>
           </a:xfrm>
           <a:prstGeom prst="rect">
             <a:avLst/>
@@ -12394,7 +12274,7 @@
         <p:spPr>
           <a:xfrm>
             <a:off x="6080760" y="4096440"/>
-            <a:ext cx="2650320" cy="345960"/>
+            <a:ext cx="2649960" cy="345600"/>
           </a:xfrm>
           <a:prstGeom prst="rect">
             <a:avLst/>
@@ -12459,7 +12339,7 @@
         <p:spPr>
           <a:xfrm>
             <a:off x="6080760" y="4480560"/>
-            <a:ext cx="2650320" cy="345960"/>
+            <a:ext cx="2649960" cy="345600"/>
           </a:xfrm>
           <a:prstGeom prst="rect">
             <a:avLst/>
@@ -12561,7 +12441,7 @@
         <p:spPr>
           <a:xfrm>
             <a:off x="0" y="0"/>
-            <a:ext cx="9142560" cy="5142240"/>
+            <a:ext cx="9142200" cy="5141880"/>
           </a:xfrm>
           <a:prstGeom prst="rect">
             <a:avLst/>
@@ -12592,7 +12472,7 @@
         <p:spPr>
           <a:xfrm>
             <a:off x="5486400" y="0"/>
-            <a:ext cx="4570560" cy="4570560"/>
+            <a:ext cx="4570200" cy="4570200"/>
           </a:xfrm>
           <a:prstGeom prst="ellipse">
             <a:avLst/>
@@ -12627,7 +12507,7 @@
         <p:spPr>
           <a:xfrm>
             <a:off x="-1828800" y="2743200"/>
-            <a:ext cx="4570560" cy="4570560"/>
+            <a:ext cx="4570200" cy="4570200"/>
           </a:xfrm>
           <a:prstGeom prst="ellipse">
             <a:avLst/>
@@ -12662,7 +12542,7 @@
         <p:spPr>
           <a:xfrm>
             <a:off x="640080" y="1645920"/>
-            <a:ext cx="108360" cy="1644480"/>
+            <a:ext cx="108000" cy="1644120"/>
           </a:xfrm>
           <a:prstGeom prst="rect">
             <a:avLst/>
@@ -12693,7 +12573,7 @@
         <p:spPr>
           <a:xfrm>
             <a:off x="914400" y="1554480"/>
-            <a:ext cx="6399360" cy="547200"/>
+            <a:ext cx="6399000" cy="546840"/>
           </a:xfrm>
           <a:prstGeom prst="rect">
             <a:avLst/>
@@ -12748,7 +12628,7 @@
         <p:spPr>
           <a:xfrm>
             <a:off x="914400" y="2011680"/>
-            <a:ext cx="7313760" cy="1370160"/>
+            <a:ext cx="7313400" cy="1369800"/>
           </a:xfrm>
           <a:prstGeom prst="rect">
             <a:avLst/>
@@ -12827,7 +12707,7 @@
         <p:spPr>
           <a:xfrm>
             <a:off x="914400" y="3657600"/>
-            <a:ext cx="7313760" cy="455760"/>
+            <a:ext cx="7313400" cy="455400"/>
           </a:xfrm>
           <a:prstGeom prst="rect">
             <a:avLst/>
@@ -12919,7 +12799,7 @@
         <p:spPr>
           <a:xfrm>
             <a:off x="0" y="0"/>
-            <a:ext cx="163080" cy="5142240"/>
+            <a:ext cx="162720" cy="5141880"/>
           </a:xfrm>
           <a:prstGeom prst="rect">
             <a:avLst/>
@@ -12950,7 +12830,7 @@
         <p:spPr>
           <a:xfrm>
             <a:off x="0" y="0"/>
-            <a:ext cx="9142560" cy="912960"/>
+            <a:ext cx="9142200" cy="912600"/>
           </a:xfrm>
           <a:prstGeom prst="rect">
             <a:avLst/>
@@ -12981,7 +12861,7 @@
         <p:spPr>
           <a:xfrm>
             <a:off x="365760" y="109800"/>
-            <a:ext cx="8228160" cy="711720"/>
+            <a:ext cx="8227800" cy="711360"/>
           </a:xfrm>
           <a:prstGeom prst="rect">
             <a:avLst/>
@@ -13036,7 +12916,7 @@
         <p:spPr>
           <a:xfrm>
             <a:off x="320040" y="1024200"/>
-            <a:ext cx="2376000" cy="1004400"/>
+            <a:ext cx="2375640" cy="1004040"/>
           </a:xfrm>
           <a:prstGeom prst="rect">
             <a:avLst/>
@@ -13067,7 +12947,7 @@
         <p:spPr>
           <a:xfrm>
             <a:off x="320040" y="1024200"/>
-            <a:ext cx="2376000" cy="1004400"/>
+            <a:ext cx="2375640" cy="1004040"/>
           </a:xfrm>
           <a:prstGeom prst="rect">
             <a:avLst/>
@@ -13146,7 +13026,7 @@
         <p:spPr>
           <a:xfrm>
             <a:off x="2743200" y="1298520"/>
-            <a:ext cx="730080" cy="501480"/>
+            <a:ext cx="729720" cy="501120"/>
           </a:xfrm>
           <a:prstGeom prst="rect">
             <a:avLst/>
@@ -13201,7 +13081,7 @@
         <p:spPr>
           <a:xfrm>
             <a:off x="3474720" y="1024200"/>
-            <a:ext cx="2101680" cy="1004400"/>
+            <a:ext cx="2101320" cy="1004040"/>
           </a:xfrm>
           <a:prstGeom prst="rect">
             <a:avLst/>
@@ -13232,7 +13112,7 @@
         <p:spPr>
           <a:xfrm>
             <a:off x="3474720" y="1024200"/>
-            <a:ext cx="2101680" cy="1004400"/>
+            <a:ext cx="2101320" cy="1004040"/>
           </a:xfrm>
           <a:prstGeom prst="rect">
             <a:avLst/>
@@ -13311,7 +13191,7 @@
         <p:spPr>
           <a:xfrm>
             <a:off x="5669280" y="1298520"/>
-            <a:ext cx="730080" cy="501480"/>
+            <a:ext cx="729720" cy="501120"/>
           </a:xfrm>
           <a:prstGeom prst="rect">
             <a:avLst/>
@@ -13366,7 +13246,7 @@
         <p:spPr>
           <a:xfrm>
             <a:off x="6400800" y="1024200"/>
-            <a:ext cx="2421720" cy="1004400"/>
+            <a:ext cx="2421360" cy="1004040"/>
           </a:xfrm>
           <a:prstGeom prst="rect">
             <a:avLst/>
@@ -13397,7 +13277,7 @@
         <p:spPr>
           <a:xfrm>
             <a:off x="6400800" y="1024200"/>
-            <a:ext cx="2421720" cy="1004400"/>
+            <a:ext cx="2421360" cy="1004040"/>
           </a:xfrm>
           <a:prstGeom prst="rect">
             <a:avLst/>
@@ -13476,7 +13356,7 @@
         <p:spPr>
           <a:xfrm>
             <a:off x="320040" y="2240280"/>
-            <a:ext cx="3839040" cy="345960"/>
+            <a:ext cx="3838680" cy="345600"/>
           </a:xfrm>
           <a:prstGeom prst="rect">
             <a:avLst/>
@@ -13531,7 +13411,7 @@
         <p:spPr>
           <a:xfrm>
             <a:off x="411480" y="2697480"/>
-            <a:ext cx="199800" cy="199800"/>
+            <a:ext cx="199440" cy="199440"/>
           </a:xfrm>
           <a:prstGeom prst="ellipse">
             <a:avLst/>
@@ -13562,7 +13442,7 @@
         <p:spPr>
           <a:xfrm>
             <a:off x="731520" y="2633400"/>
-            <a:ext cx="3381840" cy="345960"/>
+            <a:ext cx="3381480" cy="345600"/>
           </a:xfrm>
           <a:prstGeom prst="rect">
             <a:avLst/>
@@ -13617,7 +13497,7 @@
         <p:spPr>
           <a:xfrm>
             <a:off x="411480" y="3200400"/>
-            <a:ext cx="199800" cy="199800"/>
+            <a:ext cx="199440" cy="199440"/>
           </a:xfrm>
           <a:prstGeom prst="ellipse">
             <a:avLst/>
@@ -13648,7 +13528,7 @@
         <p:spPr>
           <a:xfrm>
             <a:off x="731520" y="3136320"/>
-            <a:ext cx="3381840" cy="345960"/>
+            <a:ext cx="3381480" cy="345600"/>
           </a:xfrm>
           <a:prstGeom prst="rect">
             <a:avLst/>
@@ -13703,7 +13583,7 @@
         <p:spPr>
           <a:xfrm>
             <a:off x="411480" y="3703320"/>
-            <a:ext cx="199800" cy="199800"/>
+            <a:ext cx="199440" cy="199440"/>
           </a:xfrm>
           <a:prstGeom prst="ellipse">
             <a:avLst/>
@@ -13734,7 +13614,7 @@
         <p:spPr>
           <a:xfrm>
             <a:off x="731520" y="3639240"/>
-            <a:ext cx="3381840" cy="345960"/>
+            <a:ext cx="3381480" cy="345600"/>
           </a:xfrm>
           <a:prstGeom prst="rect">
             <a:avLst/>
@@ -13789,7 +13669,7 @@
         <p:spPr>
           <a:xfrm>
             <a:off x="4663440" y="2240280"/>
-            <a:ext cx="4113360" cy="345960"/>
+            <a:ext cx="4113000" cy="345600"/>
           </a:xfrm>
           <a:prstGeom prst="rect">
             <a:avLst/>
@@ -13844,7 +13724,7 @@
         <p:spPr>
           <a:xfrm>
             <a:off x="4663440" y="2697480"/>
-            <a:ext cx="4113360" cy="437400"/>
+            <a:ext cx="4113000" cy="437040"/>
           </a:xfrm>
           <a:prstGeom prst="rect">
             <a:avLst/>
@@ -13882,7 +13762,7 @@
         <p:spPr>
           <a:xfrm>
             <a:off x="4663440" y="2697480"/>
-            <a:ext cx="90000" cy="437400"/>
+            <a:ext cx="89640" cy="437040"/>
           </a:xfrm>
           <a:prstGeom prst="rect">
             <a:avLst/>
@@ -13913,7 +13793,7 @@
         <p:spPr>
           <a:xfrm>
             <a:off x="4846320" y="2697480"/>
-            <a:ext cx="3839040" cy="437400"/>
+            <a:ext cx="3838680" cy="437040"/>
           </a:xfrm>
           <a:prstGeom prst="rect">
             <a:avLst/>
@@ -13968,7 +13848,7 @@
         <p:spPr>
           <a:xfrm>
             <a:off x="4663440" y="3246120"/>
-            <a:ext cx="4113360" cy="437400"/>
+            <a:ext cx="4113000" cy="437040"/>
           </a:xfrm>
           <a:prstGeom prst="rect">
             <a:avLst/>
@@ -14006,7 +13886,7 @@
         <p:spPr>
           <a:xfrm>
             <a:off x="4663440" y="3246120"/>
-            <a:ext cx="90000" cy="437400"/>
+            <a:ext cx="89640" cy="437040"/>
           </a:xfrm>
           <a:prstGeom prst="rect">
             <a:avLst/>
@@ -14037,7 +13917,7 @@
         <p:spPr>
           <a:xfrm>
             <a:off x="4846320" y="3246120"/>
-            <a:ext cx="3839040" cy="437400"/>
+            <a:ext cx="3838680" cy="437040"/>
           </a:xfrm>
           <a:prstGeom prst="rect">
             <a:avLst/>
@@ -14092,7 +13972,7 @@
         <p:spPr>
           <a:xfrm>
             <a:off x="4663440" y="3794760"/>
-            <a:ext cx="4113360" cy="437400"/>
+            <a:ext cx="4113000" cy="437040"/>
           </a:xfrm>
           <a:prstGeom prst="rect">
             <a:avLst/>
@@ -14130,7 +14010,7 @@
         <p:spPr>
           <a:xfrm>
             <a:off x="4663440" y="3794760"/>
-            <a:ext cx="90000" cy="437400"/>
+            <a:ext cx="89640" cy="437040"/>
           </a:xfrm>
           <a:prstGeom prst="rect">
             <a:avLst/>
@@ -14161,7 +14041,7 @@
         <p:spPr>
           <a:xfrm>
             <a:off x="4846320" y="3794760"/>
-            <a:ext cx="3839040" cy="437400"/>
+            <a:ext cx="3838680" cy="437040"/>
           </a:xfrm>
           <a:prstGeom prst="rect">
             <a:avLst/>
@@ -14216,7 +14096,7 @@
         <p:spPr>
           <a:xfrm>
             <a:off x="4663440" y="4343400"/>
-            <a:ext cx="4113360" cy="437400"/>
+            <a:ext cx="4113000" cy="437040"/>
           </a:xfrm>
           <a:prstGeom prst="rect">
             <a:avLst/>
@@ -14254,7 +14134,7 @@
         <p:spPr>
           <a:xfrm>
             <a:off x="4663440" y="4343400"/>
-            <a:ext cx="90000" cy="437400"/>
+            <a:ext cx="89640" cy="437040"/>
           </a:xfrm>
           <a:prstGeom prst="rect">
             <a:avLst/>
@@ -14285,7 +14165,7 @@
         <p:spPr>
           <a:xfrm>
             <a:off x="4846320" y="4343400"/>
-            <a:ext cx="3839040" cy="437400"/>
+            <a:ext cx="3838680" cy="437040"/>
           </a:xfrm>
           <a:prstGeom prst="rect">
             <a:avLst/>
@@ -14377,7 +14257,7 @@
         <p:spPr>
           <a:xfrm>
             <a:off x="0" y="0"/>
-            <a:ext cx="163080" cy="5142240"/>
+            <a:ext cx="162720" cy="5141880"/>
           </a:xfrm>
           <a:prstGeom prst="rect">
             <a:avLst/>
@@ -14408,7 +14288,7 @@
         <p:spPr>
           <a:xfrm>
             <a:off x="0" y="0"/>
-            <a:ext cx="9142560" cy="912960"/>
+            <a:ext cx="9142200" cy="912600"/>
           </a:xfrm>
           <a:prstGeom prst="rect">
             <a:avLst/>
@@ -14439,7 +14319,7 @@
         <p:spPr>
           <a:xfrm>
             <a:off x="365760" y="109800"/>
-            <a:ext cx="8228160" cy="711720"/>
+            <a:ext cx="8227800" cy="711360"/>
           </a:xfrm>
           <a:prstGeom prst="rect">
             <a:avLst/>
@@ -14494,7 +14374,7 @@
         <p:spPr>
           <a:xfrm>
             <a:off x="320040" y="1005840"/>
-            <a:ext cx="5484960" cy="3839040"/>
+            <a:ext cx="5484600" cy="3838680"/>
           </a:xfrm>
           <a:prstGeom prst="rect">
             <a:avLst/>
@@ -14525,7 +14405,7 @@
         <p:spPr>
           <a:xfrm>
             <a:off x="457200" y="1097280"/>
-            <a:ext cx="5302080" cy="3656160"/>
+            <a:ext cx="5301720" cy="3655800"/>
           </a:xfrm>
           <a:prstGeom prst="rect">
             <a:avLst/>
@@ -15039,7 +14919,7 @@
         <p:spPr>
           <a:xfrm>
             <a:off x="5943600" y="1005840"/>
-            <a:ext cx="2924640" cy="1827360"/>
+            <a:ext cx="2924280" cy="1827000"/>
           </a:xfrm>
           <a:prstGeom prst="rect">
             <a:avLst/>
@@ -15070,7 +14950,7 @@
         <p:spPr>
           <a:xfrm>
             <a:off x="5943600" y="1005840"/>
-            <a:ext cx="2924640" cy="364320"/>
+            <a:ext cx="2924280" cy="363960"/>
           </a:xfrm>
           <a:prstGeom prst="rect">
             <a:avLst/>
@@ -15125,7 +15005,7 @@
         <p:spPr>
           <a:xfrm>
             <a:off x="6035040" y="1417320"/>
-            <a:ext cx="2741760" cy="1233000"/>
+            <a:ext cx="2741400" cy="1232640"/>
           </a:xfrm>
           <a:prstGeom prst="rect">
             <a:avLst/>
@@ -15252,7 +15132,7 @@
         <p:spPr>
           <a:xfrm>
             <a:off x="5943600" y="2971800"/>
-            <a:ext cx="2924640" cy="1873080"/>
+            <a:ext cx="2924280" cy="1872720"/>
           </a:xfrm>
           <a:prstGeom prst="rect">
             <a:avLst/>
@@ -15283,7 +15163,7 @@
         <p:spPr>
           <a:xfrm>
             <a:off x="5943600" y="2971800"/>
-            <a:ext cx="2924640" cy="364320"/>
+            <a:ext cx="2924280" cy="363960"/>
           </a:xfrm>
           <a:prstGeom prst="rect">
             <a:avLst/>
@@ -15338,7 +15218,7 @@
         <p:spPr>
           <a:xfrm>
             <a:off x="6080760" y="3401640"/>
-            <a:ext cx="2650320" cy="345960"/>
+            <a:ext cx="2649960" cy="345600"/>
           </a:xfrm>
           <a:prstGeom prst="rect">
             <a:avLst/>
@@ -15403,7 +15283,7 @@
         <p:spPr>
           <a:xfrm>
             <a:off x="6080760" y="3803760"/>
-            <a:ext cx="2650320" cy="345960"/>
+            <a:ext cx="2649960" cy="345600"/>
           </a:xfrm>
           <a:prstGeom prst="rect">
             <a:avLst/>
@@ -15468,7 +15348,7 @@
         <p:spPr>
           <a:xfrm>
             <a:off x="6080760" y="4206240"/>
-            <a:ext cx="2650320" cy="345960"/>
+            <a:ext cx="2649960" cy="345600"/>
           </a:xfrm>
           <a:prstGeom prst="rect">
             <a:avLst/>
@@ -15533,7 +15413,7 @@
         <p:spPr>
           <a:xfrm>
             <a:off x="6080760" y="4608720"/>
-            <a:ext cx="2650320" cy="345960"/>
+            <a:ext cx="2649960" cy="345600"/>
           </a:xfrm>
           <a:prstGeom prst="rect">
             <a:avLst/>
@@ -15635,7 +15515,7 @@
         <p:spPr>
           <a:xfrm>
             <a:off x="0" y="0"/>
-            <a:ext cx="163080" cy="5142240"/>
+            <a:ext cx="162720" cy="5141880"/>
           </a:xfrm>
           <a:prstGeom prst="rect">
             <a:avLst/>
@@ -15666,7 +15546,7 @@
         <p:spPr>
           <a:xfrm>
             <a:off x="0" y="0"/>
-            <a:ext cx="9142560" cy="912960"/>
+            <a:ext cx="9142200" cy="912600"/>
           </a:xfrm>
           <a:prstGeom prst="rect">
             <a:avLst/>
@@ -15697,7 +15577,7 @@
         <p:spPr>
           <a:xfrm>
             <a:off x="365760" y="109800"/>
-            <a:ext cx="8228160" cy="711720"/>
+            <a:ext cx="8227800" cy="711360"/>
           </a:xfrm>
           <a:prstGeom prst="rect">
             <a:avLst/>
@@ -15752,7 +15632,7 @@
         <p:spPr>
           <a:xfrm>
             <a:off x="320040" y="1005840"/>
-            <a:ext cx="5484960" cy="3839040"/>
+            <a:ext cx="5484600" cy="3838680"/>
           </a:xfrm>
           <a:prstGeom prst="rect">
             <a:avLst/>
@@ -15783,7 +15663,7 @@
         <p:spPr>
           <a:xfrm>
             <a:off x="457200" y="1097280"/>
-            <a:ext cx="5302080" cy="3656160"/>
+            <a:ext cx="5301720" cy="3655800"/>
           </a:xfrm>
           <a:prstGeom prst="rect">
             <a:avLst/>
@@ -16331,7 +16211,7 @@
         <p:spPr>
           <a:xfrm>
             <a:off x="5943600" y="1005840"/>
-            <a:ext cx="2924640" cy="1918800"/>
+            <a:ext cx="2924280" cy="1918440"/>
           </a:xfrm>
           <a:prstGeom prst="rect">
             <a:avLst/>
@@ -16362,7 +16242,7 @@
         <p:spPr>
           <a:xfrm>
             <a:off x="5943600" y="1005840"/>
-            <a:ext cx="2924640" cy="364320"/>
+            <a:ext cx="2924280" cy="363960"/>
           </a:xfrm>
           <a:prstGeom prst="rect">
             <a:avLst/>
@@ -16417,7 +16297,7 @@
         <p:spPr>
           <a:xfrm>
             <a:off x="6035040" y="1417320"/>
-            <a:ext cx="2741760" cy="1278720"/>
+            <a:ext cx="2741400" cy="1278360"/>
           </a:xfrm>
           <a:prstGeom prst="rect">
             <a:avLst/>
@@ -16443,7 +16323,7 @@
         <p:spPr>
           <a:xfrm>
             <a:off x="5943600" y="3063240"/>
-            <a:ext cx="2924640" cy="1781640"/>
+            <a:ext cx="2924280" cy="1781280"/>
           </a:xfrm>
           <a:prstGeom prst="rect">
             <a:avLst/>
@@ -16474,7 +16354,7 @@
         <p:spPr>
           <a:xfrm>
             <a:off x="5943600" y="3063240"/>
-            <a:ext cx="2924640" cy="364320"/>
+            <a:ext cx="2924280" cy="363960"/>
           </a:xfrm>
           <a:prstGeom prst="rect">
             <a:avLst/>
@@ -16529,7 +16409,7 @@
         <p:spPr>
           <a:xfrm>
             <a:off x="6035040" y="3474720"/>
-            <a:ext cx="2741760" cy="1233000"/>
+            <a:ext cx="2741400" cy="1232640"/>
           </a:xfrm>
           <a:prstGeom prst="rect">
             <a:avLst/>
@@ -16727,7 +16607,7 @@
         <p:spPr>
           <a:xfrm>
             <a:off x="0" y="0"/>
-            <a:ext cx="163080" cy="5142240"/>
+            <a:ext cx="162720" cy="5141880"/>
           </a:xfrm>
           <a:prstGeom prst="rect">
             <a:avLst/>
@@ -16758,7 +16638,7 @@
         <p:spPr>
           <a:xfrm>
             <a:off x="0" y="0"/>
-            <a:ext cx="9142560" cy="912960"/>
+            <a:ext cx="9142200" cy="912600"/>
           </a:xfrm>
           <a:prstGeom prst="rect">
             <a:avLst/>
@@ -16789,7 +16669,7 @@
         <p:spPr>
           <a:xfrm>
             <a:off x="365760" y="109800"/>
-            <a:ext cx="8228160" cy="711720"/>
+            <a:ext cx="8227800" cy="711360"/>
           </a:xfrm>
           <a:prstGeom prst="rect">
             <a:avLst/>
@@ -16844,7 +16724,7 @@
         <p:spPr>
           <a:xfrm>
             <a:off x="320040" y="1005840"/>
-            <a:ext cx="5484960" cy="3839040"/>
+            <a:ext cx="5484600" cy="3838680"/>
           </a:xfrm>
           <a:prstGeom prst="rect">
             <a:avLst/>
@@ -16875,7 +16755,7 @@
         <p:spPr>
           <a:xfrm>
             <a:off x="457200" y="1097280"/>
-            <a:ext cx="5302080" cy="3656160"/>
+            <a:ext cx="5301720" cy="3655800"/>
           </a:xfrm>
           <a:prstGeom prst="rect">
             <a:avLst/>
@@ -17351,7 +17231,7 @@
         <p:spPr>
           <a:xfrm>
             <a:off x="5943600" y="1005840"/>
-            <a:ext cx="2924640" cy="1918800"/>
+            <a:ext cx="2924280" cy="1918440"/>
           </a:xfrm>
           <a:prstGeom prst="rect">
             <a:avLst/>
@@ -17382,7 +17262,7 @@
         <p:spPr>
           <a:xfrm>
             <a:off x="5943600" y="1005840"/>
-            <a:ext cx="2924640" cy="364320"/>
+            <a:ext cx="2924280" cy="363960"/>
           </a:xfrm>
           <a:prstGeom prst="rect">
             <a:avLst/>
@@ -17437,7 +17317,7 @@
         <p:spPr>
           <a:xfrm>
             <a:off x="6035040" y="1417320"/>
-            <a:ext cx="2741760" cy="1233000"/>
+            <a:ext cx="2741400" cy="1232640"/>
           </a:xfrm>
           <a:prstGeom prst="rect">
             <a:avLst/>
@@ -17564,7 +17444,7 @@
         <p:spPr>
           <a:xfrm>
             <a:off x="5943600" y="3063240"/>
-            <a:ext cx="2924640" cy="1781640"/>
+            <a:ext cx="2924280" cy="1781280"/>
           </a:xfrm>
           <a:prstGeom prst="rect">
             <a:avLst/>
@@ -17595,7 +17475,7 @@
         <p:spPr>
           <a:xfrm>
             <a:off x="5943600" y="3063240"/>
-            <a:ext cx="2924640" cy="364320"/>
+            <a:ext cx="2924280" cy="363960"/>
           </a:xfrm>
           <a:prstGeom prst="rect">
             <a:avLst/>
@@ -17650,7 +17530,7 @@
         <p:spPr>
           <a:xfrm>
             <a:off x="6080760" y="3493080"/>
-            <a:ext cx="2650320" cy="318600"/>
+            <a:ext cx="2649960" cy="318240"/>
           </a:xfrm>
           <a:prstGeom prst="rect">
             <a:avLst/>
@@ -17715,7 +17595,7 @@
         <p:spPr>
           <a:xfrm>
             <a:off x="6080760" y="3840480"/>
-            <a:ext cx="2650320" cy="318600"/>
+            <a:ext cx="2649960" cy="318240"/>
           </a:xfrm>
           <a:prstGeom prst="rect">
             <a:avLst/>
@@ -17780,7 +17660,7 @@
         <p:spPr>
           <a:xfrm>
             <a:off x="6080760" y="4187880"/>
-            <a:ext cx="2650320" cy="318600"/>
+            <a:ext cx="2649960" cy="318240"/>
           </a:xfrm>
           <a:prstGeom prst="rect">
             <a:avLst/>
@@ -17845,7 +17725,7 @@
         <p:spPr>
           <a:xfrm>
             <a:off x="6080760" y="4535280"/>
-            <a:ext cx="2650320" cy="318600"/>
+            <a:ext cx="2649960" cy="318240"/>
           </a:xfrm>
           <a:prstGeom prst="rect">
             <a:avLst/>
@@ -17947,7 +17827,7 @@
         <p:spPr>
           <a:xfrm>
             <a:off x="0" y="0"/>
-            <a:ext cx="9142560" cy="5142240"/>
+            <a:ext cx="9142200" cy="5141880"/>
           </a:xfrm>
           <a:prstGeom prst="rect">
             <a:avLst/>
@@ -17978,7 +17858,7 @@
         <p:spPr>
           <a:xfrm>
             <a:off x="0" y="0"/>
-            <a:ext cx="3656160" cy="5142240"/>
+            <a:ext cx="3655800" cy="5141880"/>
           </a:xfrm>
           <a:prstGeom prst="rect">
             <a:avLst/>
@@ -18009,7 +17889,7 @@
         <p:spPr>
           <a:xfrm>
             <a:off x="914400" y="914400"/>
-            <a:ext cx="3656160" cy="3656160"/>
+            <a:ext cx="3655800" cy="3655800"/>
           </a:xfrm>
           <a:prstGeom prst="ellipse">
             <a:avLst/>
@@ -18044,7 +17924,7 @@
         <p:spPr>
           <a:xfrm>
             <a:off x="4114800" y="1645920"/>
-            <a:ext cx="108360" cy="1644480"/>
+            <a:ext cx="108000" cy="1644120"/>
           </a:xfrm>
           <a:prstGeom prst="rect">
             <a:avLst/>
@@ -18075,7 +17955,7 @@
         <p:spPr>
           <a:xfrm>
             <a:off x="4389120" y="1554480"/>
-            <a:ext cx="4570560" cy="547200"/>
+            <a:ext cx="4570200" cy="546840"/>
           </a:xfrm>
           <a:prstGeom prst="rect">
             <a:avLst/>
@@ -18130,7 +18010,7 @@
         <p:spPr>
           <a:xfrm>
             <a:off x="4389120" y="2011680"/>
-            <a:ext cx="4570560" cy="1370160"/>
+            <a:ext cx="4570200" cy="1369800"/>
           </a:xfrm>
           <a:prstGeom prst="rect">
             <a:avLst/>
@@ -18209,7 +18089,7 @@
         <p:spPr>
           <a:xfrm>
             <a:off x="4389120" y="3657600"/>
-            <a:ext cx="4570560" cy="455760"/>
+            <a:ext cx="4570200" cy="455400"/>
           </a:xfrm>
           <a:prstGeom prst="rect">
             <a:avLst/>
@@ -18301,7 +18181,7 @@
         <p:spPr>
           <a:xfrm>
             <a:off x="0" y="0"/>
-            <a:ext cx="163080" cy="5142240"/>
+            <a:ext cx="162720" cy="5141880"/>
           </a:xfrm>
           <a:prstGeom prst="rect">
             <a:avLst/>
@@ -18332,7 +18212,7 @@
         <p:spPr>
           <a:xfrm>
             <a:off x="0" y="0"/>
-            <a:ext cx="9142560" cy="912960"/>
+            <a:ext cx="9142200" cy="912600"/>
           </a:xfrm>
           <a:prstGeom prst="rect">
             <a:avLst/>
@@ -18363,7 +18243,7 @@
         <p:spPr>
           <a:xfrm>
             <a:off x="365760" y="109800"/>
-            <a:ext cx="8228160" cy="711720"/>
+            <a:ext cx="8227800" cy="711360"/>
           </a:xfrm>
           <a:prstGeom prst="rect">
             <a:avLst/>
@@ -18418,7 +18298,7 @@
         <p:spPr>
           <a:xfrm>
             <a:off x="320040" y="1024200"/>
-            <a:ext cx="8502480" cy="547200"/>
+            <a:ext cx="8502120" cy="546840"/>
           </a:xfrm>
           <a:prstGeom prst="rect">
             <a:avLst/>
@@ -18456,7 +18336,7 @@
         <p:spPr>
           <a:xfrm>
             <a:off x="320040" y="1024200"/>
-            <a:ext cx="8502480" cy="547200"/>
+            <a:ext cx="8502120" cy="546840"/>
           </a:xfrm>
           <a:prstGeom prst="rect">
             <a:avLst/>
@@ -18521,7 +18401,7 @@
         <p:spPr>
           <a:xfrm>
             <a:off x="320040" y="1737360"/>
-            <a:ext cx="4159080" cy="1187280"/>
+            <a:ext cx="4158720" cy="1186920"/>
           </a:xfrm>
           <a:prstGeom prst="rect">
             <a:avLst/>
@@ -18559,7 +18439,7 @@
         <p:spPr>
           <a:xfrm>
             <a:off x="457200" y="1938600"/>
-            <a:ext cx="638640" cy="638640"/>
+            <a:ext cx="638280" cy="638280"/>
           </a:xfrm>
           <a:prstGeom prst="ellipse">
             <a:avLst/>
@@ -18590,7 +18470,7 @@
         <p:spPr>
           <a:xfrm>
             <a:off x="457200" y="1938600"/>
-            <a:ext cx="638640" cy="638640"/>
+            <a:ext cx="638280" cy="638280"/>
           </a:xfrm>
           <a:prstGeom prst="rect">
             <a:avLst/>
@@ -18645,7 +18525,7 @@
         <p:spPr>
           <a:xfrm>
             <a:off x="1216080" y="1874520"/>
-            <a:ext cx="3107520" cy="345960"/>
+            <a:ext cx="3107160" cy="345600"/>
           </a:xfrm>
           <a:prstGeom prst="rect">
             <a:avLst/>
@@ -18700,7 +18580,7 @@
         <p:spPr>
           <a:xfrm>
             <a:off x="1216080" y="2240280"/>
-            <a:ext cx="3107520" cy="501480"/>
+            <a:ext cx="3107160" cy="501120"/>
           </a:xfrm>
           <a:prstGeom prst="rect">
             <a:avLst/>
@@ -18755,7 +18635,7 @@
         <p:spPr>
           <a:xfrm>
             <a:off x="4709160" y="1737360"/>
-            <a:ext cx="4159080" cy="1187280"/>
+            <a:ext cx="4158720" cy="1186920"/>
           </a:xfrm>
           <a:prstGeom prst="rect">
             <a:avLst/>
@@ -18793,7 +18673,7 @@
         <p:spPr>
           <a:xfrm>
             <a:off x="4846320" y="1938600"/>
-            <a:ext cx="638640" cy="638640"/>
+            <a:ext cx="638280" cy="638280"/>
           </a:xfrm>
           <a:prstGeom prst="ellipse">
             <a:avLst/>
@@ -18824,7 +18704,7 @@
         <p:spPr>
           <a:xfrm>
             <a:off x="4846320" y="1938600"/>
-            <a:ext cx="638640" cy="638640"/>
+            <a:ext cx="638280" cy="638280"/>
           </a:xfrm>
           <a:prstGeom prst="rect">
             <a:avLst/>
@@ -18879,7 +18759,7 @@
         <p:spPr>
           <a:xfrm>
             <a:off x="5605200" y="1874520"/>
-            <a:ext cx="3107520" cy="345960"/>
+            <a:ext cx="3107160" cy="345600"/>
           </a:xfrm>
           <a:prstGeom prst="rect">
             <a:avLst/>
@@ -18934,7 +18814,7 @@
         <p:spPr>
           <a:xfrm>
             <a:off x="5605200" y="2240280"/>
-            <a:ext cx="3107520" cy="501480"/>
+            <a:ext cx="3107160" cy="501120"/>
           </a:xfrm>
           <a:prstGeom prst="rect">
             <a:avLst/>
@@ -18989,7 +18869,7 @@
         <p:spPr>
           <a:xfrm>
             <a:off x="320040" y="3108960"/>
-            <a:ext cx="4159080" cy="1187280"/>
+            <a:ext cx="4158720" cy="1186920"/>
           </a:xfrm>
           <a:prstGeom prst="rect">
             <a:avLst/>
@@ -19027,7 +18907,7 @@
         <p:spPr>
           <a:xfrm>
             <a:off x="457200" y="3310200"/>
-            <a:ext cx="638640" cy="638640"/>
+            <a:ext cx="638280" cy="638280"/>
           </a:xfrm>
           <a:prstGeom prst="ellipse">
             <a:avLst/>
@@ -19058,7 +18938,7 @@
         <p:spPr>
           <a:xfrm>
             <a:off x="457200" y="3310200"/>
-            <a:ext cx="638640" cy="638640"/>
+            <a:ext cx="638280" cy="638280"/>
           </a:xfrm>
           <a:prstGeom prst="rect">
             <a:avLst/>
@@ -19113,7 +18993,7 @@
         <p:spPr>
           <a:xfrm>
             <a:off x="1216080" y="3246120"/>
-            <a:ext cx="3107520" cy="345960"/>
+            <a:ext cx="3107160" cy="345600"/>
           </a:xfrm>
           <a:prstGeom prst="rect">
             <a:avLst/>
@@ -19168,7 +19048,7 @@
         <p:spPr>
           <a:xfrm>
             <a:off x="1216080" y="3611880"/>
-            <a:ext cx="3107520" cy="501480"/>
+            <a:ext cx="3107160" cy="501120"/>
           </a:xfrm>
           <a:prstGeom prst="rect">
             <a:avLst/>
@@ -19223,7 +19103,7 @@
         <p:spPr>
           <a:xfrm>
             <a:off x="4709160" y="3108960"/>
-            <a:ext cx="4159080" cy="1187280"/>
+            <a:ext cx="4158720" cy="1186920"/>
           </a:xfrm>
           <a:prstGeom prst="rect">
             <a:avLst/>
@@ -19261,7 +19141,7 @@
         <p:spPr>
           <a:xfrm>
             <a:off x="4846320" y="3310200"/>
-            <a:ext cx="638640" cy="638640"/>
+            <a:ext cx="638280" cy="638280"/>
           </a:xfrm>
           <a:prstGeom prst="ellipse">
             <a:avLst/>
@@ -19292,7 +19172,7 @@
         <p:spPr>
           <a:xfrm>
             <a:off x="4846320" y="3310200"/>
-            <a:ext cx="638640" cy="638640"/>
+            <a:ext cx="638280" cy="638280"/>
           </a:xfrm>
           <a:prstGeom prst="rect">
             <a:avLst/>
@@ -19347,7 +19227,7 @@
         <p:spPr>
           <a:xfrm>
             <a:off x="5605200" y="3246120"/>
-            <a:ext cx="3107520" cy="345960"/>
+            <a:ext cx="3107160" cy="345600"/>
           </a:xfrm>
           <a:prstGeom prst="rect">
             <a:avLst/>
@@ -19402,7 +19282,7 @@
         <p:spPr>
           <a:xfrm>
             <a:off x="5605200" y="3611880"/>
-            <a:ext cx="3107520" cy="501480"/>
+            <a:ext cx="3107160" cy="501120"/>
           </a:xfrm>
           <a:prstGeom prst="rect">
             <a:avLst/>
@@ -19494,7 +19374,7 @@
         <p:spPr>
           <a:xfrm>
             <a:off x="0" y="0"/>
-            <a:ext cx="162720" cy="5141880"/>
+            <a:ext cx="162360" cy="5141520"/>
           </a:xfrm>
           <a:prstGeom prst="rect">
             <a:avLst/>
@@ -19525,7 +19405,7 @@
         <p:spPr>
           <a:xfrm>
             <a:off x="0" y="0"/>
-            <a:ext cx="9142200" cy="912600"/>
+            <a:ext cx="9141840" cy="912240"/>
           </a:xfrm>
           <a:prstGeom prst="rect">
             <a:avLst/>
@@ -19556,7 +19436,7 @@
         <p:spPr>
           <a:xfrm>
             <a:off x="365760" y="109800"/>
-            <a:ext cx="8227800" cy="711360"/>
+            <a:ext cx="8227440" cy="711000"/>
           </a:xfrm>
           <a:prstGeom prst="rect">
             <a:avLst/>
@@ -19611,7 +19491,7 @@
         <p:spPr>
           <a:xfrm>
             <a:off x="320040" y="1024200"/>
-            <a:ext cx="8502120" cy="409680"/>
+            <a:ext cx="8501760" cy="409320"/>
           </a:xfrm>
           <a:prstGeom prst="rect">
             <a:avLst/>
@@ -19666,7 +19546,7 @@
         <p:spPr>
           <a:xfrm>
             <a:off x="320040" y="1554480"/>
-            <a:ext cx="2147040" cy="409680"/>
+            <a:ext cx="2146680" cy="409320"/>
           </a:xfrm>
           <a:prstGeom prst="rect">
             <a:avLst/>
@@ -19697,7 +19577,7 @@
         <p:spPr>
           <a:xfrm>
             <a:off x="2468880" y="1554480"/>
-            <a:ext cx="1369800" cy="409680"/>
+            <a:ext cx="1369440" cy="409320"/>
           </a:xfrm>
           <a:prstGeom prst="rect">
             <a:avLst/>
@@ -19728,7 +19608,7 @@
         <p:spPr>
           <a:xfrm>
             <a:off x="3840480" y="1554480"/>
-            <a:ext cx="1552680" cy="409680"/>
+            <a:ext cx="1552320" cy="409320"/>
           </a:xfrm>
           <a:prstGeom prst="rect">
             <a:avLst/>
@@ -19759,7 +19639,7 @@
         <p:spPr>
           <a:xfrm>
             <a:off x="5394960" y="1554480"/>
-            <a:ext cx="1461240" cy="409680"/>
+            <a:ext cx="1460880" cy="409320"/>
           </a:xfrm>
           <a:prstGeom prst="rect">
             <a:avLst/>
@@ -19790,7 +19670,7 @@
         <p:spPr>
           <a:xfrm>
             <a:off x="6858000" y="1554480"/>
-            <a:ext cx="1964160" cy="409680"/>
+            <a:ext cx="1963800" cy="409320"/>
           </a:xfrm>
           <a:prstGeom prst="rect">
             <a:avLst/>
@@ -19821,7 +19701,7 @@
         <p:spPr>
           <a:xfrm>
             <a:off x="320040" y="1554480"/>
-            <a:ext cx="2284200" cy="409680"/>
+            <a:ext cx="2283840" cy="409320"/>
           </a:xfrm>
           <a:prstGeom prst="rect">
             <a:avLst/>
@@ -19876,7 +19756,7 @@
         <p:spPr>
           <a:xfrm>
             <a:off x="6583680" y="1554480"/>
-            <a:ext cx="2284200" cy="409680"/>
+            <a:ext cx="2283840" cy="409320"/>
           </a:xfrm>
           <a:prstGeom prst="rect">
             <a:avLst/>
@@ -19931,7 +19811,7 @@
         <p:spPr>
           <a:xfrm>
             <a:off x="320040" y="2194560"/>
-            <a:ext cx="4158720" cy="1141200"/>
+            <a:ext cx="4158360" cy="1140840"/>
           </a:xfrm>
           <a:prstGeom prst="rect">
             <a:avLst/>
@@ -19969,7 +19849,7 @@
         <p:spPr>
           <a:xfrm>
             <a:off x="320040" y="2194560"/>
-            <a:ext cx="108000" cy="1141200"/>
+            <a:ext cx="107640" cy="1140840"/>
           </a:xfrm>
           <a:prstGeom prst="rect">
             <a:avLst/>
@@ -20000,7 +19880,7 @@
         <p:spPr>
           <a:xfrm>
             <a:off x="548640" y="2286000"/>
-            <a:ext cx="1095480" cy="363960"/>
+            <a:ext cx="1095120" cy="363600"/>
           </a:xfrm>
           <a:prstGeom prst="rect">
             <a:avLst/>
@@ -20055,7 +19935,7 @@
         <p:spPr>
           <a:xfrm>
             <a:off x="1691640" y="2304360"/>
-            <a:ext cx="2649960" cy="345600"/>
+            <a:ext cx="2649600" cy="345240"/>
           </a:xfrm>
           <a:prstGeom prst="rect">
             <a:avLst/>
@@ -20110,7 +19990,7 @@
         <p:spPr>
           <a:xfrm>
             <a:off x="548640" y="2788920"/>
-            <a:ext cx="3747240" cy="409680"/>
+            <a:ext cx="3746880" cy="409320"/>
           </a:xfrm>
           <a:prstGeom prst="rect">
             <a:avLst/>
@@ -20165,7 +20045,7 @@
         <p:spPr>
           <a:xfrm>
             <a:off x="4709160" y="2194560"/>
-            <a:ext cx="4158720" cy="1141200"/>
+            <a:ext cx="4158360" cy="1140840"/>
           </a:xfrm>
           <a:prstGeom prst="rect">
             <a:avLst/>
@@ -20203,7 +20083,7 @@
         <p:spPr>
           <a:xfrm>
             <a:off x="4709160" y="2194560"/>
-            <a:ext cx="108000" cy="1141200"/>
+            <a:ext cx="107640" cy="1140840"/>
           </a:xfrm>
           <a:prstGeom prst="rect">
             <a:avLst/>
@@ -20234,7 +20114,7 @@
         <p:spPr>
           <a:xfrm>
             <a:off x="4937760" y="2286000"/>
-            <a:ext cx="1095480" cy="363960"/>
+            <a:ext cx="1095120" cy="363600"/>
           </a:xfrm>
           <a:prstGeom prst="rect">
             <a:avLst/>
@@ -20289,7 +20169,7 @@
         <p:spPr>
           <a:xfrm>
             <a:off x="6080760" y="2304360"/>
-            <a:ext cx="2649960" cy="345600"/>
+            <a:ext cx="2649600" cy="345240"/>
           </a:xfrm>
           <a:prstGeom prst="rect">
             <a:avLst/>
@@ -20344,7 +20224,7 @@
         <p:spPr>
           <a:xfrm>
             <a:off x="4937760" y="2788920"/>
-            <a:ext cx="3747240" cy="409680"/>
+            <a:ext cx="3746880" cy="409320"/>
           </a:xfrm>
           <a:prstGeom prst="rect">
             <a:avLst/>
@@ -20399,7 +20279,7 @@
         <p:spPr>
           <a:xfrm>
             <a:off x="320040" y="3520440"/>
-            <a:ext cx="4158720" cy="1141200"/>
+            <a:ext cx="4158360" cy="1140840"/>
           </a:xfrm>
           <a:prstGeom prst="rect">
             <a:avLst/>
@@ -20437,7 +20317,7 @@
         <p:spPr>
           <a:xfrm>
             <a:off x="320040" y="3520440"/>
-            <a:ext cx="108000" cy="1141200"/>
+            <a:ext cx="107640" cy="1140840"/>
           </a:xfrm>
           <a:prstGeom prst="rect">
             <a:avLst/>
@@ -20468,7 +20348,7 @@
         <p:spPr>
           <a:xfrm>
             <a:off x="548640" y="3611880"/>
-            <a:ext cx="1095480" cy="363960"/>
+            <a:ext cx="1095120" cy="363600"/>
           </a:xfrm>
           <a:prstGeom prst="rect">
             <a:avLst/>
@@ -20523,7 +20403,7 @@
         <p:spPr>
           <a:xfrm>
             <a:off x="1691640" y="3630240"/>
-            <a:ext cx="2649960" cy="345600"/>
+            <a:ext cx="2649600" cy="345240"/>
           </a:xfrm>
           <a:prstGeom prst="rect">
             <a:avLst/>
@@ -20578,7 +20458,7 @@
         <p:spPr>
           <a:xfrm>
             <a:off x="548640" y="4114800"/>
-            <a:ext cx="3747240" cy="409680"/>
+            <a:ext cx="3746880" cy="409320"/>
           </a:xfrm>
           <a:prstGeom prst="rect">
             <a:avLst/>
@@ -20633,7 +20513,7 @@
         <p:spPr>
           <a:xfrm>
             <a:off x="4709160" y="3520440"/>
-            <a:ext cx="4158720" cy="1141200"/>
+            <a:ext cx="4158360" cy="1140840"/>
           </a:xfrm>
           <a:prstGeom prst="rect">
             <a:avLst/>
@@ -20671,7 +20551,7 @@
         <p:spPr>
           <a:xfrm>
             <a:off x="4709160" y="3520440"/>
-            <a:ext cx="108000" cy="1141200"/>
+            <a:ext cx="107640" cy="1140840"/>
           </a:xfrm>
           <a:prstGeom prst="rect">
             <a:avLst/>
@@ -20702,7 +20582,7 @@
         <p:spPr>
           <a:xfrm>
             <a:off x="4937760" y="3611880"/>
-            <a:ext cx="1095480" cy="363960"/>
+            <a:ext cx="1095120" cy="363600"/>
           </a:xfrm>
           <a:prstGeom prst="rect">
             <a:avLst/>
@@ -20757,7 +20637,7 @@
         <p:spPr>
           <a:xfrm>
             <a:off x="6080760" y="3630240"/>
-            <a:ext cx="2649960" cy="345600"/>
+            <a:ext cx="2649600" cy="345240"/>
           </a:xfrm>
           <a:prstGeom prst="rect">
             <a:avLst/>
@@ -20812,7 +20692,7 @@
         <p:spPr>
           <a:xfrm>
             <a:off x="4937760" y="4114800"/>
-            <a:ext cx="3747240" cy="409680"/>
+            <a:ext cx="3746880" cy="409320"/>
           </a:xfrm>
           <a:prstGeom prst="rect">
             <a:avLst/>
@@ -20904,7 +20784,7 @@
         <p:spPr>
           <a:xfrm>
             <a:off x="0" y="0"/>
-            <a:ext cx="163080" cy="5142240"/>
+            <a:ext cx="162720" cy="5141880"/>
           </a:xfrm>
           <a:prstGeom prst="rect">
             <a:avLst/>
@@ -20935,7 +20815,7 @@
         <p:spPr>
           <a:xfrm>
             <a:off x="0" y="0"/>
-            <a:ext cx="9142560" cy="912960"/>
+            <a:ext cx="9142200" cy="912600"/>
           </a:xfrm>
           <a:prstGeom prst="rect">
             <a:avLst/>
@@ -20966,7 +20846,7 @@
         <p:spPr>
           <a:xfrm>
             <a:off x="365760" y="109800"/>
-            <a:ext cx="8228160" cy="711720"/>
+            <a:ext cx="8227800" cy="711360"/>
           </a:xfrm>
           <a:prstGeom prst="rect">
             <a:avLst/>
@@ -21021,7 +20901,7 @@
         <p:spPr>
           <a:xfrm>
             <a:off x="320040" y="1024200"/>
-            <a:ext cx="8502480" cy="775800"/>
+            <a:ext cx="8502120" cy="775440"/>
           </a:xfrm>
           <a:prstGeom prst="rect">
             <a:avLst/>
@@ -21052,7 +20932,7 @@
         <p:spPr>
           <a:xfrm>
             <a:off x="548640" y="1024200"/>
-            <a:ext cx="1187280" cy="775800"/>
+            <a:ext cx="1186920" cy="775440"/>
           </a:xfrm>
           <a:prstGeom prst="rect">
             <a:avLst/>
@@ -21107,7 +20987,7 @@
         <p:spPr>
           <a:xfrm>
             <a:off x="1828800" y="1024200"/>
-            <a:ext cx="6765120" cy="775800"/>
+            <a:ext cx="6764760" cy="775440"/>
           </a:xfrm>
           <a:prstGeom prst="rect">
             <a:avLst/>
@@ -21162,7 +21042,7 @@
         <p:spPr>
           <a:xfrm>
             <a:off x="320040" y="1993320"/>
-            <a:ext cx="775800" cy="775800"/>
+            <a:ext cx="775440" cy="775440"/>
           </a:xfrm>
           <a:prstGeom prst="ellipse">
             <a:avLst/>
@@ -21193,7 +21073,7 @@
         <p:spPr>
           <a:xfrm>
             <a:off x="320040" y="1993320"/>
-            <a:ext cx="775800" cy="775800"/>
+            <a:ext cx="775440" cy="775440"/>
           </a:xfrm>
           <a:prstGeom prst="rect">
             <a:avLst/>
@@ -21248,7 +21128,7 @@
         <p:spPr>
           <a:xfrm>
             <a:off x="-137160" y="2834640"/>
-            <a:ext cx="1690200" cy="345960"/>
+            <a:ext cx="1689840" cy="345600"/>
           </a:xfrm>
           <a:prstGeom prst="rect">
             <a:avLst/>
@@ -21303,7 +21183,7 @@
         <p:spPr>
           <a:xfrm>
             <a:off x="3200400" y="1993320"/>
-            <a:ext cx="775800" cy="775800"/>
+            <a:ext cx="775440" cy="775440"/>
           </a:xfrm>
           <a:prstGeom prst="ellipse">
             <a:avLst/>
@@ -21334,7 +21214,7 @@
         <p:spPr>
           <a:xfrm>
             <a:off x="3200400" y="1993320"/>
-            <a:ext cx="775800" cy="775800"/>
+            <a:ext cx="775440" cy="775440"/>
           </a:xfrm>
           <a:prstGeom prst="rect">
             <a:avLst/>
@@ -21389,7 +21269,7 @@
         <p:spPr>
           <a:xfrm>
             <a:off x="2743200" y="2834640"/>
-            <a:ext cx="1690200" cy="345960"/>
+            <a:ext cx="1689840" cy="345600"/>
           </a:xfrm>
           <a:prstGeom prst="rect">
             <a:avLst/>
@@ -21444,7 +21324,7 @@
         <p:spPr>
           <a:xfrm>
             <a:off x="6080760" y="1993320"/>
-            <a:ext cx="775800" cy="775800"/>
+            <a:ext cx="775440" cy="775440"/>
           </a:xfrm>
           <a:prstGeom prst="ellipse">
             <a:avLst/>
@@ -21475,7 +21355,7 @@
         <p:spPr>
           <a:xfrm>
             <a:off x="6080760" y="1993320"/>
-            <a:ext cx="775800" cy="775800"/>
+            <a:ext cx="775440" cy="775440"/>
           </a:xfrm>
           <a:prstGeom prst="rect">
             <a:avLst/>
@@ -21530,7 +21410,7 @@
         <p:spPr>
           <a:xfrm>
             <a:off x="5623560" y="2834640"/>
-            <a:ext cx="1690200" cy="345960"/>
+            <a:ext cx="1689840" cy="345600"/>
           </a:xfrm>
           <a:prstGeom prst="rect">
             <a:avLst/>
@@ -21585,7 +21465,7 @@
         <p:spPr>
           <a:xfrm>
             <a:off x="1097280" y="2350080"/>
-            <a:ext cx="2101680" cy="53280"/>
+            <a:ext cx="2101320" cy="52920"/>
           </a:xfrm>
           <a:prstGeom prst="rect">
             <a:avLst/>
@@ -21616,7 +21496,7 @@
         <p:spPr>
           <a:xfrm>
             <a:off x="3977640" y="2350080"/>
-            <a:ext cx="2101680" cy="53280"/>
+            <a:ext cx="2101320" cy="52920"/>
           </a:xfrm>
           <a:prstGeom prst="rect">
             <a:avLst/>
@@ -21647,7 +21527,7 @@
         <p:spPr>
           <a:xfrm>
             <a:off x="320040" y="3337560"/>
-            <a:ext cx="8502480" cy="345960"/>
+            <a:ext cx="8502120" cy="345600"/>
           </a:xfrm>
           <a:prstGeom prst="rect">
             <a:avLst/>
@@ -21702,7 +21582,7 @@
         <p:spPr>
           <a:xfrm>
             <a:off x="320040" y="3749040"/>
-            <a:ext cx="2741760" cy="684360"/>
+            <a:ext cx="2741400" cy="684000"/>
           </a:xfrm>
           <a:prstGeom prst="rect">
             <a:avLst/>
@@ -21740,7 +21620,7 @@
         <p:spPr>
           <a:xfrm>
             <a:off x="320040" y="3749040"/>
-            <a:ext cx="2741760" cy="90000"/>
+            <a:ext cx="2741400" cy="89640"/>
           </a:xfrm>
           <a:prstGeom prst="rect">
             <a:avLst/>
@@ -21771,7 +21651,7 @@
         <p:spPr>
           <a:xfrm>
             <a:off x="320040" y="3840480"/>
-            <a:ext cx="2741760" cy="501480"/>
+            <a:ext cx="2741400" cy="501120"/>
           </a:xfrm>
           <a:prstGeom prst="rect">
             <a:avLst/>
@@ -21826,7 +21706,7 @@
         <p:spPr>
           <a:xfrm>
             <a:off x="3264480" y="3749040"/>
-            <a:ext cx="2741760" cy="684360"/>
+            <a:ext cx="2741400" cy="684000"/>
           </a:xfrm>
           <a:prstGeom prst="rect">
             <a:avLst/>
@@ -21864,7 +21744,7 @@
         <p:spPr>
           <a:xfrm>
             <a:off x="3264480" y="3749040"/>
-            <a:ext cx="2741760" cy="90000"/>
+            <a:ext cx="2741400" cy="89640"/>
           </a:xfrm>
           <a:prstGeom prst="rect">
             <a:avLst/>
@@ -21895,7 +21775,7 @@
         <p:spPr>
           <a:xfrm>
             <a:off x="3264480" y="3840480"/>
-            <a:ext cx="2741760" cy="501480"/>
+            <a:ext cx="2741400" cy="501120"/>
           </a:xfrm>
           <a:prstGeom prst="rect">
             <a:avLst/>
@@ -21950,7 +21830,7 @@
         <p:spPr>
           <a:xfrm>
             <a:off x="6208920" y="3749040"/>
-            <a:ext cx="2741760" cy="684360"/>
+            <a:ext cx="2741400" cy="684000"/>
           </a:xfrm>
           <a:prstGeom prst="rect">
             <a:avLst/>
@@ -21988,7 +21868,7 @@
         <p:spPr>
           <a:xfrm>
             <a:off x="6208920" y="3749040"/>
-            <a:ext cx="2741760" cy="90000"/>
+            <a:ext cx="2741400" cy="89640"/>
           </a:xfrm>
           <a:prstGeom prst="rect">
             <a:avLst/>
@@ -22019,7 +21899,7 @@
         <p:spPr>
           <a:xfrm>
             <a:off x="6208920" y="3840480"/>
-            <a:ext cx="2741760" cy="501480"/>
+            <a:ext cx="2741400" cy="501120"/>
           </a:xfrm>
           <a:prstGeom prst="rect">
             <a:avLst/>
@@ -22074,7 +21954,7 @@
         <p:spPr>
           <a:xfrm>
             <a:off x="320040" y="4544640"/>
-            <a:ext cx="8502480" cy="382680"/>
+            <a:ext cx="8502120" cy="382320"/>
           </a:xfrm>
           <a:prstGeom prst="rect">
             <a:avLst/>
@@ -22166,7 +22046,7 @@
         <p:spPr>
           <a:xfrm>
             <a:off x="0" y="0"/>
-            <a:ext cx="163080" cy="5142240"/>
+            <a:ext cx="162720" cy="5141880"/>
           </a:xfrm>
           <a:prstGeom prst="rect">
             <a:avLst/>
@@ -22197,7 +22077,7 @@
         <p:spPr>
           <a:xfrm>
             <a:off x="0" y="0"/>
-            <a:ext cx="9142560" cy="912960"/>
+            <a:ext cx="9142200" cy="912600"/>
           </a:xfrm>
           <a:prstGeom prst="rect">
             <a:avLst/>
@@ -22228,7 +22108,7 @@
         <p:spPr>
           <a:xfrm>
             <a:off x="365760" y="109800"/>
-            <a:ext cx="8228160" cy="711720"/>
+            <a:ext cx="8227800" cy="711360"/>
           </a:xfrm>
           <a:prstGeom prst="rect">
             <a:avLst/>
@@ -22283,7 +22163,7 @@
         <p:spPr>
           <a:xfrm>
             <a:off x="320040" y="1005840"/>
-            <a:ext cx="5484960" cy="3839040"/>
+            <a:ext cx="5484600" cy="3838680"/>
           </a:xfrm>
           <a:prstGeom prst="rect">
             <a:avLst/>
@@ -22314,7 +22194,7 @@
         <p:spPr>
           <a:xfrm>
             <a:off x="457200" y="1097280"/>
-            <a:ext cx="5302080" cy="3656160"/>
+            <a:ext cx="5301720" cy="3655800"/>
           </a:xfrm>
           <a:prstGeom prst="rect">
             <a:avLst/>
@@ -22831,7 +22711,7 @@
         <p:spPr>
           <a:xfrm>
             <a:off x="5943600" y="1005840"/>
-            <a:ext cx="2924640" cy="3839040"/>
+            <a:ext cx="2924280" cy="3838680"/>
           </a:xfrm>
           <a:prstGeom prst="rect">
             <a:avLst/>
@@ -22862,7 +22742,7 @@
         <p:spPr>
           <a:xfrm>
             <a:off x="5943600" y="1005840"/>
-            <a:ext cx="2924640" cy="364320"/>
+            <a:ext cx="2924280" cy="363960"/>
           </a:xfrm>
           <a:prstGeom prst="rect">
             <a:avLst/>
@@ -22917,7 +22797,7 @@
         <p:spPr>
           <a:xfrm>
             <a:off x="6080760" y="1463040"/>
-            <a:ext cx="730080" cy="501480"/>
+            <a:ext cx="729720" cy="501120"/>
           </a:xfrm>
           <a:prstGeom prst="rect">
             <a:avLst/>
@@ -22972,7 +22852,7 @@
         <p:spPr>
           <a:xfrm>
             <a:off x="6858000" y="1463040"/>
-            <a:ext cx="1827360" cy="501480"/>
+            <a:ext cx="1827000" cy="501120"/>
           </a:xfrm>
           <a:prstGeom prst="rect">
             <a:avLst/>
@@ -23027,7 +22907,7 @@
         <p:spPr>
           <a:xfrm>
             <a:off x="6080760" y="2103120"/>
-            <a:ext cx="730080" cy="501480"/>
+            <a:ext cx="729720" cy="501120"/>
           </a:xfrm>
           <a:prstGeom prst="rect">
             <a:avLst/>
@@ -23082,7 +22962,7 @@
         <p:spPr>
           <a:xfrm>
             <a:off x="6858000" y="2103120"/>
-            <a:ext cx="1827360" cy="501480"/>
+            <a:ext cx="1827000" cy="501120"/>
           </a:xfrm>
           <a:prstGeom prst="rect">
             <a:avLst/>
@@ -23137,7 +23017,7 @@
         <p:spPr>
           <a:xfrm>
             <a:off x="6080760" y="2743200"/>
-            <a:ext cx="730080" cy="501480"/>
+            <a:ext cx="729720" cy="501120"/>
           </a:xfrm>
           <a:prstGeom prst="rect">
             <a:avLst/>
@@ -23192,7 +23072,7 @@
         <p:spPr>
           <a:xfrm>
             <a:off x="6858000" y="2743200"/>
-            <a:ext cx="1827360" cy="501480"/>
+            <a:ext cx="1827000" cy="501120"/>
           </a:xfrm>
           <a:prstGeom prst="rect">
             <a:avLst/>
@@ -23247,7 +23127,7 @@
         <p:spPr>
           <a:xfrm>
             <a:off x="6080760" y="3383280"/>
-            <a:ext cx="730080" cy="501480"/>
+            <a:ext cx="729720" cy="501120"/>
           </a:xfrm>
           <a:prstGeom prst="rect">
             <a:avLst/>
@@ -23302,7 +23182,7 @@
         <p:spPr>
           <a:xfrm>
             <a:off x="6858000" y="3383280"/>
-            <a:ext cx="1827360" cy="501480"/>
+            <a:ext cx="1827000" cy="501120"/>
           </a:xfrm>
           <a:prstGeom prst="rect">
             <a:avLst/>
@@ -23357,7 +23237,7 @@
         <p:spPr>
           <a:xfrm>
             <a:off x="6080760" y="4023360"/>
-            <a:ext cx="730080" cy="501480"/>
+            <a:ext cx="729720" cy="501120"/>
           </a:xfrm>
           <a:prstGeom prst="rect">
             <a:avLst/>
@@ -23412,7 +23292,7 @@
         <p:spPr>
           <a:xfrm>
             <a:off x="6858000" y="4023360"/>
-            <a:ext cx="1827360" cy="501480"/>
+            <a:ext cx="1827000" cy="501120"/>
           </a:xfrm>
           <a:prstGeom prst="rect">
             <a:avLst/>
@@ -23504,7 +23384,7 @@
         <p:spPr>
           <a:xfrm>
             <a:off x="0" y="0"/>
-            <a:ext cx="163080" cy="5142240"/>
+            <a:ext cx="162720" cy="5141880"/>
           </a:xfrm>
           <a:prstGeom prst="rect">
             <a:avLst/>
@@ -23535,7 +23415,7 @@
         <p:spPr>
           <a:xfrm>
             <a:off x="0" y="0"/>
-            <a:ext cx="9142560" cy="912960"/>
+            <a:ext cx="9142200" cy="912600"/>
           </a:xfrm>
           <a:prstGeom prst="rect">
             <a:avLst/>
@@ -23566,7 +23446,7 @@
         <p:spPr>
           <a:xfrm>
             <a:off x="365760" y="109800"/>
-            <a:ext cx="8228160" cy="711720"/>
+            <a:ext cx="8227800" cy="711360"/>
           </a:xfrm>
           <a:prstGeom prst="rect">
             <a:avLst/>
@@ -23621,7 +23501,7 @@
         <p:spPr>
           <a:xfrm>
             <a:off x="320040" y="1005840"/>
-            <a:ext cx="5484960" cy="3839040"/>
+            <a:ext cx="5484600" cy="3838680"/>
           </a:xfrm>
           <a:prstGeom prst="rect">
             <a:avLst/>
@@ -23652,7 +23532,7 @@
         <p:spPr>
           <a:xfrm>
             <a:off x="457200" y="1097280"/>
-            <a:ext cx="5302080" cy="3656160"/>
+            <a:ext cx="5301720" cy="3655800"/>
           </a:xfrm>
           <a:prstGeom prst="rect">
             <a:avLst/>
@@ -24170,7 +24050,7 @@
         <p:spPr>
           <a:xfrm>
             <a:off x="5943600" y="1005840"/>
-            <a:ext cx="2924640" cy="2010240"/>
+            <a:ext cx="2924280" cy="2009880"/>
           </a:xfrm>
           <a:prstGeom prst="rect">
             <a:avLst/>
@@ -24201,7 +24081,7 @@
         <p:spPr>
           <a:xfrm>
             <a:off x="5943600" y="1005840"/>
-            <a:ext cx="2924640" cy="364320"/>
+            <a:ext cx="2924280" cy="363960"/>
           </a:xfrm>
           <a:prstGeom prst="rect">
             <a:avLst/>
@@ -24256,7 +24136,7 @@
         <p:spPr>
           <a:xfrm>
             <a:off x="6035040" y="1417320"/>
-            <a:ext cx="2741760" cy="1415880"/>
+            <a:ext cx="2741400" cy="1415520"/>
           </a:xfrm>
           <a:prstGeom prst="rect">
             <a:avLst/>
@@ -24411,7 +24291,7 @@
         <p:spPr>
           <a:xfrm>
             <a:off x="5943600" y="3154680"/>
-            <a:ext cx="2924640" cy="1690200"/>
+            <a:ext cx="2924280" cy="1689840"/>
           </a:xfrm>
           <a:prstGeom prst="rect">
             <a:avLst/>
@@ -24442,7 +24322,7 @@
         <p:spPr>
           <a:xfrm>
             <a:off x="5943600" y="3154680"/>
-            <a:ext cx="2924640" cy="364320"/>
+            <a:ext cx="2924280" cy="363960"/>
           </a:xfrm>
           <a:prstGeom prst="rect">
             <a:avLst/>
@@ -24497,7 +24377,7 @@
         <p:spPr>
           <a:xfrm>
             <a:off x="6080760" y="3584520"/>
-            <a:ext cx="2650320" cy="291240"/>
+            <a:ext cx="2649960" cy="290880"/>
           </a:xfrm>
           <a:prstGeom prst="rect">
             <a:avLst/>
@@ -24552,7 +24432,7 @@
         <p:spPr>
           <a:xfrm>
             <a:off x="6080760" y="3904560"/>
-            <a:ext cx="2650320" cy="291240"/>
+            <a:ext cx="2649960" cy="290880"/>
           </a:xfrm>
           <a:prstGeom prst="rect">
             <a:avLst/>
@@ -24607,7 +24487,7 @@
         <p:spPr>
           <a:xfrm>
             <a:off x="6080760" y="4224600"/>
-            <a:ext cx="2650320" cy="291240"/>
+            <a:ext cx="2649960" cy="290880"/>
           </a:xfrm>
           <a:prstGeom prst="rect">
             <a:avLst/>
@@ -24662,7 +24542,7 @@
         <p:spPr>
           <a:xfrm>
             <a:off x="6080760" y="4544640"/>
-            <a:ext cx="2650320" cy="291240"/>
+            <a:ext cx="2649960" cy="290880"/>
           </a:xfrm>
           <a:prstGeom prst="rect">
             <a:avLst/>
@@ -24754,7 +24634,7 @@
         <p:spPr>
           <a:xfrm>
             <a:off x="0" y="0"/>
-            <a:ext cx="163080" cy="5142240"/>
+            <a:ext cx="162720" cy="5141880"/>
           </a:xfrm>
           <a:prstGeom prst="rect">
             <a:avLst/>
@@ -24785,7 +24665,7 @@
         <p:spPr>
           <a:xfrm>
             <a:off x="0" y="0"/>
-            <a:ext cx="9142560" cy="912960"/>
+            <a:ext cx="9142200" cy="912600"/>
           </a:xfrm>
           <a:prstGeom prst="rect">
             <a:avLst/>
@@ -24816,7 +24696,7 @@
         <p:spPr>
           <a:xfrm>
             <a:off x="365760" y="109800"/>
-            <a:ext cx="8228160" cy="711720"/>
+            <a:ext cx="8227800" cy="711360"/>
           </a:xfrm>
           <a:prstGeom prst="rect">
             <a:avLst/>
@@ -24871,7 +24751,7 @@
         <p:spPr>
           <a:xfrm>
             <a:off x="320040" y="1005840"/>
-            <a:ext cx="5484960" cy="3839040"/>
+            <a:ext cx="5484600" cy="3838680"/>
           </a:xfrm>
           <a:prstGeom prst="rect">
             <a:avLst/>
@@ -24902,7 +24782,7 @@
         <p:spPr>
           <a:xfrm>
             <a:off x="457200" y="1097280"/>
-            <a:ext cx="5302080" cy="3656160"/>
+            <a:ext cx="5301720" cy="3655800"/>
           </a:xfrm>
           <a:prstGeom prst="rect">
             <a:avLst/>
@@ -25355,7 +25235,7 @@
         <p:spPr>
           <a:xfrm>
             <a:off x="5943600" y="1005840"/>
-            <a:ext cx="2924640" cy="1644480"/>
+            <a:ext cx="2924280" cy="1644120"/>
           </a:xfrm>
           <a:prstGeom prst="rect">
             <a:avLst/>
@@ -25386,7 +25266,7 @@
         <p:spPr>
           <a:xfrm>
             <a:off x="5943600" y="1005840"/>
-            <a:ext cx="2924640" cy="345960"/>
+            <a:ext cx="2924280" cy="345600"/>
           </a:xfrm>
           <a:prstGeom prst="rect">
             <a:avLst/>
@@ -25441,7 +25321,7 @@
         <p:spPr>
           <a:xfrm>
             <a:off x="6035040" y="1389960"/>
-            <a:ext cx="2741760" cy="775800"/>
+            <a:ext cx="2741400" cy="775440"/>
           </a:xfrm>
           <a:prstGeom prst="rect">
             <a:avLst/>
@@ -25510,7 +25390,7 @@
         <p:spPr>
           <a:xfrm>
             <a:off x="5943600" y="2788920"/>
-            <a:ext cx="2924640" cy="1827360"/>
+            <a:ext cx="2924280" cy="1827000"/>
           </a:xfrm>
           <a:prstGeom prst="rect">
             <a:avLst/>
@@ -25541,7 +25421,7 @@
         <p:spPr>
           <a:xfrm>
             <a:off x="5943600" y="2788920"/>
-            <a:ext cx="2924640" cy="345960"/>
+            <a:ext cx="2924280" cy="345600"/>
           </a:xfrm>
           <a:prstGeom prst="rect">
             <a:avLst/>
@@ -25596,7 +25476,7 @@
         <p:spPr>
           <a:xfrm>
             <a:off x="6035040" y="3173040"/>
-            <a:ext cx="2741760" cy="1187280"/>
+            <a:ext cx="2741400" cy="1186920"/>
           </a:xfrm>
           <a:prstGeom prst="rect">
             <a:avLst/>
@@ -25659,7 +25539,7 @@
         <p:spPr>
           <a:xfrm>
             <a:off x="0" y="0"/>
-            <a:ext cx="163080" cy="5142240"/>
+            <a:ext cx="162720" cy="5141880"/>
           </a:xfrm>
           <a:prstGeom prst="rect">
             <a:avLst/>
@@ -25690,7 +25570,7 @@
         <p:spPr>
           <a:xfrm>
             <a:off x="0" y="0"/>
-            <a:ext cx="9142560" cy="912960"/>
+            <a:ext cx="9142200" cy="912600"/>
           </a:xfrm>
           <a:prstGeom prst="rect">
             <a:avLst/>
@@ -25721,7 +25601,7 @@
         <p:spPr>
           <a:xfrm>
             <a:off x="365760" y="109800"/>
-            <a:ext cx="8228160" cy="711720"/>
+            <a:ext cx="8227800" cy="711360"/>
           </a:xfrm>
           <a:prstGeom prst="rect">
             <a:avLst/>
@@ -25776,7 +25656,7 @@
         <p:spPr>
           <a:xfrm>
             <a:off x="320040" y="1024200"/>
-            <a:ext cx="8502480" cy="592920"/>
+            <a:ext cx="8502120" cy="592560"/>
           </a:xfrm>
           <a:prstGeom prst="rect">
             <a:avLst/>
@@ -25814,7 +25694,7 @@
         <p:spPr>
           <a:xfrm>
             <a:off x="320040" y="1024200"/>
-            <a:ext cx="8502480" cy="592920"/>
+            <a:ext cx="8502120" cy="592560"/>
           </a:xfrm>
           <a:prstGeom prst="rect">
             <a:avLst/>
@@ -25889,7 +25769,7 @@
         <p:spPr>
           <a:xfrm>
             <a:off x="320040" y="1755720"/>
-            <a:ext cx="2741760" cy="2193120"/>
+            <a:ext cx="2741400" cy="2192760"/>
           </a:xfrm>
           <a:prstGeom prst="rect">
             <a:avLst/>
@@ -25927,7 +25807,7 @@
         <p:spPr>
           <a:xfrm>
             <a:off x="320040" y="1755720"/>
-            <a:ext cx="2741760" cy="455760"/>
+            <a:ext cx="2741400" cy="455400"/>
           </a:xfrm>
           <a:prstGeom prst="rect">
             <a:avLst/>
@@ -25958,7 +25838,7 @@
         <p:spPr>
           <a:xfrm>
             <a:off x="320040" y="1755720"/>
-            <a:ext cx="2741760" cy="455760"/>
+            <a:ext cx="2741400" cy="455400"/>
           </a:xfrm>
           <a:prstGeom prst="rect">
             <a:avLst/>
@@ -26023,7 +25903,7 @@
         <p:spPr>
           <a:xfrm>
             <a:off x="457200" y="2286000"/>
-            <a:ext cx="2467440" cy="1461600"/>
+            <a:ext cx="2467080" cy="1461240"/>
           </a:xfrm>
           <a:prstGeom prst="rect">
             <a:avLst/>
@@ -26078,7 +25958,7 @@
         <p:spPr>
           <a:xfrm>
             <a:off x="3264480" y="1755720"/>
-            <a:ext cx="2741760" cy="2193120"/>
+            <a:ext cx="2741400" cy="2192760"/>
           </a:xfrm>
           <a:prstGeom prst="rect">
             <a:avLst/>
@@ -26116,7 +25996,7 @@
         <p:spPr>
           <a:xfrm>
             <a:off x="3264480" y="1755720"/>
-            <a:ext cx="2741760" cy="455760"/>
+            <a:ext cx="2741400" cy="455400"/>
           </a:xfrm>
           <a:prstGeom prst="rect">
             <a:avLst/>
@@ -26147,7 +26027,7 @@
         <p:spPr>
           <a:xfrm>
             <a:off x="3264480" y="1755720"/>
-            <a:ext cx="2741760" cy="455760"/>
+            <a:ext cx="2741400" cy="455400"/>
           </a:xfrm>
           <a:prstGeom prst="rect">
             <a:avLst/>
@@ -26212,7 +26092,7 @@
         <p:spPr>
           <a:xfrm>
             <a:off x="3401640" y="2286000"/>
-            <a:ext cx="2467440" cy="1461600"/>
+            <a:ext cx="2467080" cy="1461240"/>
           </a:xfrm>
           <a:prstGeom prst="rect">
             <a:avLst/>
@@ -26267,7 +26147,7 @@
         <p:spPr>
           <a:xfrm>
             <a:off x="6208920" y="1755720"/>
-            <a:ext cx="2741760" cy="2193120"/>
+            <a:ext cx="2741400" cy="2192760"/>
           </a:xfrm>
           <a:prstGeom prst="rect">
             <a:avLst/>
@@ -26305,7 +26185,7 @@
         <p:spPr>
           <a:xfrm>
             <a:off x="6208920" y="1755720"/>
-            <a:ext cx="2741760" cy="455760"/>
+            <a:ext cx="2741400" cy="455400"/>
           </a:xfrm>
           <a:prstGeom prst="rect">
             <a:avLst/>
@@ -26336,7 +26216,7 @@
         <p:spPr>
           <a:xfrm>
             <a:off x="6208920" y="1755720"/>
-            <a:ext cx="2741760" cy="455760"/>
+            <a:ext cx="2741400" cy="455400"/>
           </a:xfrm>
           <a:prstGeom prst="rect">
             <a:avLst/>
@@ -26401,7 +26281,7 @@
         <p:spPr>
           <a:xfrm>
             <a:off x="6346080" y="2286000"/>
-            <a:ext cx="2467440" cy="1461600"/>
+            <a:ext cx="2467080" cy="1461240"/>
           </a:xfrm>
           <a:prstGeom prst="rect">
             <a:avLst/>
@@ -26456,7 +26336,7 @@
         <p:spPr>
           <a:xfrm>
             <a:off x="320040" y="4096440"/>
-            <a:ext cx="8502480" cy="821520"/>
+            <a:ext cx="8502120" cy="821160"/>
           </a:xfrm>
           <a:prstGeom prst="rect">
             <a:avLst/>
@@ -26487,7 +26367,7 @@
         <p:spPr>
           <a:xfrm>
             <a:off x="457200" y="4096440"/>
-            <a:ext cx="8228160" cy="821520"/>
+            <a:ext cx="8227800" cy="821160"/>
           </a:xfrm>
           <a:prstGeom prst="rect">
             <a:avLst/>
@@ -26599,7 +26479,7 @@
         <p:spPr>
           <a:xfrm>
             <a:off x="0" y="0"/>
-            <a:ext cx="163080" cy="5142240"/>
+            <a:ext cx="162720" cy="5141880"/>
           </a:xfrm>
           <a:prstGeom prst="rect">
             <a:avLst/>
@@ -26630,7 +26510,7 @@
         <p:spPr>
           <a:xfrm>
             <a:off x="0" y="0"/>
-            <a:ext cx="9142560" cy="912960"/>
+            <a:ext cx="9142200" cy="912600"/>
           </a:xfrm>
           <a:prstGeom prst="rect">
             <a:avLst/>
@@ -26661,7 +26541,7 @@
         <p:spPr>
           <a:xfrm>
             <a:off x="365760" y="109800"/>
-            <a:ext cx="8228160" cy="711720"/>
+            <a:ext cx="8227800" cy="711360"/>
           </a:xfrm>
           <a:prstGeom prst="rect">
             <a:avLst/>
@@ -26716,7 +26596,7 @@
         <p:spPr>
           <a:xfrm>
             <a:off x="320040" y="1005840"/>
-            <a:ext cx="5484960" cy="3839040"/>
+            <a:ext cx="5484600" cy="3838680"/>
           </a:xfrm>
           <a:prstGeom prst="rect">
             <a:avLst/>
@@ -26747,7 +26627,7 @@
         <p:spPr>
           <a:xfrm>
             <a:off x="457200" y="1097280"/>
-            <a:ext cx="5302080" cy="3656160"/>
+            <a:ext cx="5301720" cy="3655800"/>
           </a:xfrm>
           <a:prstGeom prst="rect">
             <a:avLst/>
@@ -27220,7 +27100,7 @@
         <p:spPr>
           <a:xfrm>
             <a:off x="5943600" y="1005840"/>
-            <a:ext cx="2924640" cy="2010240"/>
+            <a:ext cx="2924280" cy="2009880"/>
           </a:xfrm>
           <a:prstGeom prst="rect">
             <a:avLst/>
@@ -27251,7 +27131,7 @@
         <p:spPr>
           <a:xfrm>
             <a:off x="5943600" y="1005840"/>
-            <a:ext cx="2924640" cy="364320"/>
+            <a:ext cx="2924280" cy="363960"/>
           </a:xfrm>
           <a:prstGeom prst="rect">
             <a:avLst/>
@@ -27306,7 +27186,7 @@
         <p:spPr>
           <a:xfrm>
             <a:off x="6035040" y="1417320"/>
-            <a:ext cx="2741760" cy="1370160"/>
+            <a:ext cx="2741400" cy="1369800"/>
           </a:xfrm>
           <a:prstGeom prst="rect">
             <a:avLst/>
@@ -27332,7 +27212,7 @@
         <p:spPr>
           <a:xfrm>
             <a:off x="5943600" y="3154680"/>
-            <a:ext cx="2924640" cy="1690200"/>
+            <a:ext cx="2924280" cy="1689840"/>
           </a:xfrm>
           <a:prstGeom prst="rect">
             <a:avLst/>
@@ -27363,7 +27243,7 @@
         <p:spPr>
           <a:xfrm>
             <a:off x="5943600" y="3154680"/>
-            <a:ext cx="2924640" cy="364320"/>
+            <a:ext cx="2924280" cy="363960"/>
           </a:xfrm>
           <a:prstGeom prst="rect">
             <a:avLst/>
@@ -27418,7 +27298,7 @@
         <p:spPr>
           <a:xfrm>
             <a:off x="6035040" y="3566160"/>
-            <a:ext cx="2741760" cy="1141560"/>
+            <a:ext cx="2741400" cy="1141200"/>
           </a:xfrm>
           <a:prstGeom prst="rect">
             <a:avLst/>
@@ -27510,7 +27390,7 @@
         <p:spPr>
           <a:xfrm>
             <a:off x="0" y="0"/>
-            <a:ext cx="163080" cy="5142240"/>
+            <a:ext cx="162720" cy="5141880"/>
           </a:xfrm>
           <a:prstGeom prst="rect">
             <a:avLst/>
@@ -27541,7 +27421,7 @@
         <p:spPr>
           <a:xfrm>
             <a:off x="0" y="0"/>
-            <a:ext cx="9142560" cy="912960"/>
+            <a:ext cx="9142200" cy="912600"/>
           </a:xfrm>
           <a:prstGeom prst="rect">
             <a:avLst/>
@@ -27572,7 +27452,7 @@
         <p:spPr>
           <a:xfrm>
             <a:off x="365760" y="109800"/>
-            <a:ext cx="8228160" cy="711720"/>
+            <a:ext cx="8227800" cy="711360"/>
           </a:xfrm>
           <a:prstGeom prst="rect">
             <a:avLst/>
@@ -27627,7 +27507,7 @@
         <p:spPr>
           <a:xfrm>
             <a:off x="320040" y="1005840"/>
-            <a:ext cx="5484960" cy="3839040"/>
+            <a:ext cx="5484600" cy="3838680"/>
           </a:xfrm>
           <a:prstGeom prst="rect">
             <a:avLst/>
@@ -27658,7 +27538,7 @@
         <p:spPr>
           <a:xfrm>
             <a:off x="457200" y="1097280"/>
-            <a:ext cx="5302080" cy="3656160"/>
+            <a:ext cx="5301720" cy="3655800"/>
           </a:xfrm>
           <a:prstGeom prst="rect">
             <a:avLst/>
@@ -28135,7 +28015,7 @@
         <p:spPr>
           <a:xfrm>
             <a:off x="5943600" y="1005840"/>
-            <a:ext cx="2924640" cy="1644480"/>
+            <a:ext cx="2924280" cy="1644120"/>
           </a:xfrm>
           <a:prstGeom prst="rect">
             <a:avLst/>
@@ -28166,7 +28046,7 @@
         <p:spPr>
           <a:xfrm>
             <a:off x="5943600" y="1005840"/>
-            <a:ext cx="2924640" cy="364320"/>
+            <a:ext cx="2924280" cy="363960"/>
           </a:xfrm>
           <a:prstGeom prst="rect">
             <a:avLst/>
@@ -28221,7 +28101,7 @@
         <p:spPr>
           <a:xfrm>
             <a:off x="6035040" y="1417320"/>
-            <a:ext cx="2741760" cy="1095840"/>
+            <a:ext cx="2741400" cy="1095480"/>
           </a:xfrm>
           <a:prstGeom prst="rect">
             <a:avLst/>
@@ -28247,7 +28127,7 @@
         <p:spPr>
           <a:xfrm>
             <a:off x="5943600" y="2788920"/>
-            <a:ext cx="2924640" cy="2055960"/>
+            <a:ext cx="2924280" cy="2055600"/>
           </a:xfrm>
           <a:prstGeom prst="rect">
             <a:avLst/>
@@ -28278,7 +28158,7 @@
         <p:spPr>
           <a:xfrm>
             <a:off x="5943600" y="2788920"/>
-            <a:ext cx="2924640" cy="364320"/>
+            <a:ext cx="2924280" cy="363960"/>
           </a:xfrm>
           <a:prstGeom prst="rect">
             <a:avLst/>
@@ -28333,7 +28213,7 @@
         <p:spPr>
           <a:xfrm>
             <a:off x="6080760" y="3218760"/>
-            <a:ext cx="2650320" cy="345960"/>
+            <a:ext cx="2649960" cy="345600"/>
           </a:xfrm>
           <a:prstGeom prst="rect">
             <a:avLst/>
@@ -28398,7 +28278,7 @@
         <p:spPr>
           <a:xfrm>
             <a:off x="6080760" y="3620880"/>
-            <a:ext cx="2650320" cy="345960"/>
+            <a:ext cx="2649960" cy="345600"/>
           </a:xfrm>
           <a:prstGeom prst="rect">
             <a:avLst/>
@@ -28463,7 +28343,7 @@
         <p:spPr>
           <a:xfrm>
             <a:off x="6080760" y="4023360"/>
-            <a:ext cx="2650320" cy="345960"/>
+            <a:ext cx="2649960" cy="345600"/>
           </a:xfrm>
           <a:prstGeom prst="rect">
             <a:avLst/>
@@ -28528,7 +28408,7 @@
         <p:spPr>
           <a:xfrm>
             <a:off x="6080760" y="4425840"/>
-            <a:ext cx="2650320" cy="345960"/>
+            <a:ext cx="2649960" cy="345600"/>
           </a:xfrm>
           <a:prstGeom prst="rect">
             <a:avLst/>
@@ -28630,7 +28510,7 @@
         <p:spPr>
           <a:xfrm>
             <a:off x="0" y="0"/>
-            <a:ext cx="163080" cy="5142240"/>
+            <a:ext cx="162720" cy="5141880"/>
           </a:xfrm>
           <a:prstGeom prst="rect">
             <a:avLst/>
@@ -28661,7 +28541,7 @@
         <p:spPr>
           <a:xfrm>
             <a:off x="0" y="0"/>
-            <a:ext cx="9142560" cy="912960"/>
+            <a:ext cx="9142200" cy="912600"/>
           </a:xfrm>
           <a:prstGeom prst="rect">
             <a:avLst/>
@@ -28692,7 +28572,7 @@
         <p:spPr>
           <a:xfrm>
             <a:off x="365760" y="109800"/>
-            <a:ext cx="8228160" cy="711720"/>
+            <a:ext cx="8227800" cy="711360"/>
           </a:xfrm>
           <a:prstGeom prst="rect">
             <a:avLst/>
@@ -28747,7 +28627,7 @@
         <p:spPr>
           <a:xfrm>
             <a:off x="320040" y="1005840"/>
-            <a:ext cx="5484960" cy="3839040"/>
+            <a:ext cx="5484600" cy="3838680"/>
           </a:xfrm>
           <a:prstGeom prst="rect">
             <a:avLst/>
@@ -28778,7 +28658,7 @@
         <p:spPr>
           <a:xfrm>
             <a:off x="457200" y="1097280"/>
-            <a:ext cx="5302080" cy="3656160"/>
+            <a:ext cx="5301720" cy="3655800"/>
           </a:xfrm>
           <a:prstGeom prst="rect">
             <a:avLst/>
@@ -29183,7 +29063,7 @@
         <p:spPr>
           <a:xfrm>
             <a:off x="5943600" y="1005840"/>
-            <a:ext cx="2924640" cy="1461600"/>
+            <a:ext cx="2924280" cy="1461240"/>
           </a:xfrm>
           <a:prstGeom prst="rect">
             <a:avLst/>
@@ -29214,7 +29094,7 @@
         <p:spPr>
           <a:xfrm>
             <a:off x="5943600" y="1005840"/>
-            <a:ext cx="2924640" cy="364320"/>
+            <a:ext cx="2924280" cy="363960"/>
           </a:xfrm>
           <a:prstGeom prst="rect">
             <a:avLst/>
@@ -29269,7 +29149,7 @@
         <p:spPr>
           <a:xfrm>
             <a:off x="6035040" y="1417320"/>
-            <a:ext cx="2741760" cy="867240"/>
+            <a:ext cx="2741400" cy="866880"/>
           </a:xfrm>
           <a:prstGeom prst="rect">
             <a:avLst/>
@@ -29295,7 +29175,7 @@
         <p:spPr>
           <a:xfrm>
             <a:off x="5943600" y="2606040"/>
-            <a:ext cx="2924640" cy="2238840"/>
+            <a:ext cx="2924280" cy="2238480"/>
           </a:xfrm>
           <a:prstGeom prst="rect">
             <a:avLst/>
@@ -29326,7 +29206,7 @@
         <p:spPr>
           <a:xfrm>
             <a:off x="5943600" y="2606040"/>
-            <a:ext cx="2924640" cy="364320"/>
+            <a:ext cx="2924280" cy="363960"/>
           </a:xfrm>
           <a:prstGeom prst="rect">
             <a:avLst/>
@@ -29381,7 +29261,7 @@
         <p:spPr>
           <a:xfrm>
             <a:off x="6080760" y="3035880"/>
-            <a:ext cx="2650320" cy="345960"/>
+            <a:ext cx="2649960" cy="345600"/>
           </a:xfrm>
           <a:prstGeom prst="rect">
             <a:avLst/>
@@ -29446,7 +29326,7 @@
         <p:spPr>
           <a:xfrm>
             <a:off x="6080760" y="3420000"/>
-            <a:ext cx="2650320" cy="345960"/>
+            <a:ext cx="2649960" cy="345600"/>
           </a:xfrm>
           <a:prstGeom prst="rect">
             <a:avLst/>
@@ -29511,7 +29391,7 @@
         <p:spPr>
           <a:xfrm>
             <a:off x="6080760" y="3803760"/>
-            <a:ext cx="2650320" cy="345960"/>
+            <a:ext cx="2649960" cy="345600"/>
           </a:xfrm>
           <a:prstGeom prst="rect">
             <a:avLst/>
@@ -29576,7 +29456,7 @@
         <p:spPr>
           <a:xfrm>
             <a:off x="6080760" y="4187880"/>
-            <a:ext cx="2650320" cy="345960"/>
+            <a:ext cx="2649960" cy="345600"/>
           </a:xfrm>
           <a:prstGeom prst="rect">
             <a:avLst/>
@@ -29641,7 +29521,7 @@
         <p:spPr>
           <a:xfrm>
             <a:off x="6080760" y="4572000"/>
-            <a:ext cx="2650320" cy="345960"/>
+            <a:ext cx="2649960" cy="345600"/>
           </a:xfrm>
           <a:prstGeom prst="rect">
             <a:avLst/>
@@ -29743,7 +29623,7 @@
         <p:spPr>
           <a:xfrm>
             <a:off x="0" y="0"/>
-            <a:ext cx="9142560" cy="5142240"/>
+            <a:ext cx="9142200" cy="5141880"/>
           </a:xfrm>
           <a:prstGeom prst="rect">
             <a:avLst/>
@@ -29774,7 +29654,7 @@
         <p:spPr>
           <a:xfrm>
             <a:off x="-1371600" y="-914400"/>
-            <a:ext cx="5484960" cy="5484960"/>
+            <a:ext cx="5484600" cy="5484600"/>
           </a:xfrm>
           <a:prstGeom prst="ellipse">
             <a:avLst/>
@@ -29809,7 +29689,7 @@
         <p:spPr>
           <a:xfrm>
             <a:off x="7315200" y="2743200"/>
-            <a:ext cx="3656160" cy="3656160"/>
+            <a:ext cx="3655800" cy="3655800"/>
           </a:xfrm>
           <a:prstGeom prst="ellipse">
             <a:avLst/>
@@ -29844,7 +29724,7 @@
         <p:spPr>
           <a:xfrm>
             <a:off x="640080" y="1645920"/>
-            <a:ext cx="108360" cy="1644480"/>
+            <a:ext cx="108000" cy="1644120"/>
           </a:xfrm>
           <a:prstGeom prst="rect">
             <a:avLst/>
@@ -29875,7 +29755,7 @@
         <p:spPr>
           <a:xfrm>
             <a:off x="914400" y="1554480"/>
-            <a:ext cx="6399360" cy="547200"/>
+            <a:ext cx="6399000" cy="546840"/>
           </a:xfrm>
           <a:prstGeom prst="rect">
             <a:avLst/>
@@ -29930,7 +29810,7 @@
         <p:spPr>
           <a:xfrm>
             <a:off x="914400" y="2011680"/>
-            <a:ext cx="7313760" cy="1370160"/>
+            <a:ext cx="7313400" cy="1369800"/>
           </a:xfrm>
           <a:prstGeom prst="rect">
             <a:avLst/>
@@ -30009,7 +29889,7 @@
         <p:spPr>
           <a:xfrm>
             <a:off x="914400" y="3657600"/>
-            <a:ext cx="7313760" cy="455760"/>
+            <a:ext cx="7313400" cy="455400"/>
           </a:xfrm>
           <a:prstGeom prst="rect">
             <a:avLst/>
@@ -30101,7 +29981,7 @@
         <p:spPr>
           <a:xfrm>
             <a:off x="0" y="0"/>
-            <a:ext cx="163080" cy="5142240"/>
+            <a:ext cx="162720" cy="5141880"/>
           </a:xfrm>
           <a:prstGeom prst="rect">
             <a:avLst/>
@@ -30132,7 +30012,7 @@
         <p:spPr>
           <a:xfrm>
             <a:off x="0" y="0"/>
-            <a:ext cx="9142560" cy="912960"/>
+            <a:ext cx="9142200" cy="912600"/>
           </a:xfrm>
           <a:prstGeom prst="rect">
             <a:avLst/>
@@ -30163,7 +30043,7 @@
         <p:spPr>
           <a:xfrm>
             <a:off x="365760" y="109800"/>
-            <a:ext cx="8228160" cy="711720"/>
+            <a:ext cx="8227800" cy="711360"/>
           </a:xfrm>
           <a:prstGeom prst="rect">
             <a:avLst/>
@@ -30218,7 +30098,7 @@
         <p:spPr>
           <a:xfrm>
             <a:off x="320040" y="1024200"/>
-            <a:ext cx="8502480" cy="501480"/>
+            <a:ext cx="8502120" cy="501120"/>
           </a:xfrm>
           <a:prstGeom prst="rect">
             <a:avLst/>
@@ -30273,7 +30153,7 @@
         <p:spPr>
           <a:xfrm>
             <a:off x="320040" y="1645920"/>
-            <a:ext cx="2741760" cy="1918800"/>
+            <a:ext cx="2741400" cy="1918440"/>
           </a:xfrm>
           <a:prstGeom prst="rect">
             <a:avLst/>
@@ -30311,7 +30191,7 @@
         <p:spPr>
           <a:xfrm>
             <a:off x="320040" y="1645920"/>
-            <a:ext cx="2741760" cy="455760"/>
+            <a:ext cx="2741400" cy="455400"/>
           </a:xfrm>
           <a:prstGeom prst="rect">
             <a:avLst/>
@@ -30342,7 +30222,7 @@
         <p:spPr>
           <a:xfrm>
             <a:off x="320040" y="1645920"/>
-            <a:ext cx="2741760" cy="455760"/>
+            <a:ext cx="2741400" cy="455400"/>
           </a:xfrm>
           <a:prstGeom prst="rect">
             <a:avLst/>
@@ -30397,7 +30277,7 @@
         <p:spPr>
           <a:xfrm>
             <a:off x="457200" y="2176200"/>
-            <a:ext cx="2467440" cy="318600"/>
+            <a:ext cx="2467080" cy="318240"/>
           </a:xfrm>
           <a:prstGeom prst="rect">
             <a:avLst/>
@@ -30452,7 +30332,7 @@
         <p:spPr>
           <a:xfrm>
             <a:off x="457200" y="2514600"/>
-            <a:ext cx="2467440" cy="821520"/>
+            <a:ext cx="2467080" cy="821160"/>
           </a:xfrm>
           <a:prstGeom prst="rect">
             <a:avLst/>
@@ -30507,7 +30387,7 @@
         <p:spPr>
           <a:xfrm>
             <a:off x="3264480" y="1645920"/>
-            <a:ext cx="2741760" cy="1918800"/>
+            <a:ext cx="2741400" cy="1918440"/>
           </a:xfrm>
           <a:prstGeom prst="rect">
             <a:avLst/>
@@ -30545,7 +30425,7 @@
         <p:spPr>
           <a:xfrm>
             <a:off x="3264480" y="1645920"/>
-            <a:ext cx="2741760" cy="455760"/>
+            <a:ext cx="2741400" cy="455400"/>
           </a:xfrm>
           <a:prstGeom prst="rect">
             <a:avLst/>
@@ -30576,7 +30456,7 @@
         <p:spPr>
           <a:xfrm>
             <a:off x="3264480" y="1645920"/>
-            <a:ext cx="2741760" cy="455760"/>
+            <a:ext cx="2741400" cy="455400"/>
           </a:xfrm>
           <a:prstGeom prst="rect">
             <a:avLst/>
@@ -30631,7 +30511,7 @@
         <p:spPr>
           <a:xfrm>
             <a:off x="3401640" y="2176200"/>
-            <a:ext cx="2467440" cy="318600"/>
+            <a:ext cx="2467080" cy="318240"/>
           </a:xfrm>
           <a:prstGeom prst="rect">
             <a:avLst/>
@@ -30686,7 +30566,7 @@
         <p:spPr>
           <a:xfrm>
             <a:off x="3401640" y="2514600"/>
-            <a:ext cx="2467440" cy="821520"/>
+            <a:ext cx="2467080" cy="821160"/>
           </a:xfrm>
           <a:prstGeom prst="rect">
             <a:avLst/>
@@ -30741,7 +30621,7 @@
         <p:spPr>
           <a:xfrm>
             <a:off x="6208920" y="1645920"/>
-            <a:ext cx="2741760" cy="1918800"/>
+            <a:ext cx="2741400" cy="1918440"/>
           </a:xfrm>
           <a:prstGeom prst="rect">
             <a:avLst/>
@@ -30779,7 +30659,7 @@
         <p:spPr>
           <a:xfrm>
             <a:off x="6208920" y="1645920"/>
-            <a:ext cx="2741760" cy="455760"/>
+            <a:ext cx="2741400" cy="455400"/>
           </a:xfrm>
           <a:prstGeom prst="rect">
             <a:avLst/>
@@ -30810,7 +30690,7 @@
         <p:spPr>
           <a:xfrm>
             <a:off x="6208920" y="1645920"/>
-            <a:ext cx="2741760" cy="455760"/>
+            <a:ext cx="2741400" cy="455400"/>
           </a:xfrm>
           <a:prstGeom prst="rect">
             <a:avLst/>
@@ -30865,7 +30745,7 @@
         <p:spPr>
           <a:xfrm>
             <a:off x="6346080" y="2176200"/>
-            <a:ext cx="2467440" cy="318600"/>
+            <a:ext cx="2467080" cy="318240"/>
           </a:xfrm>
           <a:prstGeom prst="rect">
             <a:avLst/>
@@ -30920,7 +30800,7 @@
         <p:spPr>
           <a:xfrm>
             <a:off x="6346080" y="2514600"/>
-            <a:ext cx="2467440" cy="821520"/>
+            <a:ext cx="2467080" cy="821160"/>
           </a:xfrm>
           <a:prstGeom prst="rect">
             <a:avLst/>
@@ -30975,7 +30855,7 @@
         <p:spPr>
           <a:xfrm>
             <a:off x="320040" y="3739320"/>
-            <a:ext cx="8502480" cy="1187280"/>
+            <a:ext cx="8502120" cy="1186920"/>
           </a:xfrm>
           <a:prstGeom prst="rect">
             <a:avLst/>
@@ -31006,7 +30886,7 @@
         <p:spPr>
           <a:xfrm>
             <a:off x="548640" y="3749040"/>
-            <a:ext cx="1827360" cy="455760"/>
+            <a:ext cx="1827000" cy="455400"/>
           </a:xfrm>
           <a:prstGeom prst="rect">
             <a:avLst/>
@@ -31071,7 +30951,7 @@
         <p:spPr>
           <a:xfrm>
             <a:off x="2286000" y="3749040"/>
-            <a:ext cx="2741760" cy="455760"/>
+            <a:ext cx="2741400" cy="455400"/>
           </a:xfrm>
           <a:prstGeom prst="rect">
             <a:avLst/>
@@ -31126,7 +31006,7 @@
         <p:spPr>
           <a:xfrm>
             <a:off x="5029200" y="3749040"/>
-            <a:ext cx="3656160" cy="455760"/>
+            <a:ext cx="3655800" cy="455400"/>
           </a:xfrm>
           <a:prstGeom prst="rect">
             <a:avLst/>
@@ -31181,7 +31061,7 @@
         <p:spPr>
           <a:xfrm>
             <a:off x="548640" y="4224600"/>
-            <a:ext cx="8228160" cy="501480"/>
+            <a:ext cx="8227800" cy="501120"/>
           </a:xfrm>
           <a:prstGeom prst="rect">
             <a:avLst/>
